--- a/assets/template_tu_contexto.pptx
+++ b/assets/template_tu_contexto.pptx
@@ -1,41 +1,41 @@
 
 <file path=ppt/presentation.xml><?xml version="1.0" encoding="utf-8"?>
-<p:presentation xmlns:a="http://schemas.openxmlformats.org/drawingml/2006/main" xmlns:r="http://schemas.openxmlformats.org/officeDocument/2006/relationships" xmlns:mc="http://schemas.openxmlformats.org/markup-compatibility/2006" xmlns:mv="urn:schemas-microsoft-com:mac:vml" xmlns:p="http://schemas.openxmlformats.org/presentationml/2006/main" xmlns:c="http://schemas.openxmlformats.org/drawingml/2006/chart" xmlns:dgm="http://schemas.openxmlformats.org/drawingml/2006/diagram" xmlns:o="urn:schemas-microsoft-com:office:office" xmlns:v="urn:schemas-microsoft-com:vml" xmlns:pvml="urn:schemas-microsoft-com:office:powerpoint" xmlns:com="http://schemas.openxmlformats.org/drawingml/2006/compatibility" xmlns:p14="http://schemas.microsoft.com/office/powerpoint/2010/main" xmlns:p15="http://schemas.microsoft.com/office/powerpoint/2012/main" xmlns:ahyp="http://schemas.microsoft.com/office/drawing/2018/hyperlinkcolor" autoCompressPictures="0" embedTrueTypeFonts="1" strictFirstAndLastChars="0" saveSubsetFonts="1">
+<p:presentation xmlns:a="http://schemas.openxmlformats.org/drawingml/2006/main" xmlns:r="http://schemas.openxmlformats.org/officeDocument/2006/relationships" xmlns:p="http://schemas.openxmlformats.org/presentationml/2006/main" strictFirstAndLastChars="0" embedTrueTypeFonts="1" saveSubsetFonts="1" autoCompressPictures="0">
   <p:sldMasterIdLst>
-    <p:sldMasterId id="2147483659" r:id="rId4"/>
+    <p:sldMasterId id="2147483659" r:id="rId1"/>
   </p:sldMasterIdLst>
   <p:notesMasterIdLst>
-    <p:notesMasterId r:id="rId5"/>
+    <p:notesMasterId r:id="rId16"/>
   </p:notesMasterIdLst>
   <p:sldIdLst>
-    <p:sldId id="256" r:id="rId6"/>
-    <p:sldId id="257" r:id="rId7"/>
-    <p:sldId id="258" r:id="rId8"/>
-    <p:sldId id="259" r:id="rId9"/>
-    <p:sldId id="260" r:id="rId10"/>
-    <p:sldId id="261" r:id="rId11"/>
-    <p:sldId id="262" r:id="rId12"/>
-    <p:sldId id="263" r:id="rId13"/>
-    <p:sldId id="264" r:id="rId14"/>
-    <p:sldId id="265" r:id="rId15"/>
-    <p:sldId id="266" r:id="rId16"/>
-    <p:sldId id="267" r:id="rId17"/>
-    <p:sldId id="268" r:id="rId18"/>
-    <p:sldId id="269" r:id="rId19"/>
+    <p:sldId id="256" r:id="rId2"/>
+    <p:sldId id="257" r:id="rId3"/>
+    <p:sldId id="258" r:id="rId4"/>
+    <p:sldId id="259" r:id="rId5"/>
+    <p:sldId id="260" r:id="rId6"/>
+    <p:sldId id="261" r:id="rId7"/>
+    <p:sldId id="262" r:id="rId8"/>
+    <p:sldId id="263" r:id="rId9"/>
+    <p:sldId id="264" r:id="rId10"/>
+    <p:sldId id="265" r:id="rId11"/>
+    <p:sldId id="266" r:id="rId12"/>
+    <p:sldId id="267" r:id="rId13"/>
+    <p:sldId id="268" r:id="rId14"/>
+    <p:sldId id="269" r:id="rId15"/>
   </p:sldIdLst>
-  <p:sldSz cy="18288000" cx="10287000"/>
+  <p:sldSz cx="10287000" cy="18288000"/>
   <p:notesSz cx="6858000" cy="9144000"/>
   <p:embeddedFontLst>
     <p:embeddedFont>
-      <p:font typeface="Public Sans"/>
-      <p:regular r:id="rId20"/>
-      <p:bold r:id="rId21"/>
-      <p:italic r:id="rId22"/>
-      <p:boldItalic r:id="rId23"/>
+      <p:font typeface="Public Sans" panose="020B0604020202020204" charset="0"/>
+      <p:regular r:id="rId17"/>
+      <p:bold r:id="rId18"/>
+      <p:italic r:id="rId19"/>
+      <p:boldItalic r:id="rId20"/>
     </p:embeddedFont>
   </p:embeddedFontLst>
   <p:defaultTextStyle>
-    <a:defPPr lvl="0" marR="0" rtl="0" algn="l">
+    <a:defPPr marR="0" lvl="0" algn="l" rtl="0">
       <a:lnSpc>
         <a:spcPct val="100000"/>
       </a:lnSpc>
@@ -46,7 +46,7 @@
         <a:spcPts val="0"/>
       </a:spcAft>
     </a:defPPr>
-    <a:lvl1pPr lvl="0" marR="0" rtl="0" algn="l">
+    <a:lvl1pPr marR="0" lvl="0" algn="l" rtl="0">
       <a:lnSpc>
         <a:spcPct val="100000"/>
       </a:lnSpc>
@@ -60,7 +60,7 @@
         <a:srgbClr val="000000"/>
       </a:buClr>
       <a:buFont typeface="Arial"/>
-      <a:defRPr b="0" i="0" spc="0" sz="1400" u="none" cap="none" strike="noStrike">
+      <a:defRPr sz="1400" b="0" i="0" u="none" strike="noStrike" cap="none" spc="0">
         <a:solidFill>
           <a:srgbClr val="000000"/>
         </a:solidFill>
@@ -70,7 +70,7 @@
         <a:sym typeface="Arial"/>
       </a:defRPr>
     </a:lvl1pPr>
-    <a:lvl2pPr lvl="1" marR="0" rtl="0" algn="l">
+    <a:lvl2pPr marR="0" lvl="1" algn="l" rtl="0">
       <a:lnSpc>
         <a:spcPct val="100000"/>
       </a:lnSpc>
@@ -84,7 +84,7 @@
         <a:srgbClr val="000000"/>
       </a:buClr>
       <a:buFont typeface="Arial"/>
-      <a:defRPr b="0" i="0" spc="0" sz="1400" u="none" cap="none" strike="noStrike">
+      <a:defRPr sz="1400" b="0" i="0" u="none" strike="noStrike" cap="none" spc="0">
         <a:solidFill>
           <a:srgbClr val="000000"/>
         </a:solidFill>
@@ -94,7 +94,7 @@
         <a:sym typeface="Arial"/>
       </a:defRPr>
     </a:lvl2pPr>
-    <a:lvl3pPr lvl="2" marR="0" rtl="0" algn="l">
+    <a:lvl3pPr marR="0" lvl="2" algn="l" rtl="0">
       <a:lnSpc>
         <a:spcPct val="100000"/>
       </a:lnSpc>
@@ -108,7 +108,7 @@
         <a:srgbClr val="000000"/>
       </a:buClr>
       <a:buFont typeface="Arial"/>
-      <a:defRPr b="0" i="0" spc="0" sz="1400" u="none" cap="none" strike="noStrike">
+      <a:defRPr sz="1400" b="0" i="0" u="none" strike="noStrike" cap="none" spc="0">
         <a:solidFill>
           <a:srgbClr val="000000"/>
         </a:solidFill>
@@ -118,7 +118,7 @@
         <a:sym typeface="Arial"/>
       </a:defRPr>
     </a:lvl3pPr>
-    <a:lvl4pPr lvl="3" marR="0" rtl="0" algn="l">
+    <a:lvl4pPr marR="0" lvl="3" algn="l" rtl="0">
       <a:lnSpc>
         <a:spcPct val="100000"/>
       </a:lnSpc>
@@ -132,7 +132,7 @@
         <a:srgbClr val="000000"/>
       </a:buClr>
       <a:buFont typeface="Arial"/>
-      <a:defRPr b="0" i="0" spc="0" sz="1400" u="none" cap="none" strike="noStrike">
+      <a:defRPr sz="1400" b="0" i="0" u="none" strike="noStrike" cap="none" spc="0">
         <a:solidFill>
           <a:srgbClr val="000000"/>
         </a:solidFill>
@@ -142,7 +142,7 @@
         <a:sym typeface="Arial"/>
       </a:defRPr>
     </a:lvl4pPr>
-    <a:lvl5pPr lvl="4" marR="0" rtl="0" algn="l">
+    <a:lvl5pPr marR="0" lvl="4" algn="l" rtl="0">
       <a:lnSpc>
         <a:spcPct val="100000"/>
       </a:lnSpc>
@@ -156,7 +156,7 @@
         <a:srgbClr val="000000"/>
       </a:buClr>
       <a:buFont typeface="Arial"/>
-      <a:defRPr b="0" i="0" spc="0" sz="1400" u="none" cap="none" strike="noStrike">
+      <a:defRPr sz="1400" b="0" i="0" u="none" strike="noStrike" cap="none" spc="0">
         <a:solidFill>
           <a:srgbClr val="000000"/>
         </a:solidFill>
@@ -166,7 +166,7 @@
         <a:sym typeface="Arial"/>
       </a:defRPr>
     </a:lvl5pPr>
-    <a:lvl6pPr lvl="5" marR="0" rtl="0" algn="l">
+    <a:lvl6pPr marR="0" lvl="5" algn="l" rtl="0">
       <a:lnSpc>
         <a:spcPct val="100000"/>
       </a:lnSpc>
@@ -180,7 +180,7 @@
         <a:srgbClr val="000000"/>
       </a:buClr>
       <a:buFont typeface="Arial"/>
-      <a:defRPr b="0" i="0" spc="0" sz="1400" u="none" cap="none" strike="noStrike">
+      <a:defRPr sz="1400" b="0" i="0" u="none" strike="noStrike" cap="none" spc="0">
         <a:solidFill>
           <a:srgbClr val="000000"/>
         </a:solidFill>
@@ -190,7 +190,7 @@
         <a:sym typeface="Arial"/>
       </a:defRPr>
     </a:lvl6pPr>
-    <a:lvl7pPr lvl="6" marR="0" rtl="0" algn="l">
+    <a:lvl7pPr marR="0" lvl="6" algn="l" rtl="0">
       <a:lnSpc>
         <a:spcPct val="100000"/>
       </a:lnSpc>
@@ -204,7 +204,7 @@
         <a:srgbClr val="000000"/>
       </a:buClr>
       <a:buFont typeface="Arial"/>
-      <a:defRPr b="0" i="0" spc="0" sz="1400" u="none" cap="none" strike="noStrike">
+      <a:defRPr sz="1400" b="0" i="0" u="none" strike="noStrike" cap="none" spc="0">
         <a:solidFill>
           <a:srgbClr val="000000"/>
         </a:solidFill>
@@ -214,7 +214,7 @@
         <a:sym typeface="Arial"/>
       </a:defRPr>
     </a:lvl7pPr>
-    <a:lvl8pPr lvl="7" marR="0" rtl="0" algn="l">
+    <a:lvl8pPr marR="0" lvl="7" algn="l" rtl="0">
       <a:lnSpc>
         <a:spcPct val="100000"/>
       </a:lnSpc>
@@ -228,7 +228,7 @@
         <a:srgbClr val="000000"/>
       </a:buClr>
       <a:buFont typeface="Arial"/>
-      <a:defRPr b="0" i="0" spc="0" sz="1400" u="none" cap="none" strike="noStrike">
+      <a:defRPr sz="1400" b="0" i="0" u="none" strike="noStrike" cap="none" spc="0">
         <a:solidFill>
           <a:srgbClr val="000000"/>
         </a:solidFill>
@@ -238,7 +238,7 @@
         <a:sym typeface="Arial"/>
       </a:defRPr>
     </a:lvl8pPr>
-    <a:lvl9pPr lvl="8" marR="0" rtl="0" algn="l">
+    <a:lvl9pPr marR="0" lvl="8" algn="l" rtl="0">
       <a:lnSpc>
         <a:spcPct val="100000"/>
       </a:lnSpc>
@@ -252,7 +252,7 @@
         <a:srgbClr val="000000"/>
       </a:buClr>
       <a:buFont typeface="Arial"/>
-      <a:defRPr b="0" i="0" spc="0" sz="1400" u="none" cap="none" strike="noStrike">
+      <a:defRPr sz="1400" b="0" i="0" u="none" strike="noStrike" cap="none" spc="0">
         <a:solidFill>
           <a:srgbClr val="000000"/>
         </a:solidFill>
@@ -265,7 +265,7 @@
   </p:defaultTextStyle>
   <p:extLst>
     <p:ext uri="{EFAFB233-063F-42B5-8137-9DF3F51BA10A}">
-      <p15:sldGuideLst>
+      <p15:sldGuideLst xmlns:p15="http://schemas.microsoft.com/office/powerpoint/2012/main">
         <p15:guide id="1" orient="horz" pos="5760">
           <p15:clr>
             <a:srgbClr val="747775"/>
@@ -283,11 +283,16 @@
 </file>
 
 <file path=ppt/notesMasters/notesMaster1.xml><?xml version="1.0" encoding="utf-8"?>
-<p:notesMaster xmlns:a="http://schemas.openxmlformats.org/drawingml/2006/main" xmlns:r="http://schemas.openxmlformats.org/officeDocument/2006/relationships" xmlns:mc="http://schemas.openxmlformats.org/markup-compatibility/2006" xmlns:mv="urn:schemas-microsoft-com:mac:vml" xmlns:p="http://schemas.openxmlformats.org/presentationml/2006/main" xmlns:c="http://schemas.openxmlformats.org/drawingml/2006/chart" xmlns:dgm="http://schemas.openxmlformats.org/drawingml/2006/diagram" xmlns:o="urn:schemas-microsoft-com:office:office" xmlns:v="urn:schemas-microsoft-com:vml" xmlns:pvml="urn:schemas-microsoft-com:office:powerpoint" xmlns:com="http://schemas.openxmlformats.org/drawingml/2006/compatibility" xmlns:p14="http://schemas.microsoft.com/office/powerpoint/2010/main" xmlns:p15="http://schemas.microsoft.com/office/powerpoint/2012/main" xmlns:ahyp="http://schemas.microsoft.com/office/drawing/2018/hyperlinkcolor">
+<p:notesMaster xmlns:a="http://schemas.openxmlformats.org/drawingml/2006/main" xmlns:r="http://schemas.openxmlformats.org/officeDocument/2006/relationships" xmlns:p="http://schemas.openxmlformats.org/presentationml/2006/main">
   <p:cSld>
+    <p:bg>
+      <p:bgRef idx="1001">
+        <a:schemeClr val="bg1"/>
+      </p:bgRef>
+    </p:bg>
     <p:spTree>
       <p:nvGrpSpPr>
-        <p:cNvPr id="2" name="Shape 2"/>
+        <p:cNvPr id="1" name="Shape 2"/>
         <p:cNvGrpSpPr/>
         <p:nvPr/>
       </p:nvGrpSpPr>
@@ -302,9 +307,11 @@
       <p:sp>
         <p:nvSpPr>
           <p:cNvPr id="3" name="Google Shape;3;n"/>
-          <p:cNvSpPr/>
+          <p:cNvSpPr>
+            <a:spLocks noGrp="1" noRot="1" noChangeAspect="1"/>
+          </p:cNvSpPr>
           <p:nvPr>
-            <p:ph idx="2" type="sldImg"/>
+            <p:ph type="sldImg" idx="2"/>
           </p:nvPr>
         </p:nvSpPr>
         <p:spPr>
@@ -313,9 +320,13 @@
             <a:ext cx="1928700" cy="3429000"/>
           </a:xfrm>
           <a:custGeom>
-            <a:rect b="b" l="l" r="r" t="t"/>
+            <a:avLst/>
+            <a:gdLst/>
+            <a:ahLst/>
+            <a:cxnLst/>
+            <a:rect l="l" t="t" r="r" b="b"/>
             <a:pathLst>
-              <a:path extrusionOk="0" h="120000" w="120000">
+              <a:path w="120000" h="120000" extrusionOk="0">
                 <a:moveTo>
                   <a:pt x="0" y="0"/>
                 </a:moveTo>
@@ -333,23 +344,25 @@
             </a:pathLst>
           </a:custGeom>
           <a:noFill/>
-          <a:ln cap="flat" cmpd="sng" w="9525">
+          <a:ln w="9525" cap="flat" cmpd="sng">
             <a:solidFill>
               <a:srgbClr val="000000"/>
             </a:solidFill>
             <a:prstDash val="solid"/>
             <a:round/>
-            <a:headEnd len="sm" w="sm" type="none"/>
-            <a:tailEnd len="sm" w="sm" type="none"/>
+            <a:headEnd type="none" w="sm" len="sm"/>
+            <a:tailEnd type="none" w="sm" len="sm"/>
           </a:ln>
         </p:spPr>
       </p:sp>
       <p:sp>
         <p:nvSpPr>
           <p:cNvPr id="4" name="Google Shape;4;n"/>
-          <p:cNvSpPr txBox="1"/>
+          <p:cNvSpPr txBox="1">
+            <a:spLocks noGrp="1"/>
+          </p:cNvSpPr>
           <p:nvPr>
-            <p:ph idx="1" type="body"/>
+            <p:ph type="body" idx="1"/>
           </p:nvPr>
         </p:nvSpPr>
         <p:spPr>
@@ -366,11 +379,11 @@
           </a:ln>
         </p:spPr>
         <p:txBody>
-          <a:bodyPr anchorCtr="0" anchor="t" bIns="91425" lIns="91425" spcFirstLastPara="1" rIns="91425" wrap="square" tIns="91425">
+          <a:bodyPr spcFirstLastPara="1" wrap="square" lIns="91425" tIns="91425" rIns="91425" bIns="91425" anchor="t" anchorCtr="0">
             <a:noAutofit/>
           </a:bodyPr>
           <a:lstStyle>
-            <a:lvl1pPr indent="-298450" lvl="0" marL="457200">
+            <a:lvl1pPr marL="457200" lvl="0" indent="-298450">
               <a:spcBef>
                 <a:spcPts val="0"/>
               </a:spcBef>
@@ -381,7 +394,7 @@
               <a:buChar char="●"/>
               <a:defRPr sz="1100"/>
             </a:lvl1pPr>
-            <a:lvl2pPr indent="-298450" lvl="1" marL="914400">
+            <a:lvl2pPr marL="914400" lvl="1" indent="-298450">
               <a:spcBef>
                 <a:spcPts val="0"/>
               </a:spcBef>
@@ -392,7 +405,7 @@
               <a:buChar char="○"/>
               <a:defRPr sz="1100"/>
             </a:lvl2pPr>
-            <a:lvl3pPr indent="-298450" lvl="2" marL="1371600">
+            <a:lvl3pPr marL="1371600" lvl="2" indent="-298450">
               <a:spcBef>
                 <a:spcPts val="0"/>
               </a:spcBef>
@@ -403,7 +416,7 @@
               <a:buChar char="■"/>
               <a:defRPr sz="1100"/>
             </a:lvl3pPr>
-            <a:lvl4pPr indent="-298450" lvl="3" marL="1828800">
+            <a:lvl4pPr marL="1828800" lvl="3" indent="-298450">
               <a:spcBef>
                 <a:spcPts val="0"/>
               </a:spcBef>
@@ -414,7 +427,7 @@
               <a:buChar char="●"/>
               <a:defRPr sz="1100"/>
             </a:lvl4pPr>
-            <a:lvl5pPr indent="-298450" lvl="4" marL="2286000">
+            <a:lvl5pPr marL="2286000" lvl="4" indent="-298450">
               <a:spcBef>
                 <a:spcPts val="0"/>
               </a:spcBef>
@@ -425,7 +438,7 @@
               <a:buChar char="○"/>
               <a:defRPr sz="1100"/>
             </a:lvl5pPr>
-            <a:lvl6pPr indent="-298450" lvl="5" marL="2743200">
+            <a:lvl6pPr marL="2743200" lvl="5" indent="-298450">
               <a:spcBef>
                 <a:spcPts val="0"/>
               </a:spcBef>
@@ -436,7 +449,7 @@
               <a:buChar char="■"/>
               <a:defRPr sz="1100"/>
             </a:lvl6pPr>
-            <a:lvl7pPr indent="-298450" lvl="6" marL="3200400">
+            <a:lvl7pPr marL="3200400" lvl="6" indent="-298450">
               <a:spcBef>
                 <a:spcPts val="0"/>
               </a:spcBef>
@@ -447,7 +460,7 @@
               <a:buChar char="●"/>
               <a:defRPr sz="1100"/>
             </a:lvl7pPr>
-            <a:lvl8pPr indent="-298450" lvl="7" marL="3657600">
+            <a:lvl8pPr marL="3657600" lvl="7" indent="-298450">
               <a:spcBef>
                 <a:spcPts val="0"/>
               </a:spcBef>
@@ -458,7 +471,7 @@
               <a:buChar char="○"/>
               <a:defRPr sz="1100"/>
             </a:lvl8pPr>
-            <a:lvl9pPr indent="-298450" lvl="8" marL="4114800">
+            <a:lvl9pPr marL="4114800" lvl="8" indent="-298450">
               <a:spcBef>
                 <a:spcPts val="0"/>
               </a:spcBef>
@@ -470,14 +483,16 @@
               <a:defRPr sz="1100"/>
             </a:lvl9pPr>
           </a:lstStyle>
-          <a:p/>
+          <a:p>
+            <a:endParaRPr/>
+          </a:p>
         </p:txBody>
       </p:sp>
     </p:spTree>
   </p:cSld>
-  <p:clrMap accent1="accent1" accent2="accent2" accent3="accent3" accent4="accent4" accent5="accent5" accent6="accent6" bg1="lt1" bg2="dk2" tx1="dk1" tx2="lt2" folHlink="folHlink" hlink="hlink"/>
+  <p:clrMap bg1="lt1" tx1="dk1" bg2="dk2" tx2="lt2" accent1="accent1" accent2="accent2" accent3="accent3" accent4="accent4" accent5="accent5" accent6="accent6" hlink="hlink" folHlink="folHlink"/>
   <p:notesStyle>
-    <a:defPPr lvl="0" marR="0" rtl="0" algn="l">
+    <a:defPPr marR="0" lvl="0" algn="l" rtl="0">
       <a:lnSpc>
         <a:spcPct val="100000"/>
       </a:lnSpc>
@@ -488,7 +503,7 @@
         <a:spcPts val="0"/>
       </a:spcAft>
     </a:defPPr>
-    <a:lvl1pPr lvl="0" marR="0" rtl="0" algn="l">
+    <a:lvl1pPr marR="0" lvl="0" algn="l" rtl="0">
       <a:lnSpc>
         <a:spcPct val="100000"/>
       </a:lnSpc>
@@ -502,7 +517,7 @@
         <a:srgbClr val="000000"/>
       </a:buClr>
       <a:buFont typeface="Arial"/>
-      <a:defRPr b="0" i="0" spc="0" sz="1400" u="none" cap="none" strike="noStrike">
+      <a:defRPr sz="1400" b="0" i="0" u="none" strike="noStrike" cap="none" spc="0">
         <a:solidFill>
           <a:srgbClr val="000000"/>
         </a:solidFill>
@@ -512,7 +527,7 @@
         <a:sym typeface="Arial"/>
       </a:defRPr>
     </a:lvl1pPr>
-    <a:lvl2pPr lvl="1" marR="0" rtl="0" algn="l">
+    <a:lvl2pPr marR="0" lvl="1" algn="l" rtl="0">
       <a:lnSpc>
         <a:spcPct val="100000"/>
       </a:lnSpc>
@@ -526,7 +541,7 @@
         <a:srgbClr val="000000"/>
       </a:buClr>
       <a:buFont typeface="Arial"/>
-      <a:defRPr b="0" i="0" spc="0" sz="1400" u="none" cap="none" strike="noStrike">
+      <a:defRPr sz="1400" b="0" i="0" u="none" strike="noStrike" cap="none" spc="0">
         <a:solidFill>
           <a:srgbClr val="000000"/>
         </a:solidFill>
@@ -536,7 +551,7 @@
         <a:sym typeface="Arial"/>
       </a:defRPr>
     </a:lvl2pPr>
-    <a:lvl3pPr lvl="2" marR="0" rtl="0" algn="l">
+    <a:lvl3pPr marR="0" lvl="2" algn="l" rtl="0">
       <a:lnSpc>
         <a:spcPct val="100000"/>
       </a:lnSpc>
@@ -550,7 +565,7 @@
         <a:srgbClr val="000000"/>
       </a:buClr>
       <a:buFont typeface="Arial"/>
-      <a:defRPr b="0" i="0" spc="0" sz="1400" u="none" cap="none" strike="noStrike">
+      <a:defRPr sz="1400" b="0" i="0" u="none" strike="noStrike" cap="none" spc="0">
         <a:solidFill>
           <a:srgbClr val="000000"/>
         </a:solidFill>
@@ -560,7 +575,7 @@
         <a:sym typeface="Arial"/>
       </a:defRPr>
     </a:lvl3pPr>
-    <a:lvl4pPr lvl="3" marR="0" rtl="0" algn="l">
+    <a:lvl4pPr marR="0" lvl="3" algn="l" rtl="0">
       <a:lnSpc>
         <a:spcPct val="100000"/>
       </a:lnSpc>
@@ -574,7 +589,7 @@
         <a:srgbClr val="000000"/>
       </a:buClr>
       <a:buFont typeface="Arial"/>
-      <a:defRPr b="0" i="0" spc="0" sz="1400" u="none" cap="none" strike="noStrike">
+      <a:defRPr sz="1400" b="0" i="0" u="none" strike="noStrike" cap="none" spc="0">
         <a:solidFill>
           <a:srgbClr val="000000"/>
         </a:solidFill>
@@ -584,7 +599,7 @@
         <a:sym typeface="Arial"/>
       </a:defRPr>
     </a:lvl4pPr>
-    <a:lvl5pPr lvl="4" marR="0" rtl="0" algn="l">
+    <a:lvl5pPr marR="0" lvl="4" algn="l" rtl="0">
       <a:lnSpc>
         <a:spcPct val="100000"/>
       </a:lnSpc>
@@ -598,7 +613,7 @@
         <a:srgbClr val="000000"/>
       </a:buClr>
       <a:buFont typeface="Arial"/>
-      <a:defRPr b="0" i="0" spc="0" sz="1400" u="none" cap="none" strike="noStrike">
+      <a:defRPr sz="1400" b="0" i="0" u="none" strike="noStrike" cap="none" spc="0">
         <a:solidFill>
           <a:srgbClr val="000000"/>
         </a:solidFill>
@@ -608,7 +623,7 @@
         <a:sym typeface="Arial"/>
       </a:defRPr>
     </a:lvl5pPr>
-    <a:lvl6pPr lvl="5" marR="0" rtl="0" algn="l">
+    <a:lvl6pPr marR="0" lvl="5" algn="l" rtl="0">
       <a:lnSpc>
         <a:spcPct val="100000"/>
       </a:lnSpc>
@@ -622,7 +637,7 @@
         <a:srgbClr val="000000"/>
       </a:buClr>
       <a:buFont typeface="Arial"/>
-      <a:defRPr b="0" i="0" spc="0" sz="1400" u="none" cap="none" strike="noStrike">
+      <a:defRPr sz="1400" b="0" i="0" u="none" strike="noStrike" cap="none" spc="0">
         <a:solidFill>
           <a:srgbClr val="000000"/>
         </a:solidFill>
@@ -632,7 +647,7 @@
         <a:sym typeface="Arial"/>
       </a:defRPr>
     </a:lvl6pPr>
-    <a:lvl7pPr lvl="6" marR="0" rtl="0" algn="l">
+    <a:lvl7pPr marR="0" lvl="6" algn="l" rtl="0">
       <a:lnSpc>
         <a:spcPct val="100000"/>
       </a:lnSpc>
@@ -646,7 +661,7 @@
         <a:srgbClr val="000000"/>
       </a:buClr>
       <a:buFont typeface="Arial"/>
-      <a:defRPr b="0" i="0" spc="0" sz="1400" u="none" cap="none" strike="noStrike">
+      <a:defRPr sz="1400" b="0" i="0" u="none" strike="noStrike" cap="none" spc="0">
         <a:solidFill>
           <a:srgbClr val="000000"/>
         </a:solidFill>
@@ -656,7 +671,7 @@
         <a:sym typeface="Arial"/>
       </a:defRPr>
     </a:lvl7pPr>
-    <a:lvl8pPr lvl="7" marR="0" rtl="0" algn="l">
+    <a:lvl8pPr marR="0" lvl="7" algn="l" rtl="0">
       <a:lnSpc>
         <a:spcPct val="100000"/>
       </a:lnSpc>
@@ -670,7 +685,7 @@
         <a:srgbClr val="000000"/>
       </a:buClr>
       <a:buFont typeface="Arial"/>
-      <a:defRPr b="0" i="0" spc="0" sz="1400" u="none" cap="none" strike="noStrike">
+      <a:defRPr sz="1400" b="0" i="0" u="none" strike="noStrike" cap="none" spc="0">
         <a:solidFill>
           <a:srgbClr val="000000"/>
         </a:solidFill>
@@ -680,7 +695,7 @@
         <a:sym typeface="Arial"/>
       </a:defRPr>
     </a:lvl8pPr>
-    <a:lvl9pPr lvl="8" marR="0" rtl="0" algn="l">
+    <a:lvl9pPr marR="0" lvl="8" algn="l" rtl="0">
       <a:lnSpc>
         <a:spcPct val="100000"/>
       </a:lnSpc>
@@ -694,7 +709,7 @@
         <a:srgbClr val="000000"/>
       </a:buClr>
       <a:buFont typeface="Arial"/>
-      <a:defRPr b="0" i="0" spc="0" sz="1400" u="none" cap="none" strike="noStrike">
+      <a:defRPr sz="1400" b="0" i="0" u="none" strike="noStrike" cap="none" spc="0">
         <a:solidFill>
           <a:srgbClr val="000000"/>
         </a:solidFill>
@@ -709,11 +724,11 @@
 </file>
 
 <file path=ppt/notesSlides/notesSlide1.xml><?xml version="1.0" encoding="utf-8"?>
-<p:notes xmlns:a="http://schemas.openxmlformats.org/drawingml/2006/main" xmlns:r="http://schemas.openxmlformats.org/officeDocument/2006/relationships" xmlns:mc="http://schemas.openxmlformats.org/markup-compatibility/2006" xmlns:mv="urn:schemas-microsoft-com:mac:vml" xmlns:p="http://schemas.openxmlformats.org/presentationml/2006/main" xmlns:c="http://schemas.openxmlformats.org/drawingml/2006/chart" xmlns:dgm="http://schemas.openxmlformats.org/drawingml/2006/diagram" xmlns:o="urn:schemas-microsoft-com:office:office" xmlns:v="urn:schemas-microsoft-com:vml" xmlns:pvml="urn:schemas-microsoft-com:office:powerpoint" xmlns:com="http://schemas.openxmlformats.org/drawingml/2006/compatibility" xmlns:p14="http://schemas.microsoft.com/office/powerpoint/2010/main" xmlns:p15="http://schemas.microsoft.com/office/powerpoint/2012/main" xmlns:ahyp="http://schemas.microsoft.com/office/drawing/2018/hyperlinkcolor" showMasterPhAnim="0" showMasterSp="0">
+<p:notes xmlns:a="http://schemas.openxmlformats.org/drawingml/2006/main" xmlns:r="http://schemas.openxmlformats.org/officeDocument/2006/relationships" xmlns:p="http://schemas.openxmlformats.org/presentationml/2006/main" showMasterSp="0" showMasterPhAnim="0">
   <p:cSld>
     <p:spTree>
       <p:nvGrpSpPr>
-        <p:cNvPr id="50" name="Shape 50"/>
+        <p:cNvPr id="1" name="Shape 50"/>
         <p:cNvGrpSpPr/>
         <p:nvPr/>
       </p:nvGrpSpPr>
@@ -728,20 +743,26 @@
       <p:sp>
         <p:nvSpPr>
           <p:cNvPr id="51" name="Google Shape;51;p:notes"/>
-          <p:cNvSpPr/>
+          <p:cNvSpPr>
+            <a:spLocks noGrp="1" noRot="1" noChangeAspect="1"/>
+          </p:cNvSpPr>
           <p:nvPr>
-            <p:ph idx="2" type="sldImg"/>
+            <p:ph type="sldImg" idx="2"/>
           </p:nvPr>
         </p:nvSpPr>
         <p:spPr>
           <a:xfrm>
-            <a:off x="2464919" y="685800"/>
-            <a:ext cx="1928700" cy="3429000"/>
+            <a:off x="2465388" y="685800"/>
+            <a:ext cx="1928812" cy="3429000"/>
           </a:xfrm>
           <a:custGeom>
-            <a:rect b="b" l="l" r="r" t="t"/>
+            <a:avLst/>
+            <a:gdLst/>
+            <a:ahLst/>
+            <a:cxnLst/>
+            <a:rect l="l" t="t" r="r" b="b"/>
             <a:pathLst>
-              <a:path extrusionOk="0" h="120000" w="120000">
+              <a:path w="120000" h="120000" extrusionOk="0">
                 <a:moveTo>
                   <a:pt x="0" y="0"/>
                 </a:moveTo>
@@ -763,9 +784,11 @@
       <p:sp>
         <p:nvSpPr>
           <p:cNvPr id="52" name="Google Shape;52;p:notes"/>
-          <p:cNvSpPr txBox="1"/>
+          <p:cNvSpPr txBox="1">
+            <a:spLocks noGrp="1"/>
+          </p:cNvSpPr>
           <p:nvPr>
-            <p:ph idx="1" type="body"/>
+            <p:ph type="body" idx="1"/>
           </p:nvPr>
         </p:nvSpPr>
         <p:spPr>
@@ -778,23 +801,20 @@
           </a:prstGeom>
         </p:spPr>
         <p:txBody>
-          <a:bodyPr anchorCtr="0" anchor="t" bIns="91425" lIns="91425" spcFirstLastPara="1" rIns="91425" wrap="square" tIns="91425">
+          <a:bodyPr spcFirstLastPara="1" wrap="square" lIns="91425" tIns="91425" rIns="91425" bIns="91425" anchor="t" anchorCtr="0">
             <a:noAutofit/>
           </a:bodyPr>
           <a:lstStyle/>
           <a:p>
-            <a:pPr indent="0" lvl="0" marL="0" rtl="0" algn="l">
-              <a:spcBef>
-                <a:spcPts val="0"/>
-              </a:spcBef>
-              <a:spcAft>
-                <a:spcPts val="0"/>
-              </a:spcAft>
-              <a:buNone/>
-            </a:pPr>
-            <a:r>
-              <a:t/>
-            </a:r>
+            <a:pPr marL="0" lvl="0" indent="0" algn="l" rtl="0">
+              <a:spcBef>
+                <a:spcPts val="0"/>
+              </a:spcBef>
+              <a:spcAft>
+                <a:spcPts val="0"/>
+              </a:spcAft>
+              <a:buNone/>
+            </a:pPr>
             <a:endParaRPr/>
           </a:p>
         </p:txBody>
@@ -808,11 +828,11 @@
 </file>
 
 <file path=ppt/notesSlides/notesSlide10.xml><?xml version="1.0" encoding="utf-8"?>
-<p:notes xmlns:a="http://schemas.openxmlformats.org/drawingml/2006/main" xmlns:r="http://schemas.openxmlformats.org/officeDocument/2006/relationships" xmlns:mc="http://schemas.openxmlformats.org/markup-compatibility/2006" xmlns:mv="urn:schemas-microsoft-com:mac:vml" xmlns:p="http://schemas.openxmlformats.org/presentationml/2006/main" xmlns:c="http://schemas.openxmlformats.org/drawingml/2006/chart" xmlns:dgm="http://schemas.openxmlformats.org/drawingml/2006/diagram" xmlns:o="urn:schemas-microsoft-com:office:office" xmlns:v="urn:schemas-microsoft-com:vml" xmlns:pvml="urn:schemas-microsoft-com:office:powerpoint" xmlns:com="http://schemas.openxmlformats.org/drawingml/2006/compatibility" xmlns:p14="http://schemas.microsoft.com/office/powerpoint/2010/main" xmlns:p15="http://schemas.microsoft.com/office/powerpoint/2012/main" xmlns:ahyp="http://schemas.microsoft.com/office/drawing/2018/hyperlinkcolor" showMasterPhAnim="0" showMasterSp="0">
+<p:notes xmlns:a="http://schemas.openxmlformats.org/drawingml/2006/main" xmlns:r="http://schemas.openxmlformats.org/officeDocument/2006/relationships" xmlns:p="http://schemas.openxmlformats.org/presentationml/2006/main" showMasterSp="0" showMasterPhAnim="0">
   <p:cSld>
     <p:spTree>
       <p:nvGrpSpPr>
-        <p:cNvPr id="93" name="Shape 93"/>
+        <p:cNvPr id="1" name="Shape 93"/>
         <p:cNvGrpSpPr/>
         <p:nvPr/>
       </p:nvGrpSpPr>
@@ -827,20 +847,26 @@
       <p:sp>
         <p:nvSpPr>
           <p:cNvPr id="94" name="Google Shape;94;g36538967913_0_27:notes"/>
-          <p:cNvSpPr/>
+          <p:cNvSpPr>
+            <a:spLocks noGrp="1" noRot="1" noChangeAspect="1"/>
+          </p:cNvSpPr>
           <p:nvPr>
-            <p:ph idx="2" type="sldImg"/>
+            <p:ph type="sldImg" idx="2"/>
           </p:nvPr>
         </p:nvSpPr>
         <p:spPr>
           <a:xfrm>
-            <a:off x="2464919" y="685800"/>
-            <a:ext cx="1928700" cy="3429000"/>
+            <a:off x="2465388" y="685800"/>
+            <a:ext cx="1928812" cy="3429000"/>
           </a:xfrm>
           <a:custGeom>
-            <a:rect b="b" l="l" r="r" t="t"/>
+            <a:avLst/>
+            <a:gdLst/>
+            <a:ahLst/>
+            <a:cxnLst/>
+            <a:rect l="l" t="t" r="r" b="b"/>
             <a:pathLst>
-              <a:path extrusionOk="0" h="120000" w="120000">
+              <a:path w="120000" h="120000" extrusionOk="0">
                 <a:moveTo>
                   <a:pt x="0" y="0"/>
                 </a:moveTo>
@@ -862,9 +888,11 @@
       <p:sp>
         <p:nvSpPr>
           <p:cNvPr id="95" name="Google Shape;95;g36538967913_0_27:notes"/>
-          <p:cNvSpPr txBox="1"/>
+          <p:cNvSpPr txBox="1">
+            <a:spLocks noGrp="1"/>
+          </p:cNvSpPr>
           <p:nvPr>
-            <p:ph idx="1" type="body"/>
+            <p:ph type="body" idx="1"/>
           </p:nvPr>
         </p:nvSpPr>
         <p:spPr>
@@ -877,23 +905,20 @@
           </a:prstGeom>
         </p:spPr>
         <p:txBody>
-          <a:bodyPr anchorCtr="0" anchor="t" bIns="91425" lIns="91425" spcFirstLastPara="1" rIns="91425" wrap="square" tIns="91425">
+          <a:bodyPr spcFirstLastPara="1" wrap="square" lIns="91425" tIns="91425" rIns="91425" bIns="91425" anchor="t" anchorCtr="0">
             <a:noAutofit/>
           </a:bodyPr>
           <a:lstStyle/>
           <a:p>
-            <a:pPr indent="0" lvl="0" marL="0" rtl="0" algn="l">
-              <a:spcBef>
-                <a:spcPts val="0"/>
-              </a:spcBef>
-              <a:spcAft>
-                <a:spcPts val="0"/>
-              </a:spcAft>
-              <a:buNone/>
-            </a:pPr>
-            <a:r>
-              <a:t/>
-            </a:r>
+            <a:pPr marL="0" lvl="0" indent="0" algn="l" rtl="0">
+              <a:spcBef>
+                <a:spcPts val="0"/>
+              </a:spcBef>
+              <a:spcAft>
+                <a:spcPts val="0"/>
+              </a:spcAft>
+              <a:buNone/>
+            </a:pPr>
             <a:endParaRPr/>
           </a:p>
         </p:txBody>
@@ -907,11 +932,11 @@
 </file>
 
 <file path=ppt/notesSlides/notesSlide11.xml><?xml version="1.0" encoding="utf-8"?>
-<p:notes xmlns:a="http://schemas.openxmlformats.org/drawingml/2006/main" xmlns:r="http://schemas.openxmlformats.org/officeDocument/2006/relationships" xmlns:mc="http://schemas.openxmlformats.org/markup-compatibility/2006" xmlns:mv="urn:schemas-microsoft-com:mac:vml" xmlns:p="http://schemas.openxmlformats.org/presentationml/2006/main" xmlns:c="http://schemas.openxmlformats.org/drawingml/2006/chart" xmlns:dgm="http://schemas.openxmlformats.org/drawingml/2006/diagram" xmlns:o="urn:schemas-microsoft-com:office:office" xmlns:v="urn:schemas-microsoft-com:vml" xmlns:pvml="urn:schemas-microsoft-com:office:powerpoint" xmlns:com="http://schemas.openxmlformats.org/drawingml/2006/compatibility" xmlns:p14="http://schemas.microsoft.com/office/powerpoint/2010/main" xmlns:p15="http://schemas.microsoft.com/office/powerpoint/2012/main" xmlns:ahyp="http://schemas.microsoft.com/office/drawing/2018/hyperlinkcolor" showMasterPhAnim="0" showMasterSp="0">
+<p:notes xmlns:a="http://schemas.openxmlformats.org/drawingml/2006/main" xmlns:r="http://schemas.openxmlformats.org/officeDocument/2006/relationships" xmlns:p="http://schemas.openxmlformats.org/presentationml/2006/main" showMasterSp="0" showMasterPhAnim="0">
   <p:cSld>
     <p:spTree>
       <p:nvGrpSpPr>
-        <p:cNvPr id="100" name="Shape 100"/>
+        <p:cNvPr id="1" name="Shape 100"/>
         <p:cNvGrpSpPr/>
         <p:nvPr/>
       </p:nvGrpSpPr>
@@ -926,20 +951,26 @@
       <p:sp>
         <p:nvSpPr>
           <p:cNvPr id="101" name="Google Shape;101;g36538967913_0_30:notes"/>
-          <p:cNvSpPr/>
+          <p:cNvSpPr>
+            <a:spLocks noGrp="1" noRot="1" noChangeAspect="1"/>
+          </p:cNvSpPr>
           <p:nvPr>
-            <p:ph idx="2" type="sldImg"/>
+            <p:ph type="sldImg" idx="2"/>
           </p:nvPr>
         </p:nvSpPr>
         <p:spPr>
           <a:xfrm>
-            <a:off x="2464919" y="685800"/>
-            <a:ext cx="1928700" cy="3429000"/>
+            <a:off x="2465388" y="685800"/>
+            <a:ext cx="1928812" cy="3429000"/>
           </a:xfrm>
           <a:custGeom>
-            <a:rect b="b" l="l" r="r" t="t"/>
+            <a:avLst/>
+            <a:gdLst/>
+            <a:ahLst/>
+            <a:cxnLst/>
+            <a:rect l="l" t="t" r="r" b="b"/>
             <a:pathLst>
-              <a:path extrusionOk="0" h="120000" w="120000">
+              <a:path w="120000" h="120000" extrusionOk="0">
                 <a:moveTo>
                   <a:pt x="0" y="0"/>
                 </a:moveTo>
@@ -961,9 +992,11 @@
       <p:sp>
         <p:nvSpPr>
           <p:cNvPr id="102" name="Google Shape;102;g36538967913_0_30:notes"/>
-          <p:cNvSpPr txBox="1"/>
+          <p:cNvSpPr txBox="1">
+            <a:spLocks noGrp="1"/>
+          </p:cNvSpPr>
           <p:nvPr>
-            <p:ph idx="1" type="body"/>
+            <p:ph type="body" idx="1"/>
           </p:nvPr>
         </p:nvSpPr>
         <p:spPr>
@@ -976,23 +1009,20 @@
           </a:prstGeom>
         </p:spPr>
         <p:txBody>
-          <a:bodyPr anchorCtr="0" anchor="t" bIns="91425" lIns="91425" spcFirstLastPara="1" rIns="91425" wrap="square" tIns="91425">
+          <a:bodyPr spcFirstLastPara="1" wrap="square" lIns="91425" tIns="91425" rIns="91425" bIns="91425" anchor="t" anchorCtr="0">
             <a:noAutofit/>
           </a:bodyPr>
           <a:lstStyle/>
           <a:p>
-            <a:pPr indent="0" lvl="0" marL="0" rtl="0" algn="l">
-              <a:spcBef>
-                <a:spcPts val="0"/>
-              </a:spcBef>
-              <a:spcAft>
-                <a:spcPts val="0"/>
-              </a:spcAft>
-              <a:buNone/>
-            </a:pPr>
-            <a:r>
-              <a:t/>
-            </a:r>
+            <a:pPr marL="0" lvl="0" indent="0" algn="l" rtl="0">
+              <a:spcBef>
+                <a:spcPts val="0"/>
+              </a:spcBef>
+              <a:spcAft>
+                <a:spcPts val="0"/>
+              </a:spcAft>
+              <a:buNone/>
+            </a:pPr>
             <a:endParaRPr/>
           </a:p>
         </p:txBody>
@@ -1006,11 +1036,11 @@
 </file>
 
 <file path=ppt/notesSlides/notesSlide12.xml><?xml version="1.0" encoding="utf-8"?>
-<p:notes xmlns:a="http://schemas.openxmlformats.org/drawingml/2006/main" xmlns:r="http://schemas.openxmlformats.org/officeDocument/2006/relationships" xmlns:mc="http://schemas.openxmlformats.org/markup-compatibility/2006" xmlns:mv="urn:schemas-microsoft-com:mac:vml" xmlns:p="http://schemas.openxmlformats.org/presentationml/2006/main" xmlns:c="http://schemas.openxmlformats.org/drawingml/2006/chart" xmlns:dgm="http://schemas.openxmlformats.org/drawingml/2006/diagram" xmlns:o="urn:schemas-microsoft-com:office:office" xmlns:v="urn:schemas-microsoft-com:vml" xmlns:pvml="urn:schemas-microsoft-com:office:powerpoint" xmlns:com="http://schemas.openxmlformats.org/drawingml/2006/compatibility" xmlns:p14="http://schemas.microsoft.com/office/powerpoint/2010/main" xmlns:p15="http://schemas.microsoft.com/office/powerpoint/2012/main" xmlns:ahyp="http://schemas.microsoft.com/office/drawing/2018/hyperlinkcolor" showMasterPhAnim="0" showMasterSp="0">
+<p:notes xmlns:a="http://schemas.openxmlformats.org/drawingml/2006/main" xmlns:r="http://schemas.openxmlformats.org/officeDocument/2006/relationships" xmlns:p="http://schemas.openxmlformats.org/presentationml/2006/main" showMasterSp="0" showMasterPhAnim="0">
   <p:cSld>
     <p:spTree>
       <p:nvGrpSpPr>
-        <p:cNvPr id="107" name="Shape 107"/>
+        <p:cNvPr id="1" name="Shape 107"/>
         <p:cNvGrpSpPr/>
         <p:nvPr/>
       </p:nvGrpSpPr>
@@ -1025,20 +1055,26 @@
       <p:sp>
         <p:nvSpPr>
           <p:cNvPr id="108" name="Google Shape;108;g36538967913_0_33:notes"/>
-          <p:cNvSpPr/>
+          <p:cNvSpPr>
+            <a:spLocks noGrp="1" noRot="1" noChangeAspect="1"/>
+          </p:cNvSpPr>
           <p:nvPr>
-            <p:ph idx="2" type="sldImg"/>
+            <p:ph type="sldImg" idx="2"/>
           </p:nvPr>
         </p:nvSpPr>
         <p:spPr>
           <a:xfrm>
-            <a:off x="2464919" y="685800"/>
-            <a:ext cx="1928700" cy="3429000"/>
+            <a:off x="2465388" y="685800"/>
+            <a:ext cx="1928812" cy="3429000"/>
           </a:xfrm>
           <a:custGeom>
-            <a:rect b="b" l="l" r="r" t="t"/>
+            <a:avLst/>
+            <a:gdLst/>
+            <a:ahLst/>
+            <a:cxnLst/>
+            <a:rect l="l" t="t" r="r" b="b"/>
             <a:pathLst>
-              <a:path extrusionOk="0" h="120000" w="120000">
+              <a:path w="120000" h="120000" extrusionOk="0">
                 <a:moveTo>
                   <a:pt x="0" y="0"/>
                 </a:moveTo>
@@ -1060,9 +1096,11 @@
       <p:sp>
         <p:nvSpPr>
           <p:cNvPr id="109" name="Google Shape;109;g36538967913_0_33:notes"/>
-          <p:cNvSpPr txBox="1"/>
+          <p:cNvSpPr txBox="1">
+            <a:spLocks noGrp="1"/>
+          </p:cNvSpPr>
           <p:nvPr>
-            <p:ph idx="1" type="body"/>
+            <p:ph type="body" idx="1"/>
           </p:nvPr>
         </p:nvSpPr>
         <p:spPr>
@@ -1075,23 +1113,20 @@
           </a:prstGeom>
         </p:spPr>
         <p:txBody>
-          <a:bodyPr anchorCtr="0" anchor="t" bIns="91425" lIns="91425" spcFirstLastPara="1" rIns="91425" wrap="square" tIns="91425">
+          <a:bodyPr spcFirstLastPara="1" wrap="square" lIns="91425" tIns="91425" rIns="91425" bIns="91425" anchor="t" anchorCtr="0">
             <a:noAutofit/>
           </a:bodyPr>
           <a:lstStyle/>
           <a:p>
-            <a:pPr indent="0" lvl="0" marL="0" rtl="0" algn="l">
-              <a:spcBef>
-                <a:spcPts val="0"/>
-              </a:spcBef>
-              <a:spcAft>
-                <a:spcPts val="0"/>
-              </a:spcAft>
-              <a:buNone/>
-            </a:pPr>
-            <a:r>
-              <a:t/>
-            </a:r>
+            <a:pPr marL="0" lvl="0" indent="0" algn="l" rtl="0">
+              <a:spcBef>
+                <a:spcPts val="0"/>
+              </a:spcBef>
+              <a:spcAft>
+                <a:spcPts val="0"/>
+              </a:spcAft>
+              <a:buNone/>
+            </a:pPr>
             <a:endParaRPr/>
           </a:p>
         </p:txBody>
@@ -1105,11 +1140,11 @@
 </file>
 
 <file path=ppt/notesSlides/notesSlide13.xml><?xml version="1.0" encoding="utf-8"?>
-<p:notes xmlns:a="http://schemas.openxmlformats.org/drawingml/2006/main" xmlns:r="http://schemas.openxmlformats.org/officeDocument/2006/relationships" xmlns:mc="http://schemas.openxmlformats.org/markup-compatibility/2006" xmlns:mv="urn:schemas-microsoft-com:mac:vml" xmlns:p="http://schemas.openxmlformats.org/presentationml/2006/main" xmlns:c="http://schemas.openxmlformats.org/drawingml/2006/chart" xmlns:dgm="http://schemas.openxmlformats.org/drawingml/2006/diagram" xmlns:o="urn:schemas-microsoft-com:office:office" xmlns:v="urn:schemas-microsoft-com:vml" xmlns:pvml="urn:schemas-microsoft-com:office:powerpoint" xmlns:com="http://schemas.openxmlformats.org/drawingml/2006/compatibility" xmlns:p14="http://schemas.microsoft.com/office/powerpoint/2010/main" xmlns:p15="http://schemas.microsoft.com/office/powerpoint/2012/main" xmlns:ahyp="http://schemas.microsoft.com/office/drawing/2018/hyperlinkcolor" showMasterPhAnim="0" showMasterSp="0">
+<p:notes xmlns:a="http://schemas.openxmlformats.org/drawingml/2006/main" xmlns:r="http://schemas.openxmlformats.org/officeDocument/2006/relationships" xmlns:p="http://schemas.openxmlformats.org/presentationml/2006/main" showMasterSp="0" showMasterPhAnim="0">
   <p:cSld>
     <p:spTree>
       <p:nvGrpSpPr>
-        <p:cNvPr id="114" name="Shape 114"/>
+        <p:cNvPr id="1" name="Shape 114"/>
         <p:cNvGrpSpPr/>
         <p:nvPr/>
       </p:nvGrpSpPr>
@@ -1124,20 +1159,26 @@
       <p:sp>
         <p:nvSpPr>
           <p:cNvPr id="115" name="Google Shape;115;g36538967913_0_36:notes"/>
-          <p:cNvSpPr/>
+          <p:cNvSpPr>
+            <a:spLocks noGrp="1" noRot="1" noChangeAspect="1"/>
+          </p:cNvSpPr>
           <p:nvPr>
-            <p:ph idx="2" type="sldImg"/>
+            <p:ph type="sldImg" idx="2"/>
           </p:nvPr>
         </p:nvSpPr>
         <p:spPr>
           <a:xfrm>
-            <a:off x="2464919" y="685800"/>
-            <a:ext cx="1928700" cy="3429000"/>
+            <a:off x="2465388" y="685800"/>
+            <a:ext cx="1928812" cy="3429000"/>
           </a:xfrm>
           <a:custGeom>
-            <a:rect b="b" l="l" r="r" t="t"/>
+            <a:avLst/>
+            <a:gdLst/>
+            <a:ahLst/>
+            <a:cxnLst/>
+            <a:rect l="l" t="t" r="r" b="b"/>
             <a:pathLst>
-              <a:path extrusionOk="0" h="120000" w="120000">
+              <a:path w="120000" h="120000" extrusionOk="0">
                 <a:moveTo>
                   <a:pt x="0" y="0"/>
                 </a:moveTo>
@@ -1159,9 +1200,11 @@
       <p:sp>
         <p:nvSpPr>
           <p:cNvPr id="116" name="Google Shape;116;g36538967913_0_36:notes"/>
-          <p:cNvSpPr txBox="1"/>
+          <p:cNvSpPr txBox="1">
+            <a:spLocks noGrp="1"/>
+          </p:cNvSpPr>
           <p:nvPr>
-            <p:ph idx="1" type="body"/>
+            <p:ph type="body" idx="1"/>
           </p:nvPr>
         </p:nvSpPr>
         <p:spPr>
@@ -1174,23 +1217,20 @@
           </a:prstGeom>
         </p:spPr>
         <p:txBody>
-          <a:bodyPr anchorCtr="0" anchor="t" bIns="91425" lIns="91425" spcFirstLastPara="1" rIns="91425" wrap="square" tIns="91425">
+          <a:bodyPr spcFirstLastPara="1" wrap="square" lIns="91425" tIns="91425" rIns="91425" bIns="91425" anchor="t" anchorCtr="0">
             <a:noAutofit/>
           </a:bodyPr>
           <a:lstStyle/>
           <a:p>
-            <a:pPr indent="0" lvl="0" marL="0" rtl="0" algn="l">
-              <a:spcBef>
-                <a:spcPts val="0"/>
-              </a:spcBef>
-              <a:spcAft>
-                <a:spcPts val="0"/>
-              </a:spcAft>
-              <a:buNone/>
-            </a:pPr>
-            <a:r>
-              <a:t/>
-            </a:r>
+            <a:pPr marL="0" lvl="0" indent="0" algn="l" rtl="0">
+              <a:spcBef>
+                <a:spcPts val="0"/>
+              </a:spcBef>
+              <a:spcAft>
+                <a:spcPts val="0"/>
+              </a:spcAft>
+              <a:buNone/>
+            </a:pPr>
             <a:endParaRPr/>
           </a:p>
         </p:txBody>
@@ -1204,11 +1244,11 @@
 </file>
 
 <file path=ppt/notesSlides/notesSlide14.xml><?xml version="1.0" encoding="utf-8"?>
-<p:notes xmlns:a="http://schemas.openxmlformats.org/drawingml/2006/main" xmlns:r="http://schemas.openxmlformats.org/officeDocument/2006/relationships" xmlns:mc="http://schemas.openxmlformats.org/markup-compatibility/2006" xmlns:mv="urn:schemas-microsoft-com:mac:vml" xmlns:p="http://schemas.openxmlformats.org/presentationml/2006/main" xmlns:c="http://schemas.openxmlformats.org/drawingml/2006/chart" xmlns:dgm="http://schemas.openxmlformats.org/drawingml/2006/diagram" xmlns:o="urn:schemas-microsoft-com:office:office" xmlns:v="urn:schemas-microsoft-com:vml" xmlns:pvml="urn:schemas-microsoft-com:office:powerpoint" xmlns:com="http://schemas.openxmlformats.org/drawingml/2006/compatibility" xmlns:p14="http://schemas.microsoft.com/office/powerpoint/2010/main" xmlns:p15="http://schemas.microsoft.com/office/powerpoint/2012/main" xmlns:ahyp="http://schemas.microsoft.com/office/drawing/2018/hyperlinkcolor" showMasterPhAnim="0" showMasterSp="0">
+<p:notes xmlns:a="http://schemas.openxmlformats.org/drawingml/2006/main" xmlns:r="http://schemas.openxmlformats.org/officeDocument/2006/relationships" xmlns:p="http://schemas.openxmlformats.org/presentationml/2006/main" showMasterSp="0" showMasterPhAnim="0">
   <p:cSld>
     <p:spTree>
       <p:nvGrpSpPr>
-        <p:cNvPr id="121" name="Shape 121"/>
+        <p:cNvPr id="1" name="Shape 121"/>
         <p:cNvGrpSpPr/>
         <p:nvPr/>
       </p:nvGrpSpPr>
@@ -1223,9 +1263,11 @@
       <p:sp>
         <p:nvSpPr>
           <p:cNvPr id="122" name="Google Shape;122;g36538967913_0_39:notes"/>
-          <p:cNvSpPr/>
+          <p:cNvSpPr>
+            <a:spLocks noGrp="1" noRot="1" noChangeAspect="1"/>
+          </p:cNvSpPr>
           <p:nvPr>
-            <p:ph idx="2" type="sldImg"/>
+            <p:ph type="sldImg" idx="2"/>
           </p:nvPr>
         </p:nvSpPr>
         <p:spPr>
@@ -1234,9 +1276,13 @@
             <a:ext cx="1928700" cy="3429000"/>
           </a:xfrm>
           <a:custGeom>
-            <a:rect b="b" l="l" r="r" t="t"/>
+            <a:avLst/>
+            <a:gdLst/>
+            <a:ahLst/>
+            <a:cxnLst/>
+            <a:rect l="l" t="t" r="r" b="b"/>
             <a:pathLst>
-              <a:path extrusionOk="0" h="120000" w="120000">
+              <a:path w="120000" h="120000" extrusionOk="0">
                 <a:moveTo>
                   <a:pt x="0" y="0"/>
                 </a:moveTo>
@@ -1258,9 +1304,11 @@
       <p:sp>
         <p:nvSpPr>
           <p:cNvPr id="123" name="Google Shape;123;g36538967913_0_39:notes"/>
-          <p:cNvSpPr txBox="1"/>
+          <p:cNvSpPr txBox="1">
+            <a:spLocks noGrp="1"/>
+          </p:cNvSpPr>
           <p:nvPr>
-            <p:ph idx="1" type="body"/>
+            <p:ph type="body" idx="1"/>
           </p:nvPr>
         </p:nvSpPr>
         <p:spPr>
@@ -1273,23 +1321,20 @@
           </a:prstGeom>
         </p:spPr>
         <p:txBody>
-          <a:bodyPr anchorCtr="0" anchor="t" bIns="91425" lIns="91425" spcFirstLastPara="1" rIns="91425" wrap="square" tIns="91425">
+          <a:bodyPr spcFirstLastPara="1" wrap="square" lIns="91425" tIns="91425" rIns="91425" bIns="91425" anchor="t" anchorCtr="0">
             <a:noAutofit/>
           </a:bodyPr>
           <a:lstStyle/>
           <a:p>
-            <a:pPr indent="0" lvl="0" marL="0" rtl="0" algn="l">
-              <a:spcBef>
-                <a:spcPts val="0"/>
-              </a:spcBef>
-              <a:spcAft>
-                <a:spcPts val="0"/>
-              </a:spcAft>
-              <a:buNone/>
-            </a:pPr>
-            <a:r>
-              <a:t/>
-            </a:r>
+            <a:pPr marL="0" lvl="0" indent="0" algn="l" rtl="0">
+              <a:spcBef>
+                <a:spcPts val="0"/>
+              </a:spcBef>
+              <a:spcAft>
+                <a:spcPts val="0"/>
+              </a:spcAft>
+              <a:buNone/>
+            </a:pPr>
             <a:endParaRPr/>
           </a:p>
         </p:txBody>
@@ -1303,11 +1348,11 @@
 </file>
 
 <file path=ppt/notesSlides/notesSlide2.xml><?xml version="1.0" encoding="utf-8"?>
-<p:notes xmlns:a="http://schemas.openxmlformats.org/drawingml/2006/main" xmlns:r="http://schemas.openxmlformats.org/officeDocument/2006/relationships" xmlns:mc="http://schemas.openxmlformats.org/markup-compatibility/2006" xmlns:mv="urn:schemas-microsoft-com:mac:vml" xmlns:p="http://schemas.openxmlformats.org/presentationml/2006/main" xmlns:c="http://schemas.openxmlformats.org/drawingml/2006/chart" xmlns:dgm="http://schemas.openxmlformats.org/drawingml/2006/diagram" xmlns:o="urn:schemas-microsoft-com:office:office" xmlns:v="urn:schemas-microsoft-com:vml" xmlns:pvml="urn:schemas-microsoft-com:office:powerpoint" xmlns:com="http://schemas.openxmlformats.org/drawingml/2006/compatibility" xmlns:p14="http://schemas.microsoft.com/office/powerpoint/2010/main" xmlns:p15="http://schemas.microsoft.com/office/powerpoint/2012/main" xmlns:ahyp="http://schemas.microsoft.com/office/drawing/2018/hyperlinkcolor" showMasterPhAnim="0" showMasterSp="0">
+<p:notes xmlns:a="http://schemas.openxmlformats.org/drawingml/2006/main" xmlns:r="http://schemas.openxmlformats.org/officeDocument/2006/relationships" xmlns:p="http://schemas.openxmlformats.org/presentationml/2006/main" showMasterSp="0" showMasterPhAnim="0">
   <p:cSld>
     <p:spTree>
       <p:nvGrpSpPr>
-        <p:cNvPr id="55" name="Shape 55"/>
+        <p:cNvPr id="1" name="Shape 55"/>
         <p:cNvGrpSpPr/>
         <p:nvPr/>
       </p:nvGrpSpPr>
@@ -1322,9 +1367,11 @@
       <p:sp>
         <p:nvSpPr>
           <p:cNvPr id="56" name="Google Shape;56;g36538967913_0_0:notes"/>
-          <p:cNvSpPr/>
+          <p:cNvSpPr>
+            <a:spLocks noGrp="1" noRot="1" noChangeAspect="1"/>
+          </p:cNvSpPr>
           <p:nvPr>
-            <p:ph idx="2" type="sldImg"/>
+            <p:ph type="sldImg" idx="2"/>
           </p:nvPr>
         </p:nvSpPr>
         <p:spPr>
@@ -1333,9 +1380,13 @@
             <a:ext cx="1928700" cy="3429000"/>
           </a:xfrm>
           <a:custGeom>
-            <a:rect b="b" l="l" r="r" t="t"/>
+            <a:avLst/>
+            <a:gdLst/>
+            <a:ahLst/>
+            <a:cxnLst/>
+            <a:rect l="l" t="t" r="r" b="b"/>
             <a:pathLst>
-              <a:path extrusionOk="0" h="120000" w="120000">
+              <a:path w="120000" h="120000" extrusionOk="0">
                 <a:moveTo>
                   <a:pt x="0" y="0"/>
                 </a:moveTo>
@@ -1357,9 +1408,11 @@
       <p:sp>
         <p:nvSpPr>
           <p:cNvPr id="57" name="Google Shape;57;g36538967913_0_0:notes"/>
-          <p:cNvSpPr txBox="1"/>
+          <p:cNvSpPr txBox="1">
+            <a:spLocks noGrp="1"/>
+          </p:cNvSpPr>
           <p:nvPr>
-            <p:ph idx="1" type="body"/>
+            <p:ph type="body" idx="1"/>
           </p:nvPr>
         </p:nvSpPr>
         <p:spPr>
@@ -1372,23 +1425,20 @@
           </a:prstGeom>
         </p:spPr>
         <p:txBody>
-          <a:bodyPr anchorCtr="0" anchor="t" bIns="91425" lIns="91425" spcFirstLastPara="1" rIns="91425" wrap="square" tIns="91425">
+          <a:bodyPr spcFirstLastPara="1" wrap="square" lIns="91425" tIns="91425" rIns="91425" bIns="91425" anchor="t" anchorCtr="0">
             <a:noAutofit/>
           </a:bodyPr>
           <a:lstStyle/>
           <a:p>
-            <a:pPr indent="0" lvl="0" marL="0" rtl="0" algn="l">
-              <a:spcBef>
-                <a:spcPts val="0"/>
-              </a:spcBef>
-              <a:spcAft>
-                <a:spcPts val="0"/>
-              </a:spcAft>
-              <a:buNone/>
-            </a:pPr>
-            <a:r>
-              <a:t/>
-            </a:r>
+            <a:pPr marL="0" lvl="0" indent="0" algn="l" rtl="0">
+              <a:spcBef>
+                <a:spcPts val="0"/>
+              </a:spcBef>
+              <a:spcAft>
+                <a:spcPts val="0"/>
+              </a:spcAft>
+              <a:buNone/>
+            </a:pPr>
             <a:endParaRPr/>
           </a:p>
         </p:txBody>
@@ -1402,11 +1452,11 @@
 </file>
 
 <file path=ppt/notesSlides/notesSlide3.xml><?xml version="1.0" encoding="utf-8"?>
-<p:notes xmlns:a="http://schemas.openxmlformats.org/drawingml/2006/main" xmlns:r="http://schemas.openxmlformats.org/officeDocument/2006/relationships" xmlns:mc="http://schemas.openxmlformats.org/markup-compatibility/2006" xmlns:mv="urn:schemas-microsoft-com:mac:vml" xmlns:p="http://schemas.openxmlformats.org/presentationml/2006/main" xmlns:c="http://schemas.openxmlformats.org/drawingml/2006/chart" xmlns:dgm="http://schemas.openxmlformats.org/drawingml/2006/diagram" xmlns:o="urn:schemas-microsoft-com:office:office" xmlns:v="urn:schemas-microsoft-com:vml" xmlns:pvml="urn:schemas-microsoft-com:office:powerpoint" xmlns:com="http://schemas.openxmlformats.org/drawingml/2006/compatibility" xmlns:p14="http://schemas.microsoft.com/office/powerpoint/2010/main" xmlns:p15="http://schemas.microsoft.com/office/powerpoint/2012/main" xmlns:ahyp="http://schemas.microsoft.com/office/drawing/2018/hyperlinkcolor" showMasterPhAnim="0" showMasterSp="0">
+<p:notes xmlns:a="http://schemas.openxmlformats.org/drawingml/2006/main" xmlns:r="http://schemas.openxmlformats.org/officeDocument/2006/relationships" xmlns:p="http://schemas.openxmlformats.org/presentationml/2006/main" showMasterSp="0" showMasterPhAnim="0">
   <p:cSld>
     <p:spTree>
       <p:nvGrpSpPr>
-        <p:cNvPr id="59" name="Shape 59"/>
+        <p:cNvPr id="1" name="Shape 59"/>
         <p:cNvGrpSpPr/>
         <p:nvPr/>
       </p:nvGrpSpPr>
@@ -1421,20 +1471,26 @@
       <p:sp>
         <p:nvSpPr>
           <p:cNvPr id="60" name="Google Shape;60;g36538967913_0_3:notes"/>
-          <p:cNvSpPr/>
+          <p:cNvSpPr>
+            <a:spLocks noGrp="1" noRot="1" noChangeAspect="1"/>
+          </p:cNvSpPr>
           <p:nvPr>
-            <p:ph idx="2" type="sldImg"/>
+            <p:ph type="sldImg" idx="2"/>
           </p:nvPr>
         </p:nvSpPr>
         <p:spPr>
           <a:xfrm>
-            <a:off x="2464919" y="685800"/>
-            <a:ext cx="1928700" cy="3429000"/>
+            <a:off x="2465388" y="685800"/>
+            <a:ext cx="1928812" cy="3429000"/>
           </a:xfrm>
           <a:custGeom>
-            <a:rect b="b" l="l" r="r" t="t"/>
+            <a:avLst/>
+            <a:gdLst/>
+            <a:ahLst/>
+            <a:cxnLst/>
+            <a:rect l="l" t="t" r="r" b="b"/>
             <a:pathLst>
-              <a:path extrusionOk="0" h="120000" w="120000">
+              <a:path w="120000" h="120000" extrusionOk="0">
                 <a:moveTo>
                   <a:pt x="0" y="0"/>
                 </a:moveTo>
@@ -1456,9 +1512,11 @@
       <p:sp>
         <p:nvSpPr>
           <p:cNvPr id="61" name="Google Shape;61;g36538967913_0_3:notes"/>
-          <p:cNvSpPr txBox="1"/>
+          <p:cNvSpPr txBox="1">
+            <a:spLocks noGrp="1"/>
+          </p:cNvSpPr>
           <p:nvPr>
-            <p:ph idx="1" type="body"/>
+            <p:ph type="body" idx="1"/>
           </p:nvPr>
         </p:nvSpPr>
         <p:spPr>
@@ -1471,23 +1529,20 @@
           </a:prstGeom>
         </p:spPr>
         <p:txBody>
-          <a:bodyPr anchorCtr="0" anchor="t" bIns="91425" lIns="91425" spcFirstLastPara="1" rIns="91425" wrap="square" tIns="91425">
+          <a:bodyPr spcFirstLastPara="1" wrap="square" lIns="91425" tIns="91425" rIns="91425" bIns="91425" anchor="t" anchorCtr="0">
             <a:noAutofit/>
           </a:bodyPr>
           <a:lstStyle/>
           <a:p>
-            <a:pPr indent="0" lvl="0" marL="0" rtl="0" algn="l">
-              <a:spcBef>
-                <a:spcPts val="0"/>
-              </a:spcBef>
-              <a:spcAft>
-                <a:spcPts val="0"/>
-              </a:spcAft>
-              <a:buNone/>
-            </a:pPr>
-            <a:r>
-              <a:t/>
-            </a:r>
+            <a:pPr marL="0" lvl="0" indent="0" algn="l" rtl="0">
+              <a:spcBef>
+                <a:spcPts val="0"/>
+              </a:spcBef>
+              <a:spcAft>
+                <a:spcPts val="0"/>
+              </a:spcAft>
+              <a:buNone/>
+            </a:pPr>
             <a:endParaRPr/>
           </a:p>
         </p:txBody>
@@ -1501,11 +1556,11 @@
 </file>
 
 <file path=ppt/notesSlides/notesSlide4.xml><?xml version="1.0" encoding="utf-8"?>
-<p:notes xmlns:a="http://schemas.openxmlformats.org/drawingml/2006/main" xmlns:r="http://schemas.openxmlformats.org/officeDocument/2006/relationships" xmlns:mc="http://schemas.openxmlformats.org/markup-compatibility/2006" xmlns:mv="urn:schemas-microsoft-com:mac:vml" xmlns:p="http://schemas.openxmlformats.org/presentationml/2006/main" xmlns:c="http://schemas.openxmlformats.org/drawingml/2006/chart" xmlns:dgm="http://schemas.openxmlformats.org/drawingml/2006/diagram" xmlns:o="urn:schemas-microsoft-com:office:office" xmlns:v="urn:schemas-microsoft-com:vml" xmlns:pvml="urn:schemas-microsoft-com:office:powerpoint" xmlns:com="http://schemas.openxmlformats.org/drawingml/2006/compatibility" xmlns:p14="http://schemas.microsoft.com/office/powerpoint/2010/main" xmlns:p15="http://schemas.microsoft.com/office/powerpoint/2012/main" xmlns:ahyp="http://schemas.microsoft.com/office/drawing/2018/hyperlinkcolor" showMasterPhAnim="0" showMasterSp="0">
+<p:notes xmlns:a="http://schemas.openxmlformats.org/drawingml/2006/main" xmlns:r="http://schemas.openxmlformats.org/officeDocument/2006/relationships" xmlns:p="http://schemas.openxmlformats.org/presentationml/2006/main" showMasterSp="0" showMasterPhAnim="0">
   <p:cSld>
     <p:spTree>
       <p:nvGrpSpPr>
-        <p:cNvPr id="64" name="Shape 64"/>
+        <p:cNvPr id="1" name="Shape 64"/>
         <p:cNvGrpSpPr/>
         <p:nvPr/>
       </p:nvGrpSpPr>
@@ -1520,20 +1575,26 @@
       <p:sp>
         <p:nvSpPr>
           <p:cNvPr id="65" name="Google Shape;65;g36538967913_0_6:notes"/>
-          <p:cNvSpPr/>
+          <p:cNvSpPr>
+            <a:spLocks noGrp="1" noRot="1" noChangeAspect="1"/>
+          </p:cNvSpPr>
           <p:nvPr>
-            <p:ph idx="2" type="sldImg"/>
+            <p:ph type="sldImg" idx="2"/>
           </p:nvPr>
         </p:nvSpPr>
         <p:spPr>
           <a:xfrm>
-            <a:off x="2464919" y="685800"/>
-            <a:ext cx="1928700" cy="3429000"/>
+            <a:off x="2465388" y="685800"/>
+            <a:ext cx="1928812" cy="3429000"/>
           </a:xfrm>
           <a:custGeom>
-            <a:rect b="b" l="l" r="r" t="t"/>
+            <a:avLst/>
+            <a:gdLst/>
+            <a:ahLst/>
+            <a:cxnLst/>
+            <a:rect l="l" t="t" r="r" b="b"/>
             <a:pathLst>
-              <a:path extrusionOk="0" h="120000" w="120000">
+              <a:path w="120000" h="120000" extrusionOk="0">
                 <a:moveTo>
                   <a:pt x="0" y="0"/>
                 </a:moveTo>
@@ -1555,9 +1616,11 @@
       <p:sp>
         <p:nvSpPr>
           <p:cNvPr id="66" name="Google Shape;66;g36538967913_0_6:notes"/>
-          <p:cNvSpPr txBox="1"/>
+          <p:cNvSpPr txBox="1">
+            <a:spLocks noGrp="1"/>
+          </p:cNvSpPr>
           <p:nvPr>
-            <p:ph idx="1" type="body"/>
+            <p:ph type="body" idx="1"/>
           </p:nvPr>
         </p:nvSpPr>
         <p:spPr>
@@ -1570,23 +1633,20 @@
           </a:prstGeom>
         </p:spPr>
         <p:txBody>
-          <a:bodyPr anchorCtr="0" anchor="t" bIns="91425" lIns="91425" spcFirstLastPara="1" rIns="91425" wrap="square" tIns="91425">
+          <a:bodyPr spcFirstLastPara="1" wrap="square" lIns="91425" tIns="91425" rIns="91425" bIns="91425" anchor="t" anchorCtr="0">
             <a:noAutofit/>
           </a:bodyPr>
           <a:lstStyle/>
           <a:p>
-            <a:pPr indent="0" lvl="0" marL="0" rtl="0" algn="l">
-              <a:spcBef>
-                <a:spcPts val="0"/>
-              </a:spcBef>
-              <a:spcAft>
-                <a:spcPts val="0"/>
-              </a:spcAft>
-              <a:buNone/>
-            </a:pPr>
-            <a:r>
-              <a:t/>
-            </a:r>
+            <a:pPr marL="0" lvl="0" indent="0" algn="l" rtl="0">
+              <a:spcBef>
+                <a:spcPts val="0"/>
+              </a:spcBef>
+              <a:spcAft>
+                <a:spcPts val="0"/>
+              </a:spcAft>
+              <a:buNone/>
+            </a:pPr>
             <a:endParaRPr/>
           </a:p>
         </p:txBody>
@@ -1600,11 +1660,11 @@
 </file>
 
 <file path=ppt/notesSlides/notesSlide5.xml><?xml version="1.0" encoding="utf-8"?>
-<p:notes xmlns:a="http://schemas.openxmlformats.org/drawingml/2006/main" xmlns:r="http://schemas.openxmlformats.org/officeDocument/2006/relationships" xmlns:mc="http://schemas.openxmlformats.org/markup-compatibility/2006" xmlns:mv="urn:schemas-microsoft-com:mac:vml" xmlns:p="http://schemas.openxmlformats.org/presentationml/2006/main" xmlns:c="http://schemas.openxmlformats.org/drawingml/2006/chart" xmlns:dgm="http://schemas.openxmlformats.org/drawingml/2006/diagram" xmlns:o="urn:schemas-microsoft-com:office:office" xmlns:v="urn:schemas-microsoft-com:vml" xmlns:pvml="urn:schemas-microsoft-com:office:powerpoint" xmlns:com="http://schemas.openxmlformats.org/drawingml/2006/compatibility" xmlns:p14="http://schemas.microsoft.com/office/powerpoint/2010/main" xmlns:p15="http://schemas.microsoft.com/office/powerpoint/2012/main" xmlns:ahyp="http://schemas.microsoft.com/office/drawing/2018/hyperlinkcolor" showMasterPhAnim="0" showMasterSp="0">
+<p:notes xmlns:a="http://schemas.openxmlformats.org/drawingml/2006/main" xmlns:r="http://schemas.openxmlformats.org/officeDocument/2006/relationships" xmlns:p="http://schemas.openxmlformats.org/presentationml/2006/main" showMasterSp="0" showMasterPhAnim="0">
   <p:cSld>
     <p:spTree>
       <p:nvGrpSpPr>
-        <p:cNvPr id="69" name="Shape 69"/>
+        <p:cNvPr id="1" name="Shape 69"/>
         <p:cNvGrpSpPr/>
         <p:nvPr/>
       </p:nvGrpSpPr>
@@ -1619,20 +1679,26 @@
       <p:sp>
         <p:nvSpPr>
           <p:cNvPr id="70" name="Google Shape;70;g36538967913_0_9:notes"/>
-          <p:cNvSpPr/>
+          <p:cNvSpPr>
+            <a:spLocks noGrp="1" noRot="1" noChangeAspect="1"/>
+          </p:cNvSpPr>
           <p:nvPr>
-            <p:ph idx="2" type="sldImg"/>
+            <p:ph type="sldImg" idx="2"/>
           </p:nvPr>
         </p:nvSpPr>
         <p:spPr>
           <a:xfrm>
-            <a:off x="2464919" y="685800"/>
-            <a:ext cx="1928700" cy="3429000"/>
+            <a:off x="2465388" y="685800"/>
+            <a:ext cx="1928812" cy="3429000"/>
           </a:xfrm>
           <a:custGeom>
-            <a:rect b="b" l="l" r="r" t="t"/>
+            <a:avLst/>
+            <a:gdLst/>
+            <a:ahLst/>
+            <a:cxnLst/>
+            <a:rect l="l" t="t" r="r" b="b"/>
             <a:pathLst>
-              <a:path extrusionOk="0" h="120000" w="120000">
+              <a:path w="120000" h="120000" extrusionOk="0">
                 <a:moveTo>
                   <a:pt x="0" y="0"/>
                 </a:moveTo>
@@ -1654,9 +1720,11 @@
       <p:sp>
         <p:nvSpPr>
           <p:cNvPr id="71" name="Google Shape;71;g36538967913_0_9:notes"/>
-          <p:cNvSpPr txBox="1"/>
+          <p:cNvSpPr txBox="1">
+            <a:spLocks noGrp="1"/>
+          </p:cNvSpPr>
           <p:nvPr>
-            <p:ph idx="1" type="body"/>
+            <p:ph type="body" idx="1"/>
           </p:nvPr>
         </p:nvSpPr>
         <p:spPr>
@@ -1669,23 +1737,20 @@
           </a:prstGeom>
         </p:spPr>
         <p:txBody>
-          <a:bodyPr anchorCtr="0" anchor="t" bIns="91425" lIns="91425" spcFirstLastPara="1" rIns="91425" wrap="square" tIns="91425">
+          <a:bodyPr spcFirstLastPara="1" wrap="square" lIns="91425" tIns="91425" rIns="91425" bIns="91425" anchor="t" anchorCtr="0">
             <a:noAutofit/>
           </a:bodyPr>
           <a:lstStyle/>
           <a:p>
-            <a:pPr indent="0" lvl="0" marL="0" rtl="0" algn="l">
-              <a:spcBef>
-                <a:spcPts val="0"/>
-              </a:spcBef>
-              <a:spcAft>
-                <a:spcPts val="0"/>
-              </a:spcAft>
-              <a:buNone/>
-            </a:pPr>
-            <a:r>
-              <a:t/>
-            </a:r>
+            <a:pPr marL="0" lvl="0" indent="0" algn="l" rtl="0">
+              <a:spcBef>
+                <a:spcPts val="0"/>
+              </a:spcBef>
+              <a:spcAft>
+                <a:spcPts val="0"/>
+              </a:spcAft>
+              <a:buNone/>
+            </a:pPr>
             <a:endParaRPr/>
           </a:p>
         </p:txBody>
@@ -1699,11 +1764,11 @@
 </file>
 
 <file path=ppt/notesSlides/notesSlide6.xml><?xml version="1.0" encoding="utf-8"?>
-<p:notes xmlns:a="http://schemas.openxmlformats.org/drawingml/2006/main" xmlns:r="http://schemas.openxmlformats.org/officeDocument/2006/relationships" xmlns:mc="http://schemas.openxmlformats.org/markup-compatibility/2006" xmlns:mv="urn:schemas-microsoft-com:mac:vml" xmlns:p="http://schemas.openxmlformats.org/presentationml/2006/main" xmlns:c="http://schemas.openxmlformats.org/drawingml/2006/chart" xmlns:dgm="http://schemas.openxmlformats.org/drawingml/2006/diagram" xmlns:o="urn:schemas-microsoft-com:office:office" xmlns:v="urn:schemas-microsoft-com:vml" xmlns:pvml="urn:schemas-microsoft-com:office:powerpoint" xmlns:com="http://schemas.openxmlformats.org/drawingml/2006/compatibility" xmlns:p14="http://schemas.microsoft.com/office/powerpoint/2010/main" xmlns:p15="http://schemas.microsoft.com/office/powerpoint/2012/main" xmlns:ahyp="http://schemas.microsoft.com/office/drawing/2018/hyperlinkcolor" showMasterPhAnim="0" showMasterSp="0">
+<p:notes xmlns:a="http://schemas.openxmlformats.org/drawingml/2006/main" xmlns:r="http://schemas.openxmlformats.org/officeDocument/2006/relationships" xmlns:p="http://schemas.openxmlformats.org/presentationml/2006/main" showMasterSp="0" showMasterPhAnim="0">
   <p:cSld>
     <p:spTree>
       <p:nvGrpSpPr>
-        <p:cNvPr id="74" name="Shape 74"/>
+        <p:cNvPr id="1" name="Shape 74"/>
         <p:cNvGrpSpPr/>
         <p:nvPr/>
       </p:nvGrpSpPr>
@@ -1718,20 +1783,26 @@
       <p:sp>
         <p:nvSpPr>
           <p:cNvPr id="75" name="Google Shape;75;g36538967913_0_12:notes"/>
-          <p:cNvSpPr/>
+          <p:cNvSpPr>
+            <a:spLocks noGrp="1" noRot="1" noChangeAspect="1"/>
+          </p:cNvSpPr>
           <p:nvPr>
-            <p:ph idx="2" type="sldImg"/>
+            <p:ph type="sldImg" idx="2"/>
           </p:nvPr>
         </p:nvSpPr>
         <p:spPr>
           <a:xfrm>
-            <a:off x="2464919" y="685800"/>
-            <a:ext cx="1928700" cy="3429000"/>
+            <a:off x="2465388" y="685800"/>
+            <a:ext cx="1928812" cy="3429000"/>
           </a:xfrm>
           <a:custGeom>
-            <a:rect b="b" l="l" r="r" t="t"/>
+            <a:avLst/>
+            <a:gdLst/>
+            <a:ahLst/>
+            <a:cxnLst/>
+            <a:rect l="l" t="t" r="r" b="b"/>
             <a:pathLst>
-              <a:path extrusionOk="0" h="120000" w="120000">
+              <a:path w="120000" h="120000" extrusionOk="0">
                 <a:moveTo>
                   <a:pt x="0" y="0"/>
                 </a:moveTo>
@@ -1753,9 +1824,11 @@
       <p:sp>
         <p:nvSpPr>
           <p:cNvPr id="76" name="Google Shape;76;g36538967913_0_12:notes"/>
-          <p:cNvSpPr txBox="1"/>
+          <p:cNvSpPr txBox="1">
+            <a:spLocks noGrp="1"/>
+          </p:cNvSpPr>
           <p:nvPr>
-            <p:ph idx="1" type="body"/>
+            <p:ph type="body" idx="1"/>
           </p:nvPr>
         </p:nvSpPr>
         <p:spPr>
@@ -1768,23 +1841,20 @@
           </a:prstGeom>
         </p:spPr>
         <p:txBody>
-          <a:bodyPr anchorCtr="0" anchor="t" bIns="91425" lIns="91425" spcFirstLastPara="1" rIns="91425" wrap="square" tIns="91425">
+          <a:bodyPr spcFirstLastPara="1" wrap="square" lIns="91425" tIns="91425" rIns="91425" bIns="91425" anchor="t" anchorCtr="0">
             <a:noAutofit/>
           </a:bodyPr>
           <a:lstStyle/>
           <a:p>
-            <a:pPr indent="0" lvl="0" marL="0" rtl="0" algn="l">
-              <a:spcBef>
-                <a:spcPts val="0"/>
-              </a:spcBef>
-              <a:spcAft>
-                <a:spcPts val="0"/>
-              </a:spcAft>
-              <a:buNone/>
-            </a:pPr>
-            <a:r>
-              <a:t/>
-            </a:r>
+            <a:pPr marL="0" lvl="0" indent="0" algn="l" rtl="0">
+              <a:spcBef>
+                <a:spcPts val="0"/>
+              </a:spcBef>
+              <a:spcAft>
+                <a:spcPts val="0"/>
+              </a:spcAft>
+              <a:buNone/>
+            </a:pPr>
             <a:endParaRPr/>
           </a:p>
         </p:txBody>
@@ -1798,11 +1868,11 @@
 </file>
 
 <file path=ppt/notesSlides/notesSlide7.xml><?xml version="1.0" encoding="utf-8"?>
-<p:notes xmlns:a="http://schemas.openxmlformats.org/drawingml/2006/main" xmlns:r="http://schemas.openxmlformats.org/officeDocument/2006/relationships" xmlns:mc="http://schemas.openxmlformats.org/markup-compatibility/2006" xmlns:mv="urn:schemas-microsoft-com:mac:vml" xmlns:p="http://schemas.openxmlformats.org/presentationml/2006/main" xmlns:c="http://schemas.openxmlformats.org/drawingml/2006/chart" xmlns:dgm="http://schemas.openxmlformats.org/drawingml/2006/diagram" xmlns:o="urn:schemas-microsoft-com:office:office" xmlns:v="urn:schemas-microsoft-com:vml" xmlns:pvml="urn:schemas-microsoft-com:office:powerpoint" xmlns:com="http://schemas.openxmlformats.org/drawingml/2006/compatibility" xmlns:p14="http://schemas.microsoft.com/office/powerpoint/2010/main" xmlns:p15="http://schemas.microsoft.com/office/powerpoint/2012/main" xmlns:ahyp="http://schemas.microsoft.com/office/drawing/2018/hyperlinkcolor" showMasterPhAnim="0" showMasterSp="0">
+<p:notes xmlns:a="http://schemas.openxmlformats.org/drawingml/2006/main" xmlns:r="http://schemas.openxmlformats.org/officeDocument/2006/relationships" xmlns:p="http://schemas.openxmlformats.org/presentationml/2006/main" showMasterSp="0" showMasterPhAnim="0">
   <p:cSld>
     <p:spTree>
       <p:nvGrpSpPr>
-        <p:cNvPr id="79" name="Shape 79"/>
+        <p:cNvPr id="1" name="Shape 79"/>
         <p:cNvGrpSpPr/>
         <p:nvPr/>
       </p:nvGrpSpPr>
@@ -1817,20 +1887,26 @@
       <p:sp>
         <p:nvSpPr>
           <p:cNvPr id="80" name="Google Shape;80;g36538967913_0_15:notes"/>
-          <p:cNvSpPr/>
+          <p:cNvSpPr>
+            <a:spLocks noGrp="1" noRot="1" noChangeAspect="1"/>
+          </p:cNvSpPr>
           <p:nvPr>
-            <p:ph idx="2" type="sldImg"/>
+            <p:ph type="sldImg" idx="2"/>
           </p:nvPr>
         </p:nvSpPr>
         <p:spPr>
           <a:xfrm>
-            <a:off x="2464919" y="685800"/>
-            <a:ext cx="1928700" cy="3429000"/>
+            <a:off x="2465388" y="685800"/>
+            <a:ext cx="1928812" cy="3429000"/>
           </a:xfrm>
           <a:custGeom>
-            <a:rect b="b" l="l" r="r" t="t"/>
+            <a:avLst/>
+            <a:gdLst/>
+            <a:ahLst/>
+            <a:cxnLst/>
+            <a:rect l="l" t="t" r="r" b="b"/>
             <a:pathLst>
-              <a:path extrusionOk="0" h="120000" w="120000">
+              <a:path w="120000" h="120000" extrusionOk="0">
                 <a:moveTo>
                   <a:pt x="0" y="0"/>
                 </a:moveTo>
@@ -1852,9 +1928,11 @@
       <p:sp>
         <p:nvSpPr>
           <p:cNvPr id="81" name="Google Shape;81;g36538967913_0_15:notes"/>
-          <p:cNvSpPr txBox="1"/>
+          <p:cNvSpPr txBox="1">
+            <a:spLocks noGrp="1"/>
+          </p:cNvSpPr>
           <p:nvPr>
-            <p:ph idx="1" type="body"/>
+            <p:ph type="body" idx="1"/>
           </p:nvPr>
         </p:nvSpPr>
         <p:spPr>
@@ -1867,23 +1945,20 @@
           </a:prstGeom>
         </p:spPr>
         <p:txBody>
-          <a:bodyPr anchorCtr="0" anchor="t" bIns="91425" lIns="91425" spcFirstLastPara="1" rIns="91425" wrap="square" tIns="91425">
+          <a:bodyPr spcFirstLastPara="1" wrap="square" lIns="91425" tIns="91425" rIns="91425" bIns="91425" anchor="t" anchorCtr="0">
             <a:noAutofit/>
           </a:bodyPr>
           <a:lstStyle/>
           <a:p>
-            <a:pPr indent="0" lvl="0" marL="0" rtl="0" algn="l">
-              <a:spcBef>
-                <a:spcPts val="0"/>
-              </a:spcBef>
-              <a:spcAft>
-                <a:spcPts val="0"/>
-              </a:spcAft>
-              <a:buNone/>
-            </a:pPr>
-            <a:r>
-              <a:t/>
-            </a:r>
+            <a:pPr marL="0" lvl="0" indent="0" algn="l" rtl="0">
+              <a:spcBef>
+                <a:spcPts val="0"/>
+              </a:spcBef>
+              <a:spcAft>
+                <a:spcPts val="0"/>
+              </a:spcAft>
+              <a:buNone/>
+            </a:pPr>
             <a:endParaRPr/>
           </a:p>
         </p:txBody>
@@ -1897,11 +1972,11 @@
 </file>
 
 <file path=ppt/notesSlides/notesSlide8.xml><?xml version="1.0" encoding="utf-8"?>
-<p:notes xmlns:a="http://schemas.openxmlformats.org/drawingml/2006/main" xmlns:r="http://schemas.openxmlformats.org/officeDocument/2006/relationships" xmlns:mc="http://schemas.openxmlformats.org/markup-compatibility/2006" xmlns:mv="urn:schemas-microsoft-com:mac:vml" xmlns:p="http://schemas.openxmlformats.org/presentationml/2006/main" xmlns:c="http://schemas.openxmlformats.org/drawingml/2006/chart" xmlns:dgm="http://schemas.openxmlformats.org/drawingml/2006/diagram" xmlns:o="urn:schemas-microsoft-com:office:office" xmlns:v="urn:schemas-microsoft-com:vml" xmlns:pvml="urn:schemas-microsoft-com:office:powerpoint" xmlns:com="http://schemas.openxmlformats.org/drawingml/2006/compatibility" xmlns:p14="http://schemas.microsoft.com/office/powerpoint/2010/main" xmlns:p15="http://schemas.microsoft.com/office/powerpoint/2012/main" xmlns:ahyp="http://schemas.microsoft.com/office/drawing/2018/hyperlinkcolor" showMasterPhAnim="0" showMasterSp="0">
+<p:notes xmlns:a="http://schemas.openxmlformats.org/drawingml/2006/main" xmlns:r="http://schemas.openxmlformats.org/officeDocument/2006/relationships" xmlns:p="http://schemas.openxmlformats.org/presentationml/2006/main" showMasterSp="0" showMasterPhAnim="0">
   <p:cSld>
     <p:spTree>
       <p:nvGrpSpPr>
-        <p:cNvPr id="84" name="Shape 84"/>
+        <p:cNvPr id="1" name="Shape 84"/>
         <p:cNvGrpSpPr/>
         <p:nvPr/>
       </p:nvGrpSpPr>
@@ -1916,20 +1991,26 @@
       <p:sp>
         <p:nvSpPr>
           <p:cNvPr id="85" name="Google Shape;85;g36538967913_0_21:notes"/>
-          <p:cNvSpPr/>
+          <p:cNvSpPr>
+            <a:spLocks noGrp="1" noRot="1" noChangeAspect="1"/>
+          </p:cNvSpPr>
           <p:nvPr>
-            <p:ph idx="2" type="sldImg"/>
+            <p:ph type="sldImg" idx="2"/>
           </p:nvPr>
         </p:nvSpPr>
         <p:spPr>
           <a:xfrm>
-            <a:off x="2464919" y="685800"/>
-            <a:ext cx="1928700" cy="3429000"/>
+            <a:off x="2465388" y="685800"/>
+            <a:ext cx="1928812" cy="3429000"/>
           </a:xfrm>
           <a:custGeom>
-            <a:rect b="b" l="l" r="r" t="t"/>
+            <a:avLst/>
+            <a:gdLst/>
+            <a:ahLst/>
+            <a:cxnLst/>
+            <a:rect l="l" t="t" r="r" b="b"/>
             <a:pathLst>
-              <a:path extrusionOk="0" h="120000" w="120000">
+              <a:path w="120000" h="120000" extrusionOk="0">
                 <a:moveTo>
                   <a:pt x="0" y="0"/>
                 </a:moveTo>
@@ -1951,9 +2032,11 @@
       <p:sp>
         <p:nvSpPr>
           <p:cNvPr id="86" name="Google Shape;86;g36538967913_0_21:notes"/>
-          <p:cNvSpPr txBox="1"/>
+          <p:cNvSpPr txBox="1">
+            <a:spLocks noGrp="1"/>
+          </p:cNvSpPr>
           <p:nvPr>
-            <p:ph idx="1" type="body"/>
+            <p:ph type="body" idx="1"/>
           </p:nvPr>
         </p:nvSpPr>
         <p:spPr>
@@ -1966,23 +2049,20 @@
           </a:prstGeom>
         </p:spPr>
         <p:txBody>
-          <a:bodyPr anchorCtr="0" anchor="t" bIns="91425" lIns="91425" spcFirstLastPara="1" rIns="91425" wrap="square" tIns="91425">
+          <a:bodyPr spcFirstLastPara="1" wrap="square" lIns="91425" tIns="91425" rIns="91425" bIns="91425" anchor="t" anchorCtr="0">
             <a:noAutofit/>
           </a:bodyPr>
           <a:lstStyle/>
           <a:p>
-            <a:pPr indent="0" lvl="0" marL="0" rtl="0" algn="l">
-              <a:spcBef>
-                <a:spcPts val="0"/>
-              </a:spcBef>
-              <a:spcAft>
-                <a:spcPts val="0"/>
-              </a:spcAft>
-              <a:buNone/>
-            </a:pPr>
-            <a:r>
-              <a:t/>
-            </a:r>
+            <a:pPr marL="0" lvl="0" indent="0" algn="l" rtl="0">
+              <a:spcBef>
+                <a:spcPts val="0"/>
+              </a:spcBef>
+              <a:spcAft>
+                <a:spcPts val="0"/>
+              </a:spcAft>
+              <a:buNone/>
+            </a:pPr>
             <a:endParaRPr/>
           </a:p>
         </p:txBody>
@@ -1996,11 +2076,11 @@
 </file>
 
 <file path=ppt/notesSlides/notesSlide9.xml><?xml version="1.0" encoding="utf-8"?>
-<p:notes xmlns:a="http://schemas.openxmlformats.org/drawingml/2006/main" xmlns:r="http://schemas.openxmlformats.org/officeDocument/2006/relationships" xmlns:mc="http://schemas.openxmlformats.org/markup-compatibility/2006" xmlns:mv="urn:schemas-microsoft-com:mac:vml" xmlns:p="http://schemas.openxmlformats.org/presentationml/2006/main" xmlns:c="http://schemas.openxmlformats.org/drawingml/2006/chart" xmlns:dgm="http://schemas.openxmlformats.org/drawingml/2006/diagram" xmlns:o="urn:schemas-microsoft-com:office:office" xmlns:v="urn:schemas-microsoft-com:vml" xmlns:pvml="urn:schemas-microsoft-com:office:powerpoint" xmlns:com="http://schemas.openxmlformats.org/drawingml/2006/compatibility" xmlns:p14="http://schemas.microsoft.com/office/powerpoint/2010/main" xmlns:p15="http://schemas.microsoft.com/office/powerpoint/2012/main" xmlns:ahyp="http://schemas.microsoft.com/office/drawing/2018/hyperlinkcolor" showMasterPhAnim="0" showMasterSp="0">
+<p:notes xmlns:a="http://schemas.openxmlformats.org/drawingml/2006/main" xmlns:r="http://schemas.openxmlformats.org/officeDocument/2006/relationships" xmlns:p="http://schemas.openxmlformats.org/presentationml/2006/main" showMasterSp="0" showMasterPhAnim="0">
   <p:cSld>
     <p:spTree>
       <p:nvGrpSpPr>
-        <p:cNvPr id="89" name="Shape 89"/>
+        <p:cNvPr id="1" name="Shape 89"/>
         <p:cNvGrpSpPr/>
         <p:nvPr/>
       </p:nvGrpSpPr>
@@ -2015,9 +2095,11 @@
       <p:sp>
         <p:nvSpPr>
           <p:cNvPr id="90" name="Google Shape;90;g36538967913_0_24:notes"/>
-          <p:cNvSpPr/>
+          <p:cNvSpPr>
+            <a:spLocks noGrp="1" noRot="1" noChangeAspect="1"/>
+          </p:cNvSpPr>
           <p:nvPr>
-            <p:ph idx="2" type="sldImg"/>
+            <p:ph type="sldImg" idx="2"/>
           </p:nvPr>
         </p:nvSpPr>
         <p:spPr>
@@ -2026,9 +2108,13 @@
             <a:ext cx="1928700" cy="3429000"/>
           </a:xfrm>
           <a:custGeom>
-            <a:rect b="b" l="l" r="r" t="t"/>
+            <a:avLst/>
+            <a:gdLst/>
+            <a:ahLst/>
+            <a:cxnLst/>
+            <a:rect l="l" t="t" r="r" b="b"/>
             <a:pathLst>
-              <a:path extrusionOk="0" h="120000" w="120000">
+              <a:path w="120000" h="120000" extrusionOk="0">
                 <a:moveTo>
                   <a:pt x="0" y="0"/>
                 </a:moveTo>
@@ -2050,9 +2136,11 @@
       <p:sp>
         <p:nvSpPr>
           <p:cNvPr id="91" name="Google Shape;91;g36538967913_0_24:notes"/>
-          <p:cNvSpPr txBox="1"/>
+          <p:cNvSpPr txBox="1">
+            <a:spLocks noGrp="1"/>
+          </p:cNvSpPr>
           <p:nvPr>
-            <p:ph idx="1" type="body"/>
+            <p:ph type="body" idx="1"/>
           </p:nvPr>
         </p:nvSpPr>
         <p:spPr>
@@ -2065,23 +2153,20 @@
           </a:prstGeom>
         </p:spPr>
         <p:txBody>
-          <a:bodyPr anchorCtr="0" anchor="t" bIns="91425" lIns="91425" spcFirstLastPara="1" rIns="91425" wrap="square" tIns="91425">
+          <a:bodyPr spcFirstLastPara="1" wrap="square" lIns="91425" tIns="91425" rIns="91425" bIns="91425" anchor="t" anchorCtr="0">
             <a:noAutofit/>
           </a:bodyPr>
           <a:lstStyle/>
           <a:p>
-            <a:pPr indent="0" lvl="0" marL="0" rtl="0" algn="l">
-              <a:spcBef>
-                <a:spcPts val="0"/>
-              </a:spcBef>
-              <a:spcAft>
-                <a:spcPts val="0"/>
-              </a:spcAft>
-              <a:buNone/>
-            </a:pPr>
-            <a:r>
-              <a:t/>
-            </a:r>
+            <a:pPr marL="0" lvl="0" indent="0" algn="l" rtl="0">
+              <a:spcBef>
+                <a:spcPts val="0"/>
+              </a:spcBef>
+              <a:spcAft>
+                <a:spcPts val="0"/>
+              </a:spcAft>
+              <a:buNone/>
+            </a:pPr>
             <a:endParaRPr/>
           </a:p>
         </p:txBody>
@@ -2095,11 +2180,11 @@
 </file>
 
 <file path=ppt/slideLayouts/slideLayout1.xml><?xml version="1.0" encoding="utf-8"?>
-<p:sldLayout xmlns:a="http://schemas.openxmlformats.org/drawingml/2006/main" xmlns:r="http://schemas.openxmlformats.org/officeDocument/2006/relationships" xmlns:mc="http://schemas.openxmlformats.org/markup-compatibility/2006" xmlns:mv="urn:schemas-microsoft-com:mac:vml" xmlns:p="http://schemas.openxmlformats.org/presentationml/2006/main" xmlns:c="http://schemas.openxmlformats.org/drawingml/2006/chart" xmlns:dgm="http://schemas.openxmlformats.org/drawingml/2006/diagram" xmlns:o="urn:schemas-microsoft-com:office:office" xmlns:v="urn:schemas-microsoft-com:vml" xmlns:pvml="urn:schemas-microsoft-com:office:powerpoint" xmlns:com="http://schemas.openxmlformats.org/drawingml/2006/compatibility" xmlns:p14="http://schemas.microsoft.com/office/powerpoint/2010/main" xmlns:p15="http://schemas.microsoft.com/office/powerpoint/2012/main" xmlns:ahyp="http://schemas.microsoft.com/office/drawing/2018/hyperlinkcolor" matchingName="Title slide" type="title">
+<p:sldLayout xmlns:a="http://schemas.openxmlformats.org/drawingml/2006/main" xmlns:r="http://schemas.openxmlformats.org/officeDocument/2006/relationships" xmlns:p="http://schemas.openxmlformats.org/presentationml/2006/main" matchingName="Title slide" type="title">
   <p:cSld name="TITLE">
     <p:spTree>
       <p:nvGrpSpPr>
-        <p:cNvPr id="9" name="Shape 9"/>
+        <p:cNvPr id="1" name="Shape 9"/>
         <p:cNvGrpSpPr/>
         <p:nvPr/>
       </p:nvGrpSpPr>
@@ -2114,7 +2199,9 @@
       <p:sp>
         <p:nvSpPr>
           <p:cNvPr id="10" name="Google Shape;10;p2"/>
-          <p:cNvSpPr txBox="1"/>
+          <p:cNvSpPr txBox="1">
+            <a:spLocks noGrp="1"/>
+          </p:cNvSpPr>
           <p:nvPr>
             <p:ph type="ctrTitle"/>
           </p:nvPr>
@@ -2129,7 +2216,7 @@
           </a:prstGeom>
         </p:spPr>
         <p:txBody>
-          <a:bodyPr anchorCtr="0" anchor="b" bIns="176925" lIns="176925" spcFirstLastPara="1" rIns="176925" wrap="square" tIns="176925">
+          <a:bodyPr spcFirstLastPara="1" wrap="square" lIns="176925" tIns="176925" rIns="176925" bIns="176925" anchor="b" anchorCtr="0">
             <a:normAutofit/>
           </a:bodyPr>
           <a:lstStyle>
@@ -2233,15 +2320,19 @@
               <a:defRPr sz="10063"/>
             </a:lvl9pPr>
           </a:lstStyle>
-          <a:p/>
+          <a:p>
+            <a:endParaRPr/>
+          </a:p>
         </p:txBody>
       </p:sp>
       <p:sp>
         <p:nvSpPr>
           <p:cNvPr id="11" name="Google Shape;11;p2"/>
-          <p:cNvSpPr txBox="1"/>
+          <p:cNvSpPr txBox="1">
+            <a:spLocks noGrp="1"/>
+          </p:cNvSpPr>
           <p:nvPr>
-            <p:ph idx="1" type="subTitle"/>
+            <p:ph type="subTitle" idx="1"/>
           </p:nvPr>
         </p:nvSpPr>
         <p:spPr>
@@ -2254,7 +2345,7 @@
           </a:prstGeom>
         </p:spPr>
         <p:txBody>
-          <a:bodyPr anchorCtr="0" anchor="t" bIns="176925" lIns="176925" spcFirstLastPara="1" rIns="176925" wrap="square" tIns="176925">
+          <a:bodyPr spcFirstLastPara="1" wrap="square" lIns="176925" tIns="176925" rIns="176925" bIns="176925" anchor="t" anchorCtr="0">
             <a:normAutofit/>
           </a:bodyPr>
           <a:lstStyle>
@@ -2385,15 +2476,19 @@
               <a:defRPr sz="5419"/>
             </a:lvl9pPr>
           </a:lstStyle>
-          <a:p/>
+          <a:p>
+            <a:endParaRPr/>
+          </a:p>
         </p:txBody>
       </p:sp>
       <p:sp>
         <p:nvSpPr>
           <p:cNvPr id="12" name="Google Shape;12;p2"/>
-          <p:cNvSpPr txBox="1"/>
+          <p:cNvSpPr txBox="1">
+            <a:spLocks noGrp="1"/>
+          </p:cNvSpPr>
           <p:nvPr>
-            <p:ph idx="12" type="sldNum"/>
+            <p:ph type="sldNum" idx="12"/>
           </p:nvPr>
         </p:nvSpPr>
         <p:spPr>
@@ -2406,7 +2501,7 @@
           </a:prstGeom>
         </p:spPr>
         <p:txBody>
-          <a:bodyPr anchorCtr="0" anchor="ctr" bIns="176925" lIns="176925" spcFirstLastPara="1" rIns="176925" wrap="square" tIns="176925">
+          <a:bodyPr spcFirstLastPara="1" wrap="square" lIns="176925" tIns="176925" rIns="176925" bIns="176925" anchor="ctr" anchorCtr="0">
             <a:normAutofit/>
           </a:bodyPr>
           <a:lstStyle>
@@ -2448,7 +2543,7 @@
             </a:lvl9pPr>
           </a:lstStyle>
           <a:p>
-            <a:pPr indent="0" lvl="0" marL="0" rtl="0" algn="r">
+            <a:pPr marL="0" lvl="0" indent="0" algn="r" rtl="0">
               <a:spcBef>
                 <a:spcPts val="0"/>
               </a:spcBef>
@@ -2474,11 +2569,11 @@
 </file>
 
 <file path=ppt/slideLayouts/slideLayout10.xml><?xml version="1.0" encoding="utf-8"?>
-<p:sldLayout xmlns:a="http://schemas.openxmlformats.org/drawingml/2006/main" xmlns:r="http://schemas.openxmlformats.org/officeDocument/2006/relationships" xmlns:mc="http://schemas.openxmlformats.org/markup-compatibility/2006" xmlns:mv="urn:schemas-microsoft-com:mac:vml" xmlns:p="http://schemas.openxmlformats.org/presentationml/2006/main" xmlns:c="http://schemas.openxmlformats.org/drawingml/2006/chart" xmlns:dgm="http://schemas.openxmlformats.org/drawingml/2006/diagram" xmlns:o="urn:schemas-microsoft-com:office:office" xmlns:v="urn:schemas-microsoft-com:vml" xmlns:pvml="urn:schemas-microsoft-com:office:powerpoint" xmlns:com="http://schemas.openxmlformats.org/drawingml/2006/compatibility" xmlns:p14="http://schemas.microsoft.com/office/powerpoint/2010/main" xmlns:p15="http://schemas.microsoft.com/office/powerpoint/2012/main" xmlns:ahyp="http://schemas.microsoft.com/office/drawing/2018/hyperlinkcolor" matchingName="Big number">
+<p:sldLayout xmlns:a="http://schemas.openxmlformats.org/drawingml/2006/main" xmlns:r="http://schemas.openxmlformats.org/officeDocument/2006/relationships" xmlns:p="http://schemas.openxmlformats.org/presentationml/2006/main" matchingName="Big number">
   <p:cSld name="BIG_NUMBER">
     <p:spTree>
       <p:nvGrpSpPr>
-        <p:cNvPr id="44" name="Shape 44"/>
+        <p:cNvPr id="1" name="Shape 44"/>
         <p:cNvGrpSpPr/>
         <p:nvPr/>
       </p:nvGrpSpPr>
@@ -2493,9 +2588,11 @@
       <p:sp>
         <p:nvSpPr>
           <p:cNvPr id="45" name="Google Shape;45;p11"/>
-          <p:cNvSpPr txBox="1"/>
+          <p:cNvSpPr txBox="1">
+            <a:spLocks noGrp="1"/>
+          </p:cNvSpPr>
           <p:nvPr>
-            <p:ph hasCustomPrompt="1" type="title"/>
+            <p:ph type="title" hasCustomPrompt="1"/>
           </p:nvPr>
         </p:nvSpPr>
         <p:spPr>
@@ -2508,7 +2605,7 @@
           </a:prstGeom>
         </p:spPr>
         <p:txBody>
-          <a:bodyPr anchorCtr="0" anchor="b" bIns="176925" lIns="176925" spcFirstLastPara="1" rIns="176925" wrap="square" tIns="176925">
+          <a:bodyPr spcFirstLastPara="1" wrap="square" lIns="176925" tIns="176925" rIns="176925" bIns="176925" anchor="b" anchorCtr="0">
             <a:normAutofit/>
           </a:bodyPr>
           <a:lstStyle>
@@ -2622,9 +2719,11 @@
       <p:sp>
         <p:nvSpPr>
           <p:cNvPr id="46" name="Google Shape;46;p11"/>
-          <p:cNvSpPr txBox="1"/>
+          <p:cNvSpPr txBox="1">
+            <a:spLocks noGrp="1"/>
+          </p:cNvSpPr>
           <p:nvPr>
-            <p:ph idx="1" type="body"/>
+            <p:ph type="body" idx="1"/>
           </p:nvPr>
         </p:nvSpPr>
         <p:spPr>
@@ -2637,11 +2736,11 @@
           </a:prstGeom>
         </p:spPr>
         <p:txBody>
-          <a:bodyPr anchorCtr="0" anchor="t" bIns="176925" lIns="176925" spcFirstLastPara="1" rIns="176925" wrap="square" tIns="176925">
+          <a:bodyPr spcFirstLastPara="1" wrap="square" lIns="176925" tIns="176925" rIns="176925" bIns="176925" anchor="t" anchorCtr="0">
             <a:normAutofit/>
           </a:bodyPr>
           <a:lstStyle>
-            <a:lvl1pPr indent="-449791" lvl="0" marL="457200" algn="ctr">
+            <a:lvl1pPr marL="457200" lvl="0" indent="-449791" algn="ctr">
               <a:spcBef>
                 <a:spcPts val="0"/>
               </a:spcBef>
@@ -2652,7 +2751,7 @@
               <a:buChar char="●"/>
               <a:defRPr sz="3483"/>
             </a:lvl1pPr>
-            <a:lvl2pPr indent="-400638" lvl="1" marL="914400" algn="ctr">
+            <a:lvl2pPr marL="914400" lvl="1" indent="-400638" algn="ctr">
               <a:spcBef>
                 <a:spcPts val="0"/>
               </a:spcBef>
@@ -2663,7 +2762,7 @@
               <a:buChar char="○"/>
               <a:defRPr sz="2709"/>
             </a:lvl2pPr>
-            <a:lvl3pPr indent="-400638" lvl="2" marL="1371600" algn="ctr">
+            <a:lvl3pPr marL="1371600" lvl="2" indent="-400638" algn="ctr">
               <a:spcBef>
                 <a:spcPts val="0"/>
               </a:spcBef>
@@ -2674,7 +2773,7 @@
               <a:buChar char="■"/>
               <a:defRPr sz="2709"/>
             </a:lvl3pPr>
-            <a:lvl4pPr indent="-400638" lvl="3" marL="1828800" algn="ctr">
+            <a:lvl4pPr marL="1828800" lvl="3" indent="-400638" algn="ctr">
               <a:spcBef>
                 <a:spcPts val="0"/>
               </a:spcBef>
@@ -2685,7 +2784,7 @@
               <a:buChar char="●"/>
               <a:defRPr sz="2709"/>
             </a:lvl4pPr>
-            <a:lvl5pPr indent="-400638" lvl="4" marL="2286000" algn="ctr">
+            <a:lvl5pPr marL="2286000" lvl="4" indent="-400638" algn="ctr">
               <a:spcBef>
                 <a:spcPts val="0"/>
               </a:spcBef>
@@ -2696,7 +2795,7 @@
               <a:buChar char="○"/>
               <a:defRPr sz="2709"/>
             </a:lvl5pPr>
-            <a:lvl6pPr indent="-400638" lvl="5" marL="2743200" algn="ctr">
+            <a:lvl6pPr marL="2743200" lvl="5" indent="-400638" algn="ctr">
               <a:spcBef>
                 <a:spcPts val="0"/>
               </a:spcBef>
@@ -2707,7 +2806,7 @@
               <a:buChar char="■"/>
               <a:defRPr sz="2709"/>
             </a:lvl6pPr>
-            <a:lvl7pPr indent="-400638" lvl="6" marL="3200400" algn="ctr">
+            <a:lvl7pPr marL="3200400" lvl="6" indent="-400638" algn="ctr">
               <a:spcBef>
                 <a:spcPts val="0"/>
               </a:spcBef>
@@ -2718,7 +2817,7 @@
               <a:buChar char="●"/>
               <a:defRPr sz="2709"/>
             </a:lvl7pPr>
-            <a:lvl8pPr indent="-400638" lvl="7" marL="3657600" algn="ctr">
+            <a:lvl8pPr marL="3657600" lvl="7" indent="-400638" algn="ctr">
               <a:spcBef>
                 <a:spcPts val="0"/>
               </a:spcBef>
@@ -2729,7 +2828,7 @@
               <a:buChar char="○"/>
               <a:defRPr sz="2709"/>
             </a:lvl8pPr>
-            <a:lvl9pPr indent="-400638" lvl="8" marL="4114800" algn="ctr">
+            <a:lvl9pPr marL="4114800" lvl="8" indent="-400638" algn="ctr">
               <a:spcBef>
                 <a:spcPts val="0"/>
               </a:spcBef>
@@ -2741,15 +2840,19 @@
               <a:defRPr sz="2709"/>
             </a:lvl9pPr>
           </a:lstStyle>
-          <a:p/>
+          <a:p>
+            <a:endParaRPr/>
+          </a:p>
         </p:txBody>
       </p:sp>
       <p:sp>
         <p:nvSpPr>
           <p:cNvPr id="47" name="Google Shape;47;p11"/>
-          <p:cNvSpPr txBox="1"/>
+          <p:cNvSpPr txBox="1">
+            <a:spLocks noGrp="1"/>
+          </p:cNvSpPr>
           <p:nvPr>
-            <p:ph idx="12" type="sldNum"/>
+            <p:ph type="sldNum" idx="12"/>
           </p:nvPr>
         </p:nvSpPr>
         <p:spPr>
@@ -2762,7 +2865,7 @@
           </a:prstGeom>
         </p:spPr>
         <p:txBody>
-          <a:bodyPr anchorCtr="0" anchor="ctr" bIns="176925" lIns="176925" spcFirstLastPara="1" rIns="176925" wrap="square" tIns="176925">
+          <a:bodyPr spcFirstLastPara="1" wrap="square" lIns="176925" tIns="176925" rIns="176925" bIns="176925" anchor="ctr" anchorCtr="0">
             <a:normAutofit/>
           </a:bodyPr>
           <a:lstStyle>
@@ -2804,7 +2907,7 @@
             </a:lvl9pPr>
           </a:lstStyle>
           <a:p>
-            <a:pPr indent="0" lvl="0" marL="0" rtl="0" algn="r">
+            <a:pPr marL="0" lvl="0" indent="0" algn="r" rtl="0">
               <a:spcBef>
                 <a:spcPts val="0"/>
               </a:spcBef>
@@ -2830,11 +2933,11 @@
 </file>
 
 <file path=ppt/slideLayouts/slideLayout11.xml><?xml version="1.0" encoding="utf-8"?>
-<p:sldLayout xmlns:a="http://schemas.openxmlformats.org/drawingml/2006/main" xmlns:r="http://schemas.openxmlformats.org/officeDocument/2006/relationships" xmlns:mc="http://schemas.openxmlformats.org/markup-compatibility/2006" xmlns:mv="urn:schemas-microsoft-com:mac:vml" xmlns:p="http://schemas.openxmlformats.org/presentationml/2006/main" xmlns:c="http://schemas.openxmlformats.org/drawingml/2006/chart" xmlns:dgm="http://schemas.openxmlformats.org/drawingml/2006/diagram" xmlns:o="urn:schemas-microsoft-com:office:office" xmlns:v="urn:schemas-microsoft-com:vml" xmlns:pvml="urn:schemas-microsoft-com:office:powerpoint" xmlns:com="http://schemas.openxmlformats.org/drawingml/2006/compatibility" xmlns:p14="http://schemas.microsoft.com/office/powerpoint/2010/main" xmlns:p15="http://schemas.microsoft.com/office/powerpoint/2012/main" xmlns:ahyp="http://schemas.microsoft.com/office/drawing/2018/hyperlinkcolor" matchingName="Blank" type="blank">
+<p:sldLayout xmlns:a="http://schemas.openxmlformats.org/drawingml/2006/main" xmlns:r="http://schemas.openxmlformats.org/officeDocument/2006/relationships" xmlns:p="http://schemas.openxmlformats.org/presentationml/2006/main" matchingName="Blank" type="blank">
   <p:cSld name="BLANK">
     <p:spTree>
       <p:nvGrpSpPr>
-        <p:cNvPr id="48" name="Shape 48"/>
+        <p:cNvPr id="1" name="Shape 48"/>
         <p:cNvGrpSpPr/>
         <p:nvPr/>
       </p:nvGrpSpPr>
@@ -2849,9 +2952,11 @@
       <p:sp>
         <p:nvSpPr>
           <p:cNvPr id="49" name="Google Shape;49;p12"/>
-          <p:cNvSpPr txBox="1"/>
+          <p:cNvSpPr txBox="1">
+            <a:spLocks noGrp="1"/>
+          </p:cNvSpPr>
           <p:nvPr>
-            <p:ph idx="12" type="sldNum"/>
+            <p:ph type="sldNum" idx="12"/>
           </p:nvPr>
         </p:nvSpPr>
         <p:spPr>
@@ -2864,7 +2969,7 @@
           </a:prstGeom>
         </p:spPr>
         <p:txBody>
-          <a:bodyPr anchorCtr="0" anchor="ctr" bIns="176925" lIns="176925" spcFirstLastPara="1" rIns="176925" wrap="square" tIns="176925">
+          <a:bodyPr spcFirstLastPara="1" wrap="square" lIns="176925" tIns="176925" rIns="176925" bIns="176925" anchor="ctr" anchorCtr="0">
             <a:normAutofit/>
           </a:bodyPr>
           <a:lstStyle>
@@ -2906,7 +3011,7 @@
             </a:lvl9pPr>
           </a:lstStyle>
           <a:p>
-            <a:pPr indent="0" lvl="0" marL="0" rtl="0" algn="r">
+            <a:pPr marL="0" lvl="0" indent="0" algn="r" rtl="0">
               <a:spcBef>
                 <a:spcPts val="0"/>
               </a:spcBef>
@@ -2932,11 +3037,11 @@
 </file>
 
 <file path=ppt/slideLayouts/slideLayout2.xml><?xml version="1.0" encoding="utf-8"?>
-<p:sldLayout xmlns:a="http://schemas.openxmlformats.org/drawingml/2006/main" xmlns:r="http://schemas.openxmlformats.org/officeDocument/2006/relationships" xmlns:mc="http://schemas.openxmlformats.org/markup-compatibility/2006" xmlns:mv="urn:schemas-microsoft-com:mac:vml" xmlns:p="http://schemas.openxmlformats.org/presentationml/2006/main" xmlns:c="http://schemas.openxmlformats.org/drawingml/2006/chart" xmlns:dgm="http://schemas.openxmlformats.org/drawingml/2006/diagram" xmlns:o="urn:schemas-microsoft-com:office:office" xmlns:v="urn:schemas-microsoft-com:vml" xmlns:pvml="urn:schemas-microsoft-com:office:powerpoint" xmlns:com="http://schemas.openxmlformats.org/drawingml/2006/compatibility" xmlns:p14="http://schemas.microsoft.com/office/powerpoint/2010/main" xmlns:p15="http://schemas.microsoft.com/office/powerpoint/2012/main" xmlns:ahyp="http://schemas.microsoft.com/office/drawing/2018/hyperlinkcolor" matchingName="Section header" type="secHead">
+<p:sldLayout xmlns:a="http://schemas.openxmlformats.org/drawingml/2006/main" xmlns:r="http://schemas.openxmlformats.org/officeDocument/2006/relationships" xmlns:p="http://schemas.openxmlformats.org/presentationml/2006/main" matchingName="Section header" type="secHead">
   <p:cSld name="SECTION_HEADER">
     <p:spTree>
       <p:nvGrpSpPr>
-        <p:cNvPr id="13" name="Shape 13"/>
+        <p:cNvPr id="1" name="Shape 13"/>
         <p:cNvGrpSpPr/>
         <p:nvPr/>
       </p:nvGrpSpPr>
@@ -2951,7 +3056,9 @@
       <p:sp>
         <p:nvSpPr>
           <p:cNvPr id="14" name="Google Shape;14;p3"/>
-          <p:cNvSpPr txBox="1"/>
+          <p:cNvSpPr txBox="1">
+            <a:spLocks noGrp="1"/>
+          </p:cNvSpPr>
           <p:nvPr>
             <p:ph type="title"/>
           </p:nvPr>
@@ -2966,7 +3073,7 @@
           </a:prstGeom>
         </p:spPr>
         <p:txBody>
-          <a:bodyPr anchorCtr="0" anchor="ctr" bIns="176925" lIns="176925" spcFirstLastPara="1" rIns="176925" wrap="square" tIns="176925">
+          <a:bodyPr spcFirstLastPara="1" wrap="square" lIns="176925" tIns="176925" rIns="176925" bIns="176925" anchor="ctr" anchorCtr="0">
             <a:normAutofit/>
           </a:bodyPr>
           <a:lstStyle>
@@ -3070,15 +3177,19 @@
               <a:defRPr sz="6967"/>
             </a:lvl9pPr>
           </a:lstStyle>
-          <a:p/>
+          <a:p>
+            <a:endParaRPr/>
+          </a:p>
         </p:txBody>
       </p:sp>
       <p:sp>
         <p:nvSpPr>
           <p:cNvPr id="15" name="Google Shape;15;p3"/>
-          <p:cNvSpPr txBox="1"/>
+          <p:cNvSpPr txBox="1">
+            <a:spLocks noGrp="1"/>
+          </p:cNvSpPr>
           <p:nvPr>
-            <p:ph idx="12" type="sldNum"/>
+            <p:ph type="sldNum" idx="12"/>
           </p:nvPr>
         </p:nvSpPr>
         <p:spPr>
@@ -3091,7 +3202,7 @@
           </a:prstGeom>
         </p:spPr>
         <p:txBody>
-          <a:bodyPr anchorCtr="0" anchor="ctr" bIns="176925" lIns="176925" spcFirstLastPara="1" rIns="176925" wrap="square" tIns="176925">
+          <a:bodyPr spcFirstLastPara="1" wrap="square" lIns="176925" tIns="176925" rIns="176925" bIns="176925" anchor="ctr" anchorCtr="0">
             <a:normAutofit/>
           </a:bodyPr>
           <a:lstStyle>
@@ -3133,7 +3244,7 @@
             </a:lvl9pPr>
           </a:lstStyle>
           <a:p>
-            <a:pPr indent="0" lvl="0" marL="0" rtl="0" algn="r">
+            <a:pPr marL="0" lvl="0" indent="0" algn="r" rtl="0">
               <a:spcBef>
                 <a:spcPts val="0"/>
               </a:spcBef>
@@ -3159,11 +3270,11 @@
 </file>
 
 <file path=ppt/slideLayouts/slideLayout3.xml><?xml version="1.0" encoding="utf-8"?>
-<p:sldLayout xmlns:a="http://schemas.openxmlformats.org/drawingml/2006/main" xmlns:r="http://schemas.openxmlformats.org/officeDocument/2006/relationships" xmlns:mc="http://schemas.openxmlformats.org/markup-compatibility/2006" xmlns:mv="urn:schemas-microsoft-com:mac:vml" xmlns:p="http://schemas.openxmlformats.org/presentationml/2006/main" xmlns:c="http://schemas.openxmlformats.org/drawingml/2006/chart" xmlns:dgm="http://schemas.openxmlformats.org/drawingml/2006/diagram" xmlns:o="urn:schemas-microsoft-com:office:office" xmlns:v="urn:schemas-microsoft-com:vml" xmlns:pvml="urn:schemas-microsoft-com:office:powerpoint" xmlns:com="http://schemas.openxmlformats.org/drawingml/2006/compatibility" xmlns:p14="http://schemas.microsoft.com/office/powerpoint/2010/main" xmlns:p15="http://schemas.microsoft.com/office/powerpoint/2012/main" xmlns:ahyp="http://schemas.microsoft.com/office/drawing/2018/hyperlinkcolor" matchingName="Title and body" type="tx">
+<p:sldLayout xmlns:a="http://schemas.openxmlformats.org/drawingml/2006/main" xmlns:r="http://schemas.openxmlformats.org/officeDocument/2006/relationships" xmlns:p="http://schemas.openxmlformats.org/presentationml/2006/main" matchingName="Title and body" type="tx">
   <p:cSld name="TITLE_AND_BODY">
     <p:spTree>
       <p:nvGrpSpPr>
-        <p:cNvPr id="16" name="Shape 16"/>
+        <p:cNvPr id="1" name="Shape 16"/>
         <p:cNvGrpSpPr/>
         <p:nvPr/>
       </p:nvGrpSpPr>
@@ -3178,7 +3289,9 @@
       <p:sp>
         <p:nvSpPr>
           <p:cNvPr id="17" name="Google Shape;17;p4"/>
-          <p:cNvSpPr txBox="1"/>
+          <p:cNvSpPr txBox="1">
+            <a:spLocks noGrp="1"/>
+          </p:cNvSpPr>
           <p:nvPr>
             <p:ph type="title"/>
           </p:nvPr>
@@ -3193,7 +3306,7 @@
           </a:prstGeom>
         </p:spPr>
         <p:txBody>
-          <a:bodyPr anchorCtr="0" anchor="t" bIns="176925" lIns="176925" spcFirstLastPara="1" rIns="176925" wrap="square" tIns="176925">
+          <a:bodyPr spcFirstLastPara="1" wrap="square" lIns="176925" tIns="176925" rIns="176925" bIns="176925" anchor="t" anchorCtr="0">
             <a:normAutofit/>
           </a:bodyPr>
           <a:lstStyle>
@@ -3297,15 +3410,19 @@
               <a:defRPr sz="5419"/>
             </a:lvl9pPr>
           </a:lstStyle>
-          <a:p/>
+          <a:p>
+            <a:endParaRPr/>
+          </a:p>
         </p:txBody>
       </p:sp>
       <p:sp>
         <p:nvSpPr>
           <p:cNvPr id="18" name="Google Shape;18;p4"/>
-          <p:cNvSpPr txBox="1"/>
+          <p:cNvSpPr txBox="1">
+            <a:spLocks noGrp="1"/>
+          </p:cNvSpPr>
           <p:nvPr>
-            <p:ph idx="1" type="body"/>
+            <p:ph type="body" idx="1"/>
           </p:nvPr>
         </p:nvSpPr>
         <p:spPr>
@@ -3318,11 +3435,11 @@
           </a:prstGeom>
         </p:spPr>
         <p:txBody>
-          <a:bodyPr anchorCtr="0" anchor="t" bIns="176925" lIns="176925" spcFirstLastPara="1" rIns="176925" wrap="square" tIns="176925">
+          <a:bodyPr spcFirstLastPara="1" wrap="square" lIns="176925" tIns="176925" rIns="176925" bIns="176925" anchor="t" anchorCtr="0">
             <a:normAutofit/>
           </a:bodyPr>
           <a:lstStyle>
-            <a:lvl1pPr indent="-449791" lvl="0" marL="457200">
+            <a:lvl1pPr marL="457200" lvl="0" indent="-449791">
               <a:spcBef>
                 <a:spcPts val="0"/>
               </a:spcBef>
@@ -3333,7 +3450,7 @@
               <a:buChar char="●"/>
               <a:defRPr sz="3483"/>
             </a:lvl1pPr>
-            <a:lvl2pPr indent="-400638" lvl="1" marL="914400">
+            <a:lvl2pPr marL="914400" lvl="1" indent="-400638">
               <a:spcBef>
                 <a:spcPts val="0"/>
               </a:spcBef>
@@ -3344,7 +3461,7 @@
               <a:buChar char="○"/>
               <a:defRPr sz="2709"/>
             </a:lvl2pPr>
-            <a:lvl3pPr indent="-400638" lvl="2" marL="1371600">
+            <a:lvl3pPr marL="1371600" lvl="2" indent="-400638">
               <a:spcBef>
                 <a:spcPts val="0"/>
               </a:spcBef>
@@ -3355,7 +3472,7 @@
               <a:buChar char="■"/>
               <a:defRPr sz="2709"/>
             </a:lvl3pPr>
-            <a:lvl4pPr indent="-400638" lvl="3" marL="1828800">
+            <a:lvl4pPr marL="1828800" lvl="3" indent="-400638">
               <a:spcBef>
                 <a:spcPts val="0"/>
               </a:spcBef>
@@ -3366,7 +3483,7 @@
               <a:buChar char="●"/>
               <a:defRPr sz="2709"/>
             </a:lvl4pPr>
-            <a:lvl5pPr indent="-400638" lvl="4" marL="2286000">
+            <a:lvl5pPr marL="2286000" lvl="4" indent="-400638">
               <a:spcBef>
                 <a:spcPts val="0"/>
               </a:spcBef>
@@ -3377,7 +3494,7 @@
               <a:buChar char="○"/>
               <a:defRPr sz="2709"/>
             </a:lvl5pPr>
-            <a:lvl6pPr indent="-400638" lvl="5" marL="2743200">
+            <a:lvl6pPr marL="2743200" lvl="5" indent="-400638">
               <a:spcBef>
                 <a:spcPts val="0"/>
               </a:spcBef>
@@ -3388,7 +3505,7 @@
               <a:buChar char="■"/>
               <a:defRPr sz="2709"/>
             </a:lvl6pPr>
-            <a:lvl7pPr indent="-400638" lvl="6" marL="3200400">
+            <a:lvl7pPr marL="3200400" lvl="6" indent="-400638">
               <a:spcBef>
                 <a:spcPts val="0"/>
               </a:spcBef>
@@ -3399,7 +3516,7 @@
               <a:buChar char="●"/>
               <a:defRPr sz="2709"/>
             </a:lvl7pPr>
-            <a:lvl8pPr indent="-400638" lvl="7" marL="3657600">
+            <a:lvl8pPr marL="3657600" lvl="7" indent="-400638">
               <a:spcBef>
                 <a:spcPts val="0"/>
               </a:spcBef>
@@ -3410,7 +3527,7 @@
               <a:buChar char="○"/>
               <a:defRPr sz="2709"/>
             </a:lvl8pPr>
-            <a:lvl9pPr indent="-400638" lvl="8" marL="4114800">
+            <a:lvl9pPr marL="4114800" lvl="8" indent="-400638">
               <a:spcBef>
                 <a:spcPts val="0"/>
               </a:spcBef>
@@ -3422,15 +3539,19 @@
               <a:defRPr sz="2709"/>
             </a:lvl9pPr>
           </a:lstStyle>
-          <a:p/>
+          <a:p>
+            <a:endParaRPr/>
+          </a:p>
         </p:txBody>
       </p:sp>
       <p:sp>
         <p:nvSpPr>
           <p:cNvPr id="19" name="Google Shape;19;p4"/>
-          <p:cNvSpPr txBox="1"/>
+          <p:cNvSpPr txBox="1">
+            <a:spLocks noGrp="1"/>
+          </p:cNvSpPr>
           <p:nvPr>
-            <p:ph idx="12" type="sldNum"/>
+            <p:ph type="sldNum" idx="12"/>
           </p:nvPr>
         </p:nvSpPr>
         <p:spPr>
@@ -3443,7 +3564,7 @@
           </a:prstGeom>
         </p:spPr>
         <p:txBody>
-          <a:bodyPr anchorCtr="0" anchor="ctr" bIns="176925" lIns="176925" spcFirstLastPara="1" rIns="176925" wrap="square" tIns="176925">
+          <a:bodyPr spcFirstLastPara="1" wrap="square" lIns="176925" tIns="176925" rIns="176925" bIns="176925" anchor="ctr" anchorCtr="0">
             <a:normAutofit/>
           </a:bodyPr>
           <a:lstStyle>
@@ -3485,7 +3606,7 @@
             </a:lvl9pPr>
           </a:lstStyle>
           <a:p>
-            <a:pPr indent="0" lvl="0" marL="0" rtl="0" algn="r">
+            <a:pPr marL="0" lvl="0" indent="0" algn="r" rtl="0">
               <a:spcBef>
                 <a:spcPts val="0"/>
               </a:spcBef>
@@ -3511,11 +3632,11 @@
 </file>
 
 <file path=ppt/slideLayouts/slideLayout4.xml><?xml version="1.0" encoding="utf-8"?>
-<p:sldLayout xmlns:a="http://schemas.openxmlformats.org/drawingml/2006/main" xmlns:r="http://schemas.openxmlformats.org/officeDocument/2006/relationships" xmlns:mc="http://schemas.openxmlformats.org/markup-compatibility/2006" xmlns:mv="urn:schemas-microsoft-com:mac:vml" xmlns:p="http://schemas.openxmlformats.org/presentationml/2006/main" xmlns:c="http://schemas.openxmlformats.org/drawingml/2006/chart" xmlns:dgm="http://schemas.openxmlformats.org/drawingml/2006/diagram" xmlns:o="urn:schemas-microsoft-com:office:office" xmlns:v="urn:schemas-microsoft-com:vml" xmlns:pvml="urn:schemas-microsoft-com:office:powerpoint" xmlns:com="http://schemas.openxmlformats.org/drawingml/2006/compatibility" xmlns:p14="http://schemas.microsoft.com/office/powerpoint/2010/main" xmlns:p15="http://schemas.microsoft.com/office/powerpoint/2012/main" xmlns:ahyp="http://schemas.microsoft.com/office/drawing/2018/hyperlinkcolor" matchingName="Title and two columns" type="twoColTx">
+<p:sldLayout xmlns:a="http://schemas.openxmlformats.org/drawingml/2006/main" xmlns:r="http://schemas.openxmlformats.org/officeDocument/2006/relationships" xmlns:p="http://schemas.openxmlformats.org/presentationml/2006/main" matchingName="Title and two columns" type="twoColTx">
   <p:cSld name="TITLE_AND_TWO_COLUMNS">
     <p:spTree>
       <p:nvGrpSpPr>
-        <p:cNvPr id="20" name="Shape 20"/>
+        <p:cNvPr id="1" name="Shape 20"/>
         <p:cNvGrpSpPr/>
         <p:nvPr/>
       </p:nvGrpSpPr>
@@ -3530,7 +3651,9 @@
       <p:sp>
         <p:nvSpPr>
           <p:cNvPr id="21" name="Google Shape;21;p5"/>
-          <p:cNvSpPr txBox="1"/>
+          <p:cNvSpPr txBox="1">
+            <a:spLocks noGrp="1"/>
+          </p:cNvSpPr>
           <p:nvPr>
             <p:ph type="title"/>
           </p:nvPr>
@@ -3545,7 +3668,7 @@
           </a:prstGeom>
         </p:spPr>
         <p:txBody>
-          <a:bodyPr anchorCtr="0" anchor="t" bIns="176925" lIns="176925" spcFirstLastPara="1" rIns="176925" wrap="square" tIns="176925">
+          <a:bodyPr spcFirstLastPara="1" wrap="square" lIns="176925" tIns="176925" rIns="176925" bIns="176925" anchor="t" anchorCtr="0">
             <a:normAutofit/>
           </a:bodyPr>
           <a:lstStyle>
@@ -3649,15 +3772,19 @@
               <a:defRPr sz="5419"/>
             </a:lvl9pPr>
           </a:lstStyle>
-          <a:p/>
+          <a:p>
+            <a:endParaRPr/>
+          </a:p>
         </p:txBody>
       </p:sp>
       <p:sp>
         <p:nvSpPr>
           <p:cNvPr id="22" name="Google Shape;22;p5"/>
-          <p:cNvSpPr txBox="1"/>
+          <p:cNvSpPr txBox="1">
+            <a:spLocks noGrp="1"/>
+          </p:cNvSpPr>
           <p:nvPr>
-            <p:ph idx="1" type="body"/>
+            <p:ph type="body" idx="1"/>
           </p:nvPr>
         </p:nvSpPr>
         <p:spPr>
@@ -3670,11 +3797,11 @@
           </a:prstGeom>
         </p:spPr>
         <p:txBody>
-          <a:bodyPr anchorCtr="0" anchor="t" bIns="176925" lIns="176925" spcFirstLastPara="1" rIns="176925" wrap="square" tIns="176925">
+          <a:bodyPr spcFirstLastPara="1" wrap="square" lIns="176925" tIns="176925" rIns="176925" bIns="176925" anchor="t" anchorCtr="0">
             <a:normAutofit/>
           </a:bodyPr>
           <a:lstStyle>
-            <a:lvl1pPr indent="-400638" lvl="0" marL="457200">
+            <a:lvl1pPr marL="457200" lvl="0" indent="-400638">
               <a:spcBef>
                 <a:spcPts val="0"/>
               </a:spcBef>
@@ -3685,7 +3812,7 @@
               <a:buChar char="●"/>
               <a:defRPr sz="2709"/>
             </a:lvl1pPr>
-            <a:lvl2pPr indent="-376061" lvl="1" marL="914400">
+            <a:lvl2pPr marL="914400" lvl="1" indent="-376061">
               <a:spcBef>
                 <a:spcPts val="0"/>
               </a:spcBef>
@@ -3696,7 +3823,7 @@
               <a:buChar char="○"/>
               <a:defRPr sz="2322"/>
             </a:lvl2pPr>
-            <a:lvl3pPr indent="-376061" lvl="2" marL="1371600">
+            <a:lvl3pPr marL="1371600" lvl="2" indent="-376061">
               <a:spcBef>
                 <a:spcPts val="0"/>
               </a:spcBef>
@@ -3707,7 +3834,7 @@
               <a:buChar char="■"/>
               <a:defRPr sz="2322"/>
             </a:lvl3pPr>
-            <a:lvl4pPr indent="-376061" lvl="3" marL="1828800">
+            <a:lvl4pPr marL="1828800" lvl="3" indent="-376061">
               <a:spcBef>
                 <a:spcPts val="0"/>
               </a:spcBef>
@@ -3718,7 +3845,7 @@
               <a:buChar char="●"/>
               <a:defRPr sz="2322"/>
             </a:lvl4pPr>
-            <a:lvl5pPr indent="-376061" lvl="4" marL="2286000">
+            <a:lvl5pPr marL="2286000" lvl="4" indent="-376061">
               <a:spcBef>
                 <a:spcPts val="0"/>
               </a:spcBef>
@@ -3729,7 +3856,7 @@
               <a:buChar char="○"/>
               <a:defRPr sz="2322"/>
             </a:lvl5pPr>
-            <a:lvl6pPr indent="-376061" lvl="5" marL="2743200">
+            <a:lvl6pPr marL="2743200" lvl="5" indent="-376061">
               <a:spcBef>
                 <a:spcPts val="0"/>
               </a:spcBef>
@@ -3740,7 +3867,7 @@
               <a:buChar char="■"/>
               <a:defRPr sz="2322"/>
             </a:lvl6pPr>
-            <a:lvl7pPr indent="-376061" lvl="6" marL="3200400">
+            <a:lvl7pPr marL="3200400" lvl="6" indent="-376061">
               <a:spcBef>
                 <a:spcPts val="0"/>
               </a:spcBef>
@@ -3751,7 +3878,7 @@
               <a:buChar char="●"/>
               <a:defRPr sz="2322"/>
             </a:lvl7pPr>
-            <a:lvl8pPr indent="-376061" lvl="7" marL="3657600">
+            <a:lvl8pPr marL="3657600" lvl="7" indent="-376061">
               <a:spcBef>
                 <a:spcPts val="0"/>
               </a:spcBef>
@@ -3762,7 +3889,7 @@
               <a:buChar char="○"/>
               <a:defRPr sz="2322"/>
             </a:lvl8pPr>
-            <a:lvl9pPr indent="-376061" lvl="8" marL="4114800">
+            <a:lvl9pPr marL="4114800" lvl="8" indent="-376061">
               <a:spcBef>
                 <a:spcPts val="0"/>
               </a:spcBef>
@@ -3774,15 +3901,19 @@
               <a:defRPr sz="2322"/>
             </a:lvl9pPr>
           </a:lstStyle>
-          <a:p/>
+          <a:p>
+            <a:endParaRPr/>
+          </a:p>
         </p:txBody>
       </p:sp>
       <p:sp>
         <p:nvSpPr>
           <p:cNvPr id="23" name="Google Shape;23;p5"/>
-          <p:cNvSpPr txBox="1"/>
+          <p:cNvSpPr txBox="1">
+            <a:spLocks noGrp="1"/>
+          </p:cNvSpPr>
           <p:nvPr>
-            <p:ph idx="2" type="body"/>
+            <p:ph type="body" idx="2"/>
           </p:nvPr>
         </p:nvSpPr>
         <p:spPr>
@@ -3795,11 +3926,11 @@
           </a:prstGeom>
         </p:spPr>
         <p:txBody>
-          <a:bodyPr anchorCtr="0" anchor="t" bIns="176925" lIns="176925" spcFirstLastPara="1" rIns="176925" wrap="square" tIns="176925">
+          <a:bodyPr spcFirstLastPara="1" wrap="square" lIns="176925" tIns="176925" rIns="176925" bIns="176925" anchor="t" anchorCtr="0">
             <a:normAutofit/>
           </a:bodyPr>
           <a:lstStyle>
-            <a:lvl1pPr indent="-400638" lvl="0" marL="457200">
+            <a:lvl1pPr marL="457200" lvl="0" indent="-400638">
               <a:spcBef>
                 <a:spcPts val="0"/>
               </a:spcBef>
@@ -3810,7 +3941,7 @@
               <a:buChar char="●"/>
               <a:defRPr sz="2709"/>
             </a:lvl1pPr>
-            <a:lvl2pPr indent="-376061" lvl="1" marL="914400">
+            <a:lvl2pPr marL="914400" lvl="1" indent="-376061">
               <a:spcBef>
                 <a:spcPts val="0"/>
               </a:spcBef>
@@ -3821,7 +3952,7 @@
               <a:buChar char="○"/>
               <a:defRPr sz="2322"/>
             </a:lvl2pPr>
-            <a:lvl3pPr indent="-376061" lvl="2" marL="1371600">
+            <a:lvl3pPr marL="1371600" lvl="2" indent="-376061">
               <a:spcBef>
                 <a:spcPts val="0"/>
               </a:spcBef>
@@ -3832,7 +3963,7 @@
               <a:buChar char="■"/>
               <a:defRPr sz="2322"/>
             </a:lvl3pPr>
-            <a:lvl4pPr indent="-376061" lvl="3" marL="1828800">
+            <a:lvl4pPr marL="1828800" lvl="3" indent="-376061">
               <a:spcBef>
                 <a:spcPts val="0"/>
               </a:spcBef>
@@ -3843,7 +3974,7 @@
               <a:buChar char="●"/>
               <a:defRPr sz="2322"/>
             </a:lvl4pPr>
-            <a:lvl5pPr indent="-376061" lvl="4" marL="2286000">
+            <a:lvl5pPr marL="2286000" lvl="4" indent="-376061">
               <a:spcBef>
                 <a:spcPts val="0"/>
               </a:spcBef>
@@ -3854,7 +3985,7 @@
               <a:buChar char="○"/>
               <a:defRPr sz="2322"/>
             </a:lvl5pPr>
-            <a:lvl6pPr indent="-376061" lvl="5" marL="2743200">
+            <a:lvl6pPr marL="2743200" lvl="5" indent="-376061">
               <a:spcBef>
                 <a:spcPts val="0"/>
               </a:spcBef>
@@ -3865,7 +3996,7 @@
               <a:buChar char="■"/>
               <a:defRPr sz="2322"/>
             </a:lvl6pPr>
-            <a:lvl7pPr indent="-376061" lvl="6" marL="3200400">
+            <a:lvl7pPr marL="3200400" lvl="6" indent="-376061">
               <a:spcBef>
                 <a:spcPts val="0"/>
               </a:spcBef>
@@ -3876,7 +4007,7 @@
               <a:buChar char="●"/>
               <a:defRPr sz="2322"/>
             </a:lvl7pPr>
-            <a:lvl8pPr indent="-376061" lvl="7" marL="3657600">
+            <a:lvl8pPr marL="3657600" lvl="7" indent="-376061">
               <a:spcBef>
                 <a:spcPts val="0"/>
               </a:spcBef>
@@ -3887,7 +4018,7 @@
               <a:buChar char="○"/>
               <a:defRPr sz="2322"/>
             </a:lvl8pPr>
-            <a:lvl9pPr indent="-376061" lvl="8" marL="4114800">
+            <a:lvl9pPr marL="4114800" lvl="8" indent="-376061">
               <a:spcBef>
                 <a:spcPts val="0"/>
               </a:spcBef>
@@ -3899,15 +4030,19 @@
               <a:defRPr sz="2322"/>
             </a:lvl9pPr>
           </a:lstStyle>
-          <a:p/>
+          <a:p>
+            <a:endParaRPr/>
+          </a:p>
         </p:txBody>
       </p:sp>
       <p:sp>
         <p:nvSpPr>
           <p:cNvPr id="24" name="Google Shape;24;p5"/>
-          <p:cNvSpPr txBox="1"/>
+          <p:cNvSpPr txBox="1">
+            <a:spLocks noGrp="1"/>
+          </p:cNvSpPr>
           <p:nvPr>
-            <p:ph idx="12" type="sldNum"/>
+            <p:ph type="sldNum" idx="12"/>
           </p:nvPr>
         </p:nvSpPr>
         <p:spPr>
@@ -3920,7 +4055,7 @@
           </a:prstGeom>
         </p:spPr>
         <p:txBody>
-          <a:bodyPr anchorCtr="0" anchor="ctr" bIns="176925" lIns="176925" spcFirstLastPara="1" rIns="176925" wrap="square" tIns="176925">
+          <a:bodyPr spcFirstLastPara="1" wrap="square" lIns="176925" tIns="176925" rIns="176925" bIns="176925" anchor="ctr" anchorCtr="0">
             <a:normAutofit/>
           </a:bodyPr>
           <a:lstStyle>
@@ -3962,7 +4097,7 @@
             </a:lvl9pPr>
           </a:lstStyle>
           <a:p>
-            <a:pPr indent="0" lvl="0" marL="0" rtl="0" algn="r">
+            <a:pPr marL="0" lvl="0" indent="0" algn="r" rtl="0">
               <a:spcBef>
                 <a:spcPts val="0"/>
               </a:spcBef>
@@ -3988,11 +4123,11 @@
 </file>
 
 <file path=ppt/slideLayouts/slideLayout5.xml><?xml version="1.0" encoding="utf-8"?>
-<p:sldLayout xmlns:a="http://schemas.openxmlformats.org/drawingml/2006/main" xmlns:r="http://schemas.openxmlformats.org/officeDocument/2006/relationships" xmlns:mc="http://schemas.openxmlformats.org/markup-compatibility/2006" xmlns:mv="urn:schemas-microsoft-com:mac:vml" xmlns:p="http://schemas.openxmlformats.org/presentationml/2006/main" xmlns:c="http://schemas.openxmlformats.org/drawingml/2006/chart" xmlns:dgm="http://schemas.openxmlformats.org/drawingml/2006/diagram" xmlns:o="urn:schemas-microsoft-com:office:office" xmlns:v="urn:schemas-microsoft-com:vml" xmlns:pvml="urn:schemas-microsoft-com:office:powerpoint" xmlns:com="http://schemas.openxmlformats.org/drawingml/2006/compatibility" xmlns:p14="http://schemas.microsoft.com/office/powerpoint/2010/main" xmlns:p15="http://schemas.microsoft.com/office/powerpoint/2012/main" xmlns:ahyp="http://schemas.microsoft.com/office/drawing/2018/hyperlinkcolor" matchingName="Title only" type="titleOnly">
+<p:sldLayout xmlns:a="http://schemas.openxmlformats.org/drawingml/2006/main" xmlns:r="http://schemas.openxmlformats.org/officeDocument/2006/relationships" xmlns:p="http://schemas.openxmlformats.org/presentationml/2006/main" matchingName="Title only" type="titleOnly">
   <p:cSld name="TITLE_ONLY">
     <p:spTree>
       <p:nvGrpSpPr>
-        <p:cNvPr id="25" name="Shape 25"/>
+        <p:cNvPr id="1" name="Shape 25"/>
         <p:cNvGrpSpPr/>
         <p:nvPr/>
       </p:nvGrpSpPr>
@@ -4007,7 +4142,9 @@
       <p:sp>
         <p:nvSpPr>
           <p:cNvPr id="26" name="Google Shape;26;p6"/>
-          <p:cNvSpPr txBox="1"/>
+          <p:cNvSpPr txBox="1">
+            <a:spLocks noGrp="1"/>
+          </p:cNvSpPr>
           <p:nvPr>
             <p:ph type="title"/>
           </p:nvPr>
@@ -4022,7 +4159,7 @@
           </a:prstGeom>
         </p:spPr>
         <p:txBody>
-          <a:bodyPr anchorCtr="0" anchor="t" bIns="176925" lIns="176925" spcFirstLastPara="1" rIns="176925" wrap="square" tIns="176925">
+          <a:bodyPr spcFirstLastPara="1" wrap="square" lIns="176925" tIns="176925" rIns="176925" bIns="176925" anchor="t" anchorCtr="0">
             <a:normAutofit/>
           </a:bodyPr>
           <a:lstStyle>
@@ -4126,15 +4263,19 @@
               <a:defRPr sz="5419"/>
             </a:lvl9pPr>
           </a:lstStyle>
-          <a:p/>
+          <a:p>
+            <a:endParaRPr/>
+          </a:p>
         </p:txBody>
       </p:sp>
       <p:sp>
         <p:nvSpPr>
           <p:cNvPr id="27" name="Google Shape;27;p6"/>
-          <p:cNvSpPr txBox="1"/>
+          <p:cNvSpPr txBox="1">
+            <a:spLocks noGrp="1"/>
+          </p:cNvSpPr>
           <p:nvPr>
-            <p:ph idx="12" type="sldNum"/>
+            <p:ph type="sldNum" idx="12"/>
           </p:nvPr>
         </p:nvSpPr>
         <p:spPr>
@@ -4147,7 +4288,7 @@
           </a:prstGeom>
         </p:spPr>
         <p:txBody>
-          <a:bodyPr anchorCtr="0" anchor="ctr" bIns="176925" lIns="176925" spcFirstLastPara="1" rIns="176925" wrap="square" tIns="176925">
+          <a:bodyPr spcFirstLastPara="1" wrap="square" lIns="176925" tIns="176925" rIns="176925" bIns="176925" anchor="ctr" anchorCtr="0">
             <a:normAutofit/>
           </a:bodyPr>
           <a:lstStyle>
@@ -4189,7 +4330,7 @@
             </a:lvl9pPr>
           </a:lstStyle>
           <a:p>
-            <a:pPr indent="0" lvl="0" marL="0" rtl="0" algn="r">
+            <a:pPr marL="0" lvl="0" indent="0" algn="r" rtl="0">
               <a:spcBef>
                 <a:spcPts val="0"/>
               </a:spcBef>
@@ -4215,11 +4356,11 @@
 </file>
 
 <file path=ppt/slideLayouts/slideLayout6.xml><?xml version="1.0" encoding="utf-8"?>
-<p:sldLayout xmlns:a="http://schemas.openxmlformats.org/drawingml/2006/main" xmlns:r="http://schemas.openxmlformats.org/officeDocument/2006/relationships" xmlns:mc="http://schemas.openxmlformats.org/markup-compatibility/2006" xmlns:mv="urn:schemas-microsoft-com:mac:vml" xmlns:p="http://schemas.openxmlformats.org/presentationml/2006/main" xmlns:c="http://schemas.openxmlformats.org/drawingml/2006/chart" xmlns:dgm="http://schemas.openxmlformats.org/drawingml/2006/diagram" xmlns:o="urn:schemas-microsoft-com:office:office" xmlns:v="urn:schemas-microsoft-com:vml" xmlns:pvml="urn:schemas-microsoft-com:office:powerpoint" xmlns:com="http://schemas.openxmlformats.org/drawingml/2006/compatibility" xmlns:p14="http://schemas.microsoft.com/office/powerpoint/2010/main" xmlns:p15="http://schemas.microsoft.com/office/powerpoint/2012/main" xmlns:ahyp="http://schemas.microsoft.com/office/drawing/2018/hyperlinkcolor" matchingName="One column text">
+<p:sldLayout xmlns:a="http://schemas.openxmlformats.org/drawingml/2006/main" xmlns:r="http://schemas.openxmlformats.org/officeDocument/2006/relationships" xmlns:p="http://schemas.openxmlformats.org/presentationml/2006/main" matchingName="One column text">
   <p:cSld name="ONE_COLUMN_TEXT">
     <p:spTree>
       <p:nvGrpSpPr>
-        <p:cNvPr id="28" name="Shape 28"/>
+        <p:cNvPr id="1" name="Shape 28"/>
         <p:cNvGrpSpPr/>
         <p:nvPr/>
       </p:nvGrpSpPr>
@@ -4234,7 +4375,9 @@
       <p:sp>
         <p:nvSpPr>
           <p:cNvPr id="29" name="Google Shape;29;p7"/>
-          <p:cNvSpPr txBox="1"/>
+          <p:cNvSpPr txBox="1">
+            <a:spLocks noGrp="1"/>
+          </p:cNvSpPr>
           <p:nvPr>
             <p:ph type="title"/>
           </p:nvPr>
@@ -4249,7 +4392,7 @@
           </a:prstGeom>
         </p:spPr>
         <p:txBody>
-          <a:bodyPr anchorCtr="0" anchor="b" bIns="176925" lIns="176925" spcFirstLastPara="1" rIns="176925" wrap="square" tIns="176925">
+          <a:bodyPr spcFirstLastPara="1" wrap="square" lIns="176925" tIns="176925" rIns="176925" bIns="176925" anchor="b" anchorCtr="0">
             <a:normAutofit/>
           </a:bodyPr>
           <a:lstStyle>
@@ -4353,15 +4496,19 @@
               <a:defRPr sz="4644"/>
             </a:lvl9pPr>
           </a:lstStyle>
-          <a:p/>
+          <a:p>
+            <a:endParaRPr/>
+          </a:p>
         </p:txBody>
       </p:sp>
       <p:sp>
         <p:nvSpPr>
           <p:cNvPr id="30" name="Google Shape;30;p7"/>
-          <p:cNvSpPr txBox="1"/>
+          <p:cNvSpPr txBox="1">
+            <a:spLocks noGrp="1"/>
+          </p:cNvSpPr>
           <p:nvPr>
-            <p:ph idx="1" type="body"/>
+            <p:ph type="body" idx="1"/>
           </p:nvPr>
         </p:nvSpPr>
         <p:spPr>
@@ -4374,11 +4521,11 @@
           </a:prstGeom>
         </p:spPr>
         <p:txBody>
-          <a:bodyPr anchorCtr="0" anchor="t" bIns="176925" lIns="176925" spcFirstLastPara="1" rIns="176925" wrap="square" tIns="176925">
+          <a:bodyPr spcFirstLastPara="1" wrap="square" lIns="176925" tIns="176925" rIns="176925" bIns="176925" anchor="t" anchorCtr="0">
             <a:normAutofit/>
           </a:bodyPr>
           <a:lstStyle>
-            <a:lvl1pPr indent="-376061" lvl="0" marL="457200">
+            <a:lvl1pPr marL="457200" lvl="0" indent="-376061">
               <a:spcBef>
                 <a:spcPts val="0"/>
               </a:spcBef>
@@ -4389,7 +4536,7 @@
               <a:buChar char="●"/>
               <a:defRPr sz="2322"/>
             </a:lvl1pPr>
-            <a:lvl2pPr indent="-376061" lvl="1" marL="914400">
+            <a:lvl2pPr marL="914400" lvl="1" indent="-376061">
               <a:spcBef>
                 <a:spcPts val="0"/>
               </a:spcBef>
@@ -4400,7 +4547,7 @@
               <a:buChar char="○"/>
               <a:defRPr sz="2322"/>
             </a:lvl2pPr>
-            <a:lvl3pPr indent="-376061" lvl="2" marL="1371600">
+            <a:lvl3pPr marL="1371600" lvl="2" indent="-376061">
               <a:spcBef>
                 <a:spcPts val="0"/>
               </a:spcBef>
@@ -4411,7 +4558,7 @@
               <a:buChar char="■"/>
               <a:defRPr sz="2322"/>
             </a:lvl3pPr>
-            <a:lvl4pPr indent="-376061" lvl="3" marL="1828800">
+            <a:lvl4pPr marL="1828800" lvl="3" indent="-376061">
               <a:spcBef>
                 <a:spcPts val="0"/>
               </a:spcBef>
@@ -4422,7 +4569,7 @@
               <a:buChar char="●"/>
               <a:defRPr sz="2322"/>
             </a:lvl4pPr>
-            <a:lvl5pPr indent="-376061" lvl="4" marL="2286000">
+            <a:lvl5pPr marL="2286000" lvl="4" indent="-376061">
               <a:spcBef>
                 <a:spcPts val="0"/>
               </a:spcBef>
@@ -4433,7 +4580,7 @@
               <a:buChar char="○"/>
               <a:defRPr sz="2322"/>
             </a:lvl5pPr>
-            <a:lvl6pPr indent="-376061" lvl="5" marL="2743200">
+            <a:lvl6pPr marL="2743200" lvl="5" indent="-376061">
               <a:spcBef>
                 <a:spcPts val="0"/>
               </a:spcBef>
@@ -4444,7 +4591,7 @@
               <a:buChar char="■"/>
               <a:defRPr sz="2322"/>
             </a:lvl6pPr>
-            <a:lvl7pPr indent="-376061" lvl="6" marL="3200400">
+            <a:lvl7pPr marL="3200400" lvl="6" indent="-376061">
               <a:spcBef>
                 <a:spcPts val="0"/>
               </a:spcBef>
@@ -4455,7 +4602,7 @@
               <a:buChar char="●"/>
               <a:defRPr sz="2322"/>
             </a:lvl7pPr>
-            <a:lvl8pPr indent="-376061" lvl="7" marL="3657600">
+            <a:lvl8pPr marL="3657600" lvl="7" indent="-376061">
               <a:spcBef>
                 <a:spcPts val="0"/>
               </a:spcBef>
@@ -4466,7 +4613,7 @@
               <a:buChar char="○"/>
               <a:defRPr sz="2322"/>
             </a:lvl8pPr>
-            <a:lvl9pPr indent="-376061" lvl="8" marL="4114800">
+            <a:lvl9pPr marL="4114800" lvl="8" indent="-376061">
               <a:spcBef>
                 <a:spcPts val="0"/>
               </a:spcBef>
@@ -4478,15 +4625,19 @@
               <a:defRPr sz="2322"/>
             </a:lvl9pPr>
           </a:lstStyle>
-          <a:p/>
+          <a:p>
+            <a:endParaRPr/>
+          </a:p>
         </p:txBody>
       </p:sp>
       <p:sp>
         <p:nvSpPr>
           <p:cNvPr id="31" name="Google Shape;31;p7"/>
-          <p:cNvSpPr txBox="1"/>
+          <p:cNvSpPr txBox="1">
+            <a:spLocks noGrp="1"/>
+          </p:cNvSpPr>
           <p:nvPr>
-            <p:ph idx="12" type="sldNum"/>
+            <p:ph type="sldNum" idx="12"/>
           </p:nvPr>
         </p:nvSpPr>
         <p:spPr>
@@ -4499,7 +4650,7 @@
           </a:prstGeom>
         </p:spPr>
         <p:txBody>
-          <a:bodyPr anchorCtr="0" anchor="ctr" bIns="176925" lIns="176925" spcFirstLastPara="1" rIns="176925" wrap="square" tIns="176925">
+          <a:bodyPr spcFirstLastPara="1" wrap="square" lIns="176925" tIns="176925" rIns="176925" bIns="176925" anchor="ctr" anchorCtr="0">
             <a:normAutofit/>
           </a:bodyPr>
           <a:lstStyle>
@@ -4541,7 +4692,7 @@
             </a:lvl9pPr>
           </a:lstStyle>
           <a:p>
-            <a:pPr indent="0" lvl="0" marL="0" rtl="0" algn="r">
+            <a:pPr marL="0" lvl="0" indent="0" algn="r" rtl="0">
               <a:spcBef>
                 <a:spcPts val="0"/>
               </a:spcBef>
@@ -4567,11 +4718,11 @@
 </file>
 
 <file path=ppt/slideLayouts/slideLayout7.xml><?xml version="1.0" encoding="utf-8"?>
-<p:sldLayout xmlns:a="http://schemas.openxmlformats.org/drawingml/2006/main" xmlns:r="http://schemas.openxmlformats.org/officeDocument/2006/relationships" xmlns:mc="http://schemas.openxmlformats.org/markup-compatibility/2006" xmlns:mv="urn:schemas-microsoft-com:mac:vml" xmlns:p="http://schemas.openxmlformats.org/presentationml/2006/main" xmlns:c="http://schemas.openxmlformats.org/drawingml/2006/chart" xmlns:dgm="http://schemas.openxmlformats.org/drawingml/2006/diagram" xmlns:o="urn:schemas-microsoft-com:office:office" xmlns:v="urn:schemas-microsoft-com:vml" xmlns:pvml="urn:schemas-microsoft-com:office:powerpoint" xmlns:com="http://schemas.openxmlformats.org/drawingml/2006/compatibility" xmlns:p14="http://schemas.microsoft.com/office/powerpoint/2010/main" xmlns:p15="http://schemas.microsoft.com/office/powerpoint/2012/main" xmlns:ahyp="http://schemas.microsoft.com/office/drawing/2018/hyperlinkcolor" matchingName="Main point">
+<p:sldLayout xmlns:a="http://schemas.openxmlformats.org/drawingml/2006/main" xmlns:r="http://schemas.openxmlformats.org/officeDocument/2006/relationships" xmlns:p="http://schemas.openxmlformats.org/presentationml/2006/main" matchingName="Main point">
   <p:cSld name="MAIN_POINT">
     <p:spTree>
       <p:nvGrpSpPr>
-        <p:cNvPr id="32" name="Shape 32"/>
+        <p:cNvPr id="1" name="Shape 32"/>
         <p:cNvGrpSpPr/>
         <p:nvPr/>
       </p:nvGrpSpPr>
@@ -4586,7 +4737,9 @@
       <p:sp>
         <p:nvSpPr>
           <p:cNvPr id="33" name="Google Shape;33;p8"/>
-          <p:cNvSpPr txBox="1"/>
+          <p:cNvSpPr txBox="1">
+            <a:spLocks noGrp="1"/>
+          </p:cNvSpPr>
           <p:nvPr>
             <p:ph type="title"/>
           </p:nvPr>
@@ -4601,7 +4754,7 @@
           </a:prstGeom>
         </p:spPr>
         <p:txBody>
-          <a:bodyPr anchorCtr="0" anchor="ctr" bIns="176925" lIns="176925" spcFirstLastPara="1" rIns="176925" wrap="square" tIns="176925">
+          <a:bodyPr spcFirstLastPara="1" wrap="square" lIns="176925" tIns="176925" rIns="176925" bIns="176925" anchor="ctr" anchorCtr="0">
             <a:normAutofit/>
           </a:bodyPr>
           <a:lstStyle>
@@ -4705,15 +4858,19 @@
               <a:defRPr sz="9289"/>
             </a:lvl9pPr>
           </a:lstStyle>
-          <a:p/>
+          <a:p>
+            <a:endParaRPr/>
+          </a:p>
         </p:txBody>
       </p:sp>
       <p:sp>
         <p:nvSpPr>
           <p:cNvPr id="34" name="Google Shape;34;p8"/>
-          <p:cNvSpPr txBox="1"/>
+          <p:cNvSpPr txBox="1">
+            <a:spLocks noGrp="1"/>
+          </p:cNvSpPr>
           <p:nvPr>
-            <p:ph idx="12" type="sldNum"/>
+            <p:ph type="sldNum" idx="12"/>
           </p:nvPr>
         </p:nvSpPr>
         <p:spPr>
@@ -4726,7 +4883,7 @@
           </a:prstGeom>
         </p:spPr>
         <p:txBody>
-          <a:bodyPr anchorCtr="0" anchor="ctr" bIns="176925" lIns="176925" spcFirstLastPara="1" rIns="176925" wrap="square" tIns="176925">
+          <a:bodyPr spcFirstLastPara="1" wrap="square" lIns="176925" tIns="176925" rIns="176925" bIns="176925" anchor="ctr" anchorCtr="0">
             <a:normAutofit/>
           </a:bodyPr>
           <a:lstStyle>
@@ -4768,7 +4925,7 @@
             </a:lvl9pPr>
           </a:lstStyle>
           <a:p>
-            <a:pPr indent="0" lvl="0" marL="0" rtl="0" algn="r">
+            <a:pPr marL="0" lvl="0" indent="0" algn="r" rtl="0">
               <a:spcBef>
                 <a:spcPts val="0"/>
               </a:spcBef>
@@ -4794,11 +4951,11 @@
 </file>
 
 <file path=ppt/slideLayouts/slideLayout8.xml><?xml version="1.0" encoding="utf-8"?>
-<p:sldLayout xmlns:a="http://schemas.openxmlformats.org/drawingml/2006/main" xmlns:r="http://schemas.openxmlformats.org/officeDocument/2006/relationships" xmlns:mc="http://schemas.openxmlformats.org/markup-compatibility/2006" xmlns:mv="urn:schemas-microsoft-com:mac:vml" xmlns:p="http://schemas.openxmlformats.org/presentationml/2006/main" xmlns:c="http://schemas.openxmlformats.org/drawingml/2006/chart" xmlns:dgm="http://schemas.openxmlformats.org/drawingml/2006/diagram" xmlns:o="urn:schemas-microsoft-com:office:office" xmlns:v="urn:schemas-microsoft-com:vml" xmlns:pvml="urn:schemas-microsoft-com:office:powerpoint" xmlns:com="http://schemas.openxmlformats.org/drawingml/2006/compatibility" xmlns:p14="http://schemas.microsoft.com/office/powerpoint/2010/main" xmlns:p15="http://schemas.microsoft.com/office/powerpoint/2012/main" xmlns:ahyp="http://schemas.microsoft.com/office/drawing/2018/hyperlinkcolor" matchingName="Section title and description">
+<p:sldLayout xmlns:a="http://schemas.openxmlformats.org/drawingml/2006/main" xmlns:r="http://schemas.openxmlformats.org/officeDocument/2006/relationships" xmlns:p="http://schemas.openxmlformats.org/presentationml/2006/main" matchingName="Section title and description">
   <p:cSld name="SECTION_TITLE_AND_DESCRIPTION">
     <p:spTree>
       <p:nvGrpSpPr>
-        <p:cNvPr id="35" name="Shape 35"/>
+        <p:cNvPr id="1" name="Shape 35"/>
         <p:cNvGrpSpPr/>
         <p:nvPr/>
       </p:nvGrpSpPr>
@@ -4832,23 +4989,20 @@
           </a:ln>
         </p:spPr>
         <p:txBody>
-          <a:bodyPr anchorCtr="0" anchor="ctr" bIns="176925" lIns="176925" spcFirstLastPara="1" rIns="176925" wrap="square" tIns="176925">
+          <a:bodyPr spcFirstLastPara="1" wrap="square" lIns="176925" tIns="176925" rIns="176925" bIns="176925" anchor="ctr" anchorCtr="0">
             <a:noAutofit/>
           </a:bodyPr>
           <a:lstStyle/>
           <a:p>
-            <a:pPr indent="0" lvl="0" marL="0" rtl="0" algn="l">
-              <a:spcBef>
-                <a:spcPts val="0"/>
-              </a:spcBef>
-              <a:spcAft>
-                <a:spcPts val="0"/>
-              </a:spcAft>
-              <a:buNone/>
-            </a:pPr>
-            <a:r>
-              <a:t/>
-            </a:r>
+            <a:pPr marL="0" lvl="0" indent="0" algn="l" rtl="0">
+              <a:spcBef>
+                <a:spcPts val="0"/>
+              </a:spcBef>
+              <a:spcAft>
+                <a:spcPts val="0"/>
+              </a:spcAft>
+              <a:buNone/>
+            </a:pPr>
             <a:endParaRPr/>
           </a:p>
         </p:txBody>
@@ -4856,7 +5010,9 @@
       <p:sp>
         <p:nvSpPr>
           <p:cNvPr id="37" name="Google Shape;37;p9"/>
-          <p:cNvSpPr txBox="1"/>
+          <p:cNvSpPr txBox="1">
+            <a:spLocks noGrp="1"/>
+          </p:cNvSpPr>
           <p:nvPr>
             <p:ph type="title"/>
           </p:nvPr>
@@ -4871,7 +5027,7 @@
           </a:prstGeom>
         </p:spPr>
         <p:txBody>
-          <a:bodyPr anchorCtr="0" anchor="b" bIns="176925" lIns="176925" spcFirstLastPara="1" rIns="176925" wrap="square" tIns="176925">
+          <a:bodyPr spcFirstLastPara="1" wrap="square" lIns="176925" tIns="176925" rIns="176925" bIns="176925" anchor="b" anchorCtr="0">
             <a:normAutofit/>
           </a:bodyPr>
           <a:lstStyle>
@@ -4975,15 +5131,19 @@
               <a:defRPr sz="8128"/>
             </a:lvl9pPr>
           </a:lstStyle>
-          <a:p/>
+          <a:p>
+            <a:endParaRPr/>
+          </a:p>
         </p:txBody>
       </p:sp>
       <p:sp>
         <p:nvSpPr>
           <p:cNvPr id="38" name="Google Shape;38;p9"/>
-          <p:cNvSpPr txBox="1"/>
+          <p:cNvSpPr txBox="1">
+            <a:spLocks noGrp="1"/>
+          </p:cNvSpPr>
           <p:nvPr>
-            <p:ph idx="1" type="subTitle"/>
+            <p:ph type="subTitle" idx="1"/>
           </p:nvPr>
         </p:nvSpPr>
         <p:spPr>
@@ -4996,7 +5156,7 @@
           </a:prstGeom>
         </p:spPr>
         <p:txBody>
-          <a:bodyPr anchorCtr="0" anchor="t" bIns="176925" lIns="176925" spcFirstLastPara="1" rIns="176925" wrap="square" tIns="176925">
+          <a:bodyPr spcFirstLastPara="1" wrap="square" lIns="176925" tIns="176925" rIns="176925" bIns="176925" anchor="t" anchorCtr="0">
             <a:normAutofit/>
           </a:bodyPr>
           <a:lstStyle>
@@ -5127,15 +5287,19 @@
               <a:defRPr sz="4064"/>
             </a:lvl9pPr>
           </a:lstStyle>
-          <a:p/>
+          <a:p>
+            <a:endParaRPr/>
+          </a:p>
         </p:txBody>
       </p:sp>
       <p:sp>
         <p:nvSpPr>
           <p:cNvPr id="39" name="Google Shape;39;p9"/>
-          <p:cNvSpPr txBox="1"/>
+          <p:cNvSpPr txBox="1">
+            <a:spLocks noGrp="1"/>
+          </p:cNvSpPr>
           <p:nvPr>
-            <p:ph idx="2" type="body"/>
+            <p:ph type="body" idx="2"/>
           </p:nvPr>
         </p:nvSpPr>
         <p:spPr>
@@ -5148,11 +5312,11 @@
           </a:prstGeom>
         </p:spPr>
         <p:txBody>
-          <a:bodyPr anchorCtr="0" anchor="ctr" bIns="176925" lIns="176925" spcFirstLastPara="1" rIns="176925" wrap="square" tIns="176925">
+          <a:bodyPr spcFirstLastPara="1" wrap="square" lIns="176925" tIns="176925" rIns="176925" bIns="176925" anchor="ctr" anchorCtr="0">
             <a:normAutofit/>
           </a:bodyPr>
           <a:lstStyle>
-            <a:lvl1pPr indent="-449791" lvl="0" marL="457200">
+            <a:lvl1pPr marL="457200" lvl="0" indent="-449791">
               <a:spcBef>
                 <a:spcPts val="0"/>
               </a:spcBef>
@@ -5163,7 +5327,7 @@
               <a:buChar char="●"/>
               <a:defRPr sz="3483"/>
             </a:lvl1pPr>
-            <a:lvl2pPr indent="-400638" lvl="1" marL="914400">
+            <a:lvl2pPr marL="914400" lvl="1" indent="-400638">
               <a:spcBef>
                 <a:spcPts val="0"/>
               </a:spcBef>
@@ -5174,7 +5338,7 @@
               <a:buChar char="○"/>
               <a:defRPr sz="2709"/>
             </a:lvl2pPr>
-            <a:lvl3pPr indent="-400638" lvl="2" marL="1371600">
+            <a:lvl3pPr marL="1371600" lvl="2" indent="-400638">
               <a:spcBef>
                 <a:spcPts val="0"/>
               </a:spcBef>
@@ -5185,7 +5349,7 @@
               <a:buChar char="■"/>
               <a:defRPr sz="2709"/>
             </a:lvl3pPr>
-            <a:lvl4pPr indent="-400638" lvl="3" marL="1828800">
+            <a:lvl4pPr marL="1828800" lvl="3" indent="-400638">
               <a:spcBef>
                 <a:spcPts val="0"/>
               </a:spcBef>
@@ -5196,7 +5360,7 @@
               <a:buChar char="●"/>
               <a:defRPr sz="2709"/>
             </a:lvl4pPr>
-            <a:lvl5pPr indent="-400638" lvl="4" marL="2286000">
+            <a:lvl5pPr marL="2286000" lvl="4" indent="-400638">
               <a:spcBef>
                 <a:spcPts val="0"/>
               </a:spcBef>
@@ -5207,7 +5371,7 @@
               <a:buChar char="○"/>
               <a:defRPr sz="2709"/>
             </a:lvl5pPr>
-            <a:lvl6pPr indent="-400638" lvl="5" marL="2743200">
+            <a:lvl6pPr marL="2743200" lvl="5" indent="-400638">
               <a:spcBef>
                 <a:spcPts val="0"/>
               </a:spcBef>
@@ -5218,7 +5382,7 @@
               <a:buChar char="■"/>
               <a:defRPr sz="2709"/>
             </a:lvl6pPr>
-            <a:lvl7pPr indent="-400638" lvl="6" marL="3200400">
+            <a:lvl7pPr marL="3200400" lvl="6" indent="-400638">
               <a:spcBef>
                 <a:spcPts val="0"/>
               </a:spcBef>
@@ -5229,7 +5393,7 @@
               <a:buChar char="●"/>
               <a:defRPr sz="2709"/>
             </a:lvl7pPr>
-            <a:lvl8pPr indent="-400638" lvl="7" marL="3657600">
+            <a:lvl8pPr marL="3657600" lvl="7" indent="-400638">
               <a:spcBef>
                 <a:spcPts val="0"/>
               </a:spcBef>
@@ -5240,7 +5404,7 @@
               <a:buChar char="○"/>
               <a:defRPr sz="2709"/>
             </a:lvl8pPr>
-            <a:lvl9pPr indent="-400638" lvl="8" marL="4114800">
+            <a:lvl9pPr marL="4114800" lvl="8" indent="-400638">
               <a:spcBef>
                 <a:spcPts val="0"/>
               </a:spcBef>
@@ -5252,15 +5416,19 @@
               <a:defRPr sz="2709"/>
             </a:lvl9pPr>
           </a:lstStyle>
-          <a:p/>
+          <a:p>
+            <a:endParaRPr/>
+          </a:p>
         </p:txBody>
       </p:sp>
       <p:sp>
         <p:nvSpPr>
           <p:cNvPr id="40" name="Google Shape;40;p9"/>
-          <p:cNvSpPr txBox="1"/>
+          <p:cNvSpPr txBox="1">
+            <a:spLocks noGrp="1"/>
+          </p:cNvSpPr>
           <p:nvPr>
-            <p:ph idx="12" type="sldNum"/>
+            <p:ph type="sldNum" idx="12"/>
           </p:nvPr>
         </p:nvSpPr>
         <p:spPr>
@@ -5273,7 +5441,7 @@
           </a:prstGeom>
         </p:spPr>
         <p:txBody>
-          <a:bodyPr anchorCtr="0" anchor="ctr" bIns="176925" lIns="176925" spcFirstLastPara="1" rIns="176925" wrap="square" tIns="176925">
+          <a:bodyPr spcFirstLastPara="1" wrap="square" lIns="176925" tIns="176925" rIns="176925" bIns="176925" anchor="ctr" anchorCtr="0">
             <a:normAutofit/>
           </a:bodyPr>
           <a:lstStyle>
@@ -5315,7 +5483,7 @@
             </a:lvl9pPr>
           </a:lstStyle>
           <a:p>
-            <a:pPr indent="0" lvl="0" marL="0" rtl="0" algn="r">
+            <a:pPr marL="0" lvl="0" indent="0" algn="r" rtl="0">
               <a:spcBef>
                 <a:spcPts val="0"/>
               </a:spcBef>
@@ -5341,11 +5509,11 @@
 </file>
 
 <file path=ppt/slideLayouts/slideLayout9.xml><?xml version="1.0" encoding="utf-8"?>
-<p:sldLayout xmlns:a="http://schemas.openxmlformats.org/drawingml/2006/main" xmlns:r="http://schemas.openxmlformats.org/officeDocument/2006/relationships" xmlns:mc="http://schemas.openxmlformats.org/markup-compatibility/2006" xmlns:mv="urn:schemas-microsoft-com:mac:vml" xmlns:p="http://schemas.openxmlformats.org/presentationml/2006/main" xmlns:c="http://schemas.openxmlformats.org/drawingml/2006/chart" xmlns:dgm="http://schemas.openxmlformats.org/drawingml/2006/diagram" xmlns:o="urn:schemas-microsoft-com:office:office" xmlns:v="urn:schemas-microsoft-com:vml" xmlns:pvml="urn:schemas-microsoft-com:office:powerpoint" xmlns:com="http://schemas.openxmlformats.org/drawingml/2006/compatibility" xmlns:p14="http://schemas.microsoft.com/office/powerpoint/2010/main" xmlns:p15="http://schemas.microsoft.com/office/powerpoint/2012/main" xmlns:ahyp="http://schemas.microsoft.com/office/drawing/2018/hyperlinkcolor" matchingName="Caption">
+<p:sldLayout xmlns:a="http://schemas.openxmlformats.org/drawingml/2006/main" xmlns:r="http://schemas.openxmlformats.org/officeDocument/2006/relationships" xmlns:p="http://schemas.openxmlformats.org/presentationml/2006/main" matchingName="Caption">
   <p:cSld name="CAPTION_ONLY">
     <p:spTree>
       <p:nvGrpSpPr>
-        <p:cNvPr id="41" name="Shape 41"/>
+        <p:cNvPr id="1" name="Shape 41"/>
         <p:cNvGrpSpPr/>
         <p:nvPr/>
       </p:nvGrpSpPr>
@@ -5360,9 +5528,11 @@
       <p:sp>
         <p:nvSpPr>
           <p:cNvPr id="42" name="Google Shape;42;p10"/>
-          <p:cNvSpPr txBox="1"/>
+          <p:cNvSpPr txBox="1">
+            <a:spLocks noGrp="1"/>
+          </p:cNvSpPr>
           <p:nvPr>
-            <p:ph idx="1" type="body"/>
+            <p:ph type="body" idx="1"/>
           </p:nvPr>
         </p:nvSpPr>
         <p:spPr>
@@ -5375,11 +5545,11 @@
           </a:prstGeom>
         </p:spPr>
         <p:txBody>
-          <a:bodyPr anchorCtr="0" anchor="ctr" bIns="176925" lIns="176925" spcFirstLastPara="1" rIns="176925" wrap="square" tIns="176925">
+          <a:bodyPr spcFirstLastPara="1" wrap="square" lIns="176925" tIns="176925" rIns="176925" bIns="176925" anchor="ctr" anchorCtr="0">
             <a:normAutofit/>
           </a:bodyPr>
           <a:lstStyle>
-            <a:lvl1pPr indent="-228600" lvl="0" marL="457200">
+            <a:lvl1pPr marL="457200" lvl="0" indent="-228600">
               <a:lnSpc>
                 <a:spcPct val="100000"/>
               </a:lnSpc>
@@ -5394,15 +5564,19 @@
               <a:defRPr sz="3483"/>
             </a:lvl1pPr>
           </a:lstStyle>
-          <a:p/>
+          <a:p>
+            <a:endParaRPr/>
+          </a:p>
         </p:txBody>
       </p:sp>
       <p:sp>
         <p:nvSpPr>
           <p:cNvPr id="43" name="Google Shape;43;p10"/>
-          <p:cNvSpPr txBox="1"/>
+          <p:cNvSpPr txBox="1">
+            <a:spLocks noGrp="1"/>
+          </p:cNvSpPr>
           <p:nvPr>
-            <p:ph idx="12" type="sldNum"/>
+            <p:ph type="sldNum" idx="12"/>
           </p:nvPr>
         </p:nvSpPr>
         <p:spPr>
@@ -5415,7 +5589,7 @@
           </a:prstGeom>
         </p:spPr>
         <p:txBody>
-          <a:bodyPr anchorCtr="0" anchor="ctr" bIns="176925" lIns="176925" spcFirstLastPara="1" rIns="176925" wrap="square" tIns="176925">
+          <a:bodyPr spcFirstLastPara="1" wrap="square" lIns="176925" tIns="176925" rIns="176925" bIns="176925" anchor="ctr" anchorCtr="0">
             <a:normAutofit/>
           </a:bodyPr>
           <a:lstStyle>
@@ -5457,7 +5631,7 @@
             </a:lvl9pPr>
           </a:lstStyle>
           <a:p>
-            <a:pPr indent="0" lvl="0" marL="0" rtl="0" algn="r">
+            <a:pPr marL="0" lvl="0" indent="0" algn="r" rtl="0">
               <a:spcBef>
                 <a:spcPts val="0"/>
               </a:spcBef>
@@ -5483,18 +5657,19 @@
 </file>
 
 <file path=ppt/slideMasters/slideMaster1.xml><?xml version="1.0" encoding="utf-8"?>
-<p:sldMaster xmlns:a="http://schemas.openxmlformats.org/drawingml/2006/main" xmlns:r="http://schemas.openxmlformats.org/officeDocument/2006/relationships" xmlns:mc="http://schemas.openxmlformats.org/markup-compatibility/2006" xmlns:mv="urn:schemas-microsoft-com:mac:vml" xmlns:p="http://schemas.openxmlformats.org/presentationml/2006/main" xmlns:c="http://schemas.openxmlformats.org/drawingml/2006/chart" xmlns:dgm="http://schemas.openxmlformats.org/drawingml/2006/diagram" xmlns:o="urn:schemas-microsoft-com:office:office" xmlns:v="urn:schemas-microsoft-com:vml" xmlns:pvml="urn:schemas-microsoft-com:office:powerpoint" xmlns:com="http://schemas.openxmlformats.org/drawingml/2006/compatibility" xmlns:p14="http://schemas.microsoft.com/office/powerpoint/2010/main" xmlns:p15="http://schemas.microsoft.com/office/powerpoint/2012/main" xmlns:ahyp="http://schemas.microsoft.com/office/drawing/2018/hyperlinkcolor">
+<p:sldMaster xmlns:a="http://schemas.openxmlformats.org/drawingml/2006/main" xmlns:r="http://schemas.openxmlformats.org/officeDocument/2006/relationships" xmlns:p="http://schemas.openxmlformats.org/presentationml/2006/main">
   <p:cSld name="simple-light-2">
     <p:bg>
       <p:bgPr>
         <a:solidFill>
           <a:schemeClr val="lt1"/>
         </a:solidFill>
+        <a:effectLst/>
       </p:bgPr>
     </p:bg>
     <p:spTree>
       <p:nvGrpSpPr>
-        <p:cNvPr id="5" name="Shape 5"/>
+        <p:cNvPr id="1" name="Shape 5"/>
         <p:cNvGrpSpPr/>
         <p:nvPr/>
       </p:nvGrpSpPr>
@@ -5509,7 +5684,9 @@
       <p:sp>
         <p:nvSpPr>
           <p:cNvPr id="6" name="Google Shape;6;p1"/>
-          <p:cNvSpPr txBox="1"/>
+          <p:cNvSpPr txBox="1">
+            <a:spLocks noGrp="1"/>
+          </p:cNvSpPr>
           <p:nvPr>
             <p:ph type="title"/>
           </p:nvPr>
@@ -5528,7 +5705,7 @@
           </a:ln>
         </p:spPr>
         <p:txBody>
-          <a:bodyPr anchorCtr="0" anchor="t" bIns="176925" lIns="176925" spcFirstLastPara="1" rIns="176925" wrap="square" tIns="176925">
+          <a:bodyPr spcFirstLastPara="1" wrap="square" lIns="176925" tIns="176925" rIns="176925" bIns="176925" anchor="t" anchorCtr="0">
             <a:normAutofit/>
           </a:bodyPr>
           <a:lstStyle>
@@ -5695,15 +5872,19 @@
               </a:defRPr>
             </a:lvl9pPr>
           </a:lstStyle>
-          <a:p/>
+          <a:p>
+            <a:endParaRPr/>
+          </a:p>
         </p:txBody>
       </p:sp>
       <p:sp>
         <p:nvSpPr>
           <p:cNvPr id="7" name="Google Shape;7;p1"/>
-          <p:cNvSpPr txBox="1"/>
+          <p:cNvSpPr txBox="1">
+            <a:spLocks noGrp="1"/>
+          </p:cNvSpPr>
           <p:nvPr>
-            <p:ph idx="1" type="body"/>
+            <p:ph type="body" idx="1"/>
           </p:nvPr>
         </p:nvSpPr>
         <p:spPr>
@@ -5720,11 +5901,11 @@
           </a:ln>
         </p:spPr>
         <p:txBody>
-          <a:bodyPr anchorCtr="0" anchor="t" bIns="176925" lIns="176925" spcFirstLastPara="1" rIns="176925" wrap="square" tIns="176925">
+          <a:bodyPr spcFirstLastPara="1" wrap="square" lIns="176925" tIns="176925" rIns="176925" bIns="176925" anchor="t" anchorCtr="0">
             <a:normAutofit/>
           </a:bodyPr>
           <a:lstStyle>
-            <a:lvl1pPr indent="-449791" lvl="0" marL="457200">
+            <a:lvl1pPr marL="457200" lvl="0" indent="-449791">
               <a:lnSpc>
                 <a:spcPct val="115000"/>
               </a:lnSpc>
@@ -5745,7 +5926,7 @@
                 </a:solidFill>
               </a:defRPr>
             </a:lvl1pPr>
-            <a:lvl2pPr indent="-400638" lvl="1" marL="914400">
+            <a:lvl2pPr marL="914400" lvl="1" indent="-400638">
               <a:lnSpc>
                 <a:spcPct val="115000"/>
               </a:lnSpc>
@@ -5766,7 +5947,7 @@
                 </a:solidFill>
               </a:defRPr>
             </a:lvl2pPr>
-            <a:lvl3pPr indent="-400638" lvl="2" marL="1371600">
+            <a:lvl3pPr marL="1371600" lvl="2" indent="-400638">
               <a:lnSpc>
                 <a:spcPct val="115000"/>
               </a:lnSpc>
@@ -5787,7 +5968,7 @@
                 </a:solidFill>
               </a:defRPr>
             </a:lvl3pPr>
-            <a:lvl4pPr indent="-400638" lvl="3" marL="1828800">
+            <a:lvl4pPr marL="1828800" lvl="3" indent="-400638">
               <a:lnSpc>
                 <a:spcPct val="115000"/>
               </a:lnSpc>
@@ -5808,7 +5989,7 @@
                 </a:solidFill>
               </a:defRPr>
             </a:lvl4pPr>
-            <a:lvl5pPr indent="-400638" lvl="4" marL="2286000">
+            <a:lvl5pPr marL="2286000" lvl="4" indent="-400638">
               <a:lnSpc>
                 <a:spcPct val="115000"/>
               </a:lnSpc>
@@ -5829,7 +6010,7 @@
                 </a:solidFill>
               </a:defRPr>
             </a:lvl5pPr>
-            <a:lvl6pPr indent="-400638" lvl="5" marL="2743200">
+            <a:lvl6pPr marL="2743200" lvl="5" indent="-400638">
               <a:lnSpc>
                 <a:spcPct val="115000"/>
               </a:lnSpc>
@@ -5850,7 +6031,7 @@
                 </a:solidFill>
               </a:defRPr>
             </a:lvl6pPr>
-            <a:lvl7pPr indent="-400638" lvl="6" marL="3200400">
+            <a:lvl7pPr marL="3200400" lvl="6" indent="-400638">
               <a:lnSpc>
                 <a:spcPct val="115000"/>
               </a:lnSpc>
@@ -5871,7 +6052,7 @@
                 </a:solidFill>
               </a:defRPr>
             </a:lvl7pPr>
-            <a:lvl8pPr indent="-400638" lvl="7" marL="3657600">
+            <a:lvl8pPr marL="3657600" lvl="7" indent="-400638">
               <a:lnSpc>
                 <a:spcPct val="115000"/>
               </a:lnSpc>
@@ -5892,7 +6073,7 @@
                 </a:solidFill>
               </a:defRPr>
             </a:lvl8pPr>
-            <a:lvl9pPr indent="-400638" lvl="8" marL="4114800">
+            <a:lvl9pPr marL="4114800" lvl="8" indent="-400638">
               <a:lnSpc>
                 <a:spcPct val="115000"/>
               </a:lnSpc>
@@ -5914,15 +6095,19 @@
               </a:defRPr>
             </a:lvl9pPr>
           </a:lstStyle>
-          <a:p/>
+          <a:p>
+            <a:endParaRPr/>
+          </a:p>
         </p:txBody>
       </p:sp>
       <p:sp>
         <p:nvSpPr>
           <p:cNvPr id="8" name="Google Shape;8;p1"/>
-          <p:cNvSpPr txBox="1"/>
+          <p:cNvSpPr txBox="1">
+            <a:spLocks noGrp="1"/>
+          </p:cNvSpPr>
           <p:nvPr>
-            <p:ph idx="12" type="sldNum"/>
+            <p:ph type="sldNum" idx="12"/>
           </p:nvPr>
         </p:nvSpPr>
         <p:spPr>
@@ -5939,7 +6124,7 @@
           </a:ln>
         </p:spPr>
         <p:txBody>
-          <a:bodyPr anchorCtr="0" anchor="ctr" bIns="176925" lIns="176925" spcFirstLastPara="1" rIns="176925" wrap="square" tIns="176925">
+          <a:bodyPr spcFirstLastPara="1" wrap="square" lIns="176925" tIns="176925" rIns="176925" bIns="176925" anchor="ctr" anchorCtr="0">
             <a:normAutofit/>
           </a:bodyPr>
           <a:lstStyle>
@@ -6017,7 +6202,7 @@
             </a:lvl9pPr>
           </a:lstStyle>
           <a:p>
-            <a:pPr indent="0" lvl="0" marL="0" rtl="0" algn="r">
+            <a:pPr marL="0" lvl="0" indent="0" algn="r" rtl="0">
               <a:spcBef>
                 <a:spcPts val="0"/>
               </a:spcBef>
@@ -6036,7 +6221,7 @@
       </p:sp>
     </p:spTree>
   </p:cSld>
-  <p:clrMap accent1="accent1" accent2="accent2" accent3="accent3" accent4="accent4" accent5="accent5" accent6="accent6" bg1="lt1" bg2="dk2" tx1="dk1" tx2="lt2" folHlink="folHlink" hlink="hlink"/>
+  <p:clrMap bg1="lt1" tx1="dk1" bg2="dk2" tx2="lt2" accent1="accent1" accent2="accent2" accent3="accent3" accent4="accent4" accent5="accent5" accent6="accent6" hlink="hlink" folHlink="folHlink"/>
   <p:sldLayoutIdLst>
     <p:sldLayoutId id="2147483648" r:id="rId1"/>
     <p:sldLayoutId id="2147483649" r:id="rId2"/>
@@ -6050,10 +6235,10 @@
     <p:sldLayoutId id="2147483657" r:id="rId10"/>
     <p:sldLayoutId id="2147483658" r:id="rId11"/>
   </p:sldLayoutIdLst>
-  <p:hf dt="0" ftr="0" hdr="0" sldNum="0"/>
+  <p:hf sldNum="0" hdr="0" ftr="0" dt="0"/>
   <p:txStyles>
     <p:titleStyle>
-      <a:defPPr lvl="0" marR="0" rtl="0" algn="l">
+      <a:defPPr marR="0" lvl="0" algn="l" rtl="0">
         <a:lnSpc>
           <a:spcPct val="100000"/>
         </a:lnSpc>
@@ -6064,7 +6249,7 @@
           <a:spcPts val="0"/>
         </a:spcAft>
       </a:defPPr>
-      <a:lvl1pPr lvl="0" marR="0" rtl="0" algn="l">
+      <a:lvl1pPr marR="0" lvl="0" algn="l" rtl="0">
         <a:lnSpc>
           <a:spcPct val="100000"/>
         </a:lnSpc>
@@ -6078,7 +6263,7 @@
           <a:srgbClr val="000000"/>
         </a:buClr>
         <a:buFont typeface="Arial"/>
-        <a:defRPr b="0" i="0" spc="0" sz="1400" u="none" cap="none" strike="noStrike">
+        <a:defRPr sz="1400" b="0" i="0" u="none" strike="noStrike" cap="none" spc="0">
           <a:solidFill>
             <a:srgbClr val="000000"/>
           </a:solidFill>
@@ -6088,7 +6273,7 @@
           <a:sym typeface="Arial"/>
         </a:defRPr>
       </a:lvl1pPr>
-      <a:lvl2pPr lvl="1" marR="0" rtl="0" algn="l">
+      <a:lvl2pPr marR="0" lvl="1" algn="l" rtl="0">
         <a:lnSpc>
           <a:spcPct val="100000"/>
         </a:lnSpc>
@@ -6102,7 +6287,7 @@
           <a:srgbClr val="000000"/>
         </a:buClr>
         <a:buFont typeface="Arial"/>
-        <a:defRPr b="0" i="0" spc="0" sz="1400" u="none" cap="none" strike="noStrike">
+        <a:defRPr sz="1400" b="0" i="0" u="none" strike="noStrike" cap="none" spc="0">
           <a:solidFill>
             <a:srgbClr val="000000"/>
           </a:solidFill>
@@ -6112,7 +6297,7 @@
           <a:sym typeface="Arial"/>
         </a:defRPr>
       </a:lvl2pPr>
-      <a:lvl3pPr lvl="2" marR="0" rtl="0" algn="l">
+      <a:lvl3pPr marR="0" lvl="2" algn="l" rtl="0">
         <a:lnSpc>
           <a:spcPct val="100000"/>
         </a:lnSpc>
@@ -6126,7 +6311,7 @@
           <a:srgbClr val="000000"/>
         </a:buClr>
         <a:buFont typeface="Arial"/>
-        <a:defRPr b="0" i="0" spc="0" sz="1400" u="none" cap="none" strike="noStrike">
+        <a:defRPr sz="1400" b="0" i="0" u="none" strike="noStrike" cap="none" spc="0">
           <a:solidFill>
             <a:srgbClr val="000000"/>
           </a:solidFill>
@@ -6136,7 +6321,7 @@
           <a:sym typeface="Arial"/>
         </a:defRPr>
       </a:lvl3pPr>
-      <a:lvl4pPr lvl="3" marR="0" rtl="0" algn="l">
+      <a:lvl4pPr marR="0" lvl="3" algn="l" rtl="0">
         <a:lnSpc>
           <a:spcPct val="100000"/>
         </a:lnSpc>
@@ -6150,7 +6335,7 @@
           <a:srgbClr val="000000"/>
         </a:buClr>
         <a:buFont typeface="Arial"/>
-        <a:defRPr b="0" i="0" spc="0" sz="1400" u="none" cap="none" strike="noStrike">
+        <a:defRPr sz="1400" b="0" i="0" u="none" strike="noStrike" cap="none" spc="0">
           <a:solidFill>
             <a:srgbClr val="000000"/>
           </a:solidFill>
@@ -6160,7 +6345,7 @@
           <a:sym typeface="Arial"/>
         </a:defRPr>
       </a:lvl4pPr>
-      <a:lvl5pPr lvl="4" marR="0" rtl="0" algn="l">
+      <a:lvl5pPr marR="0" lvl="4" algn="l" rtl="0">
         <a:lnSpc>
           <a:spcPct val="100000"/>
         </a:lnSpc>
@@ -6174,7 +6359,7 @@
           <a:srgbClr val="000000"/>
         </a:buClr>
         <a:buFont typeface="Arial"/>
-        <a:defRPr b="0" i="0" spc="0" sz="1400" u="none" cap="none" strike="noStrike">
+        <a:defRPr sz="1400" b="0" i="0" u="none" strike="noStrike" cap="none" spc="0">
           <a:solidFill>
             <a:srgbClr val="000000"/>
           </a:solidFill>
@@ -6184,7 +6369,7 @@
           <a:sym typeface="Arial"/>
         </a:defRPr>
       </a:lvl5pPr>
-      <a:lvl6pPr lvl="5" marR="0" rtl="0" algn="l">
+      <a:lvl6pPr marR="0" lvl="5" algn="l" rtl="0">
         <a:lnSpc>
           <a:spcPct val="100000"/>
         </a:lnSpc>
@@ -6198,7 +6383,7 @@
           <a:srgbClr val="000000"/>
         </a:buClr>
         <a:buFont typeface="Arial"/>
-        <a:defRPr b="0" i="0" spc="0" sz="1400" u="none" cap="none" strike="noStrike">
+        <a:defRPr sz="1400" b="0" i="0" u="none" strike="noStrike" cap="none" spc="0">
           <a:solidFill>
             <a:srgbClr val="000000"/>
           </a:solidFill>
@@ -6208,7 +6393,7 @@
           <a:sym typeface="Arial"/>
         </a:defRPr>
       </a:lvl6pPr>
-      <a:lvl7pPr lvl="6" marR="0" rtl="0" algn="l">
+      <a:lvl7pPr marR="0" lvl="6" algn="l" rtl="0">
         <a:lnSpc>
           <a:spcPct val="100000"/>
         </a:lnSpc>
@@ -6222,7 +6407,7 @@
           <a:srgbClr val="000000"/>
         </a:buClr>
         <a:buFont typeface="Arial"/>
-        <a:defRPr b="0" i="0" spc="0" sz="1400" u="none" cap="none" strike="noStrike">
+        <a:defRPr sz="1400" b="0" i="0" u="none" strike="noStrike" cap="none" spc="0">
           <a:solidFill>
             <a:srgbClr val="000000"/>
           </a:solidFill>
@@ -6232,7 +6417,7 @@
           <a:sym typeface="Arial"/>
         </a:defRPr>
       </a:lvl7pPr>
-      <a:lvl8pPr lvl="7" marR="0" rtl="0" algn="l">
+      <a:lvl8pPr marR="0" lvl="7" algn="l" rtl="0">
         <a:lnSpc>
           <a:spcPct val="100000"/>
         </a:lnSpc>
@@ -6246,7 +6431,7 @@
           <a:srgbClr val="000000"/>
         </a:buClr>
         <a:buFont typeface="Arial"/>
-        <a:defRPr b="0" i="0" spc="0" sz="1400" u="none" cap="none" strike="noStrike">
+        <a:defRPr sz="1400" b="0" i="0" u="none" strike="noStrike" cap="none" spc="0">
           <a:solidFill>
             <a:srgbClr val="000000"/>
           </a:solidFill>
@@ -6256,7 +6441,7 @@
           <a:sym typeface="Arial"/>
         </a:defRPr>
       </a:lvl8pPr>
-      <a:lvl9pPr lvl="8" marR="0" rtl="0" algn="l">
+      <a:lvl9pPr marR="0" lvl="8" algn="l" rtl="0">
         <a:lnSpc>
           <a:spcPct val="100000"/>
         </a:lnSpc>
@@ -6270,7 +6455,7 @@
           <a:srgbClr val="000000"/>
         </a:buClr>
         <a:buFont typeface="Arial"/>
-        <a:defRPr b="0" i="0" spc="0" sz="1400" u="none" cap="none" strike="noStrike">
+        <a:defRPr sz="1400" b="0" i="0" u="none" strike="noStrike" cap="none" spc="0">
           <a:solidFill>
             <a:srgbClr val="000000"/>
           </a:solidFill>
@@ -6282,7 +6467,7 @@
       </a:lvl9pPr>
     </p:titleStyle>
     <p:bodyStyle>
-      <a:defPPr lvl="0" marR="0" rtl="0" algn="l">
+      <a:defPPr marR="0" lvl="0" algn="l" rtl="0">
         <a:lnSpc>
           <a:spcPct val="100000"/>
         </a:lnSpc>
@@ -6293,7 +6478,7 @@
           <a:spcPts val="0"/>
         </a:spcAft>
       </a:defPPr>
-      <a:lvl1pPr lvl="0" marR="0" rtl="0" algn="l">
+      <a:lvl1pPr marR="0" lvl="0" algn="l" rtl="0">
         <a:lnSpc>
           <a:spcPct val="100000"/>
         </a:lnSpc>
@@ -6307,7 +6492,7 @@
           <a:srgbClr val="000000"/>
         </a:buClr>
         <a:buFont typeface="Arial"/>
-        <a:defRPr b="0" i="0" spc="0" sz="1400" u="none" cap="none" strike="noStrike">
+        <a:defRPr sz="1400" b="0" i="0" u="none" strike="noStrike" cap="none" spc="0">
           <a:solidFill>
             <a:srgbClr val="000000"/>
           </a:solidFill>
@@ -6317,7 +6502,7 @@
           <a:sym typeface="Arial"/>
         </a:defRPr>
       </a:lvl1pPr>
-      <a:lvl2pPr lvl="1" marR="0" rtl="0" algn="l">
+      <a:lvl2pPr marR="0" lvl="1" algn="l" rtl="0">
         <a:lnSpc>
           <a:spcPct val="100000"/>
         </a:lnSpc>
@@ -6331,7 +6516,7 @@
           <a:srgbClr val="000000"/>
         </a:buClr>
         <a:buFont typeface="Arial"/>
-        <a:defRPr b="0" i="0" spc="0" sz="1400" u="none" cap="none" strike="noStrike">
+        <a:defRPr sz="1400" b="0" i="0" u="none" strike="noStrike" cap="none" spc="0">
           <a:solidFill>
             <a:srgbClr val="000000"/>
           </a:solidFill>
@@ -6341,7 +6526,7 @@
           <a:sym typeface="Arial"/>
         </a:defRPr>
       </a:lvl2pPr>
-      <a:lvl3pPr lvl="2" marR="0" rtl="0" algn="l">
+      <a:lvl3pPr marR="0" lvl="2" algn="l" rtl="0">
         <a:lnSpc>
           <a:spcPct val="100000"/>
         </a:lnSpc>
@@ -6355,7 +6540,7 @@
           <a:srgbClr val="000000"/>
         </a:buClr>
         <a:buFont typeface="Arial"/>
-        <a:defRPr b="0" i="0" spc="0" sz="1400" u="none" cap="none" strike="noStrike">
+        <a:defRPr sz="1400" b="0" i="0" u="none" strike="noStrike" cap="none" spc="0">
           <a:solidFill>
             <a:srgbClr val="000000"/>
           </a:solidFill>
@@ -6365,7 +6550,7 @@
           <a:sym typeface="Arial"/>
         </a:defRPr>
       </a:lvl3pPr>
-      <a:lvl4pPr lvl="3" marR="0" rtl="0" algn="l">
+      <a:lvl4pPr marR="0" lvl="3" algn="l" rtl="0">
         <a:lnSpc>
           <a:spcPct val="100000"/>
         </a:lnSpc>
@@ -6379,7 +6564,7 @@
           <a:srgbClr val="000000"/>
         </a:buClr>
         <a:buFont typeface="Arial"/>
-        <a:defRPr b="0" i="0" spc="0" sz="1400" u="none" cap="none" strike="noStrike">
+        <a:defRPr sz="1400" b="0" i="0" u="none" strike="noStrike" cap="none" spc="0">
           <a:solidFill>
             <a:srgbClr val="000000"/>
           </a:solidFill>
@@ -6389,7 +6574,7 @@
           <a:sym typeface="Arial"/>
         </a:defRPr>
       </a:lvl4pPr>
-      <a:lvl5pPr lvl="4" marR="0" rtl="0" algn="l">
+      <a:lvl5pPr marR="0" lvl="4" algn="l" rtl="0">
         <a:lnSpc>
           <a:spcPct val="100000"/>
         </a:lnSpc>
@@ -6403,7 +6588,7 @@
           <a:srgbClr val="000000"/>
         </a:buClr>
         <a:buFont typeface="Arial"/>
-        <a:defRPr b="0" i="0" spc="0" sz="1400" u="none" cap="none" strike="noStrike">
+        <a:defRPr sz="1400" b="0" i="0" u="none" strike="noStrike" cap="none" spc="0">
           <a:solidFill>
             <a:srgbClr val="000000"/>
           </a:solidFill>
@@ -6413,7 +6598,7 @@
           <a:sym typeface="Arial"/>
         </a:defRPr>
       </a:lvl5pPr>
-      <a:lvl6pPr lvl="5" marR="0" rtl="0" algn="l">
+      <a:lvl6pPr marR="0" lvl="5" algn="l" rtl="0">
         <a:lnSpc>
           <a:spcPct val="100000"/>
         </a:lnSpc>
@@ -6427,7 +6612,7 @@
           <a:srgbClr val="000000"/>
         </a:buClr>
         <a:buFont typeface="Arial"/>
-        <a:defRPr b="0" i="0" spc="0" sz="1400" u="none" cap="none" strike="noStrike">
+        <a:defRPr sz="1400" b="0" i="0" u="none" strike="noStrike" cap="none" spc="0">
           <a:solidFill>
             <a:srgbClr val="000000"/>
           </a:solidFill>
@@ -6437,7 +6622,7 @@
           <a:sym typeface="Arial"/>
         </a:defRPr>
       </a:lvl6pPr>
-      <a:lvl7pPr lvl="6" marR="0" rtl="0" algn="l">
+      <a:lvl7pPr marR="0" lvl="6" algn="l" rtl="0">
         <a:lnSpc>
           <a:spcPct val="100000"/>
         </a:lnSpc>
@@ -6451,7 +6636,7 @@
           <a:srgbClr val="000000"/>
         </a:buClr>
         <a:buFont typeface="Arial"/>
-        <a:defRPr b="0" i="0" spc="0" sz="1400" u="none" cap="none" strike="noStrike">
+        <a:defRPr sz="1400" b="0" i="0" u="none" strike="noStrike" cap="none" spc="0">
           <a:solidFill>
             <a:srgbClr val="000000"/>
           </a:solidFill>
@@ -6461,7 +6646,7 @@
           <a:sym typeface="Arial"/>
         </a:defRPr>
       </a:lvl7pPr>
-      <a:lvl8pPr lvl="7" marR="0" rtl="0" algn="l">
+      <a:lvl8pPr marR="0" lvl="7" algn="l" rtl="0">
         <a:lnSpc>
           <a:spcPct val="100000"/>
         </a:lnSpc>
@@ -6475,7 +6660,7 @@
           <a:srgbClr val="000000"/>
         </a:buClr>
         <a:buFont typeface="Arial"/>
-        <a:defRPr b="0" i="0" spc="0" sz="1400" u="none" cap="none" strike="noStrike">
+        <a:defRPr sz="1400" b="0" i="0" u="none" strike="noStrike" cap="none" spc="0">
           <a:solidFill>
             <a:srgbClr val="000000"/>
           </a:solidFill>
@@ -6485,7 +6670,7 @@
           <a:sym typeface="Arial"/>
         </a:defRPr>
       </a:lvl8pPr>
-      <a:lvl9pPr lvl="8" marR="0" rtl="0" algn="l">
+      <a:lvl9pPr marR="0" lvl="8" algn="l" rtl="0">
         <a:lnSpc>
           <a:spcPct val="100000"/>
         </a:lnSpc>
@@ -6499,7 +6684,7 @@
           <a:srgbClr val="000000"/>
         </a:buClr>
         <a:buFont typeface="Arial"/>
-        <a:defRPr b="0" i="0" spc="0" sz="1400" u="none" cap="none" strike="noStrike">
+        <a:defRPr sz="1400" b="0" i="0" u="none" strike="noStrike" cap="none" spc="0">
           <a:solidFill>
             <a:srgbClr val="000000"/>
           </a:solidFill>
@@ -6511,7 +6696,7 @@
       </a:lvl9pPr>
     </p:bodyStyle>
     <p:otherStyle>
-      <a:defPPr lvl="0" marR="0" rtl="0" algn="l">
+      <a:defPPr marR="0" lvl="0" algn="l" rtl="0">
         <a:lnSpc>
           <a:spcPct val="100000"/>
         </a:lnSpc>
@@ -6522,7 +6707,7 @@
           <a:spcPts val="0"/>
         </a:spcAft>
       </a:defPPr>
-      <a:lvl1pPr lvl="0" marR="0" rtl="0" algn="l">
+      <a:lvl1pPr marR="0" lvl="0" algn="l" rtl="0">
         <a:lnSpc>
           <a:spcPct val="100000"/>
         </a:lnSpc>
@@ -6536,7 +6721,7 @@
           <a:srgbClr val="000000"/>
         </a:buClr>
         <a:buFont typeface="Arial"/>
-        <a:defRPr b="0" i="0" spc="0" sz="1400" u="none" cap="none" strike="noStrike">
+        <a:defRPr sz="1400" b="0" i="0" u="none" strike="noStrike" cap="none" spc="0">
           <a:solidFill>
             <a:srgbClr val="000000"/>
           </a:solidFill>
@@ -6546,7 +6731,7 @@
           <a:sym typeface="Arial"/>
         </a:defRPr>
       </a:lvl1pPr>
-      <a:lvl2pPr lvl="1" marR="0" rtl="0" algn="l">
+      <a:lvl2pPr marR="0" lvl="1" algn="l" rtl="0">
         <a:lnSpc>
           <a:spcPct val="100000"/>
         </a:lnSpc>
@@ -6560,7 +6745,7 @@
           <a:srgbClr val="000000"/>
         </a:buClr>
         <a:buFont typeface="Arial"/>
-        <a:defRPr b="0" i="0" spc="0" sz="1400" u="none" cap="none" strike="noStrike">
+        <a:defRPr sz="1400" b="0" i="0" u="none" strike="noStrike" cap="none" spc="0">
           <a:solidFill>
             <a:srgbClr val="000000"/>
           </a:solidFill>
@@ -6570,7 +6755,7 @@
           <a:sym typeface="Arial"/>
         </a:defRPr>
       </a:lvl2pPr>
-      <a:lvl3pPr lvl="2" marR="0" rtl="0" algn="l">
+      <a:lvl3pPr marR="0" lvl="2" algn="l" rtl="0">
         <a:lnSpc>
           <a:spcPct val="100000"/>
         </a:lnSpc>
@@ -6584,7 +6769,7 @@
           <a:srgbClr val="000000"/>
         </a:buClr>
         <a:buFont typeface="Arial"/>
-        <a:defRPr b="0" i="0" spc="0" sz="1400" u="none" cap="none" strike="noStrike">
+        <a:defRPr sz="1400" b="0" i="0" u="none" strike="noStrike" cap="none" spc="0">
           <a:solidFill>
             <a:srgbClr val="000000"/>
           </a:solidFill>
@@ -6594,7 +6779,7 @@
           <a:sym typeface="Arial"/>
         </a:defRPr>
       </a:lvl3pPr>
-      <a:lvl4pPr lvl="3" marR="0" rtl="0" algn="l">
+      <a:lvl4pPr marR="0" lvl="3" algn="l" rtl="0">
         <a:lnSpc>
           <a:spcPct val="100000"/>
         </a:lnSpc>
@@ -6608,7 +6793,7 @@
           <a:srgbClr val="000000"/>
         </a:buClr>
         <a:buFont typeface="Arial"/>
-        <a:defRPr b="0" i="0" spc="0" sz="1400" u="none" cap="none" strike="noStrike">
+        <a:defRPr sz="1400" b="0" i="0" u="none" strike="noStrike" cap="none" spc="0">
           <a:solidFill>
             <a:srgbClr val="000000"/>
           </a:solidFill>
@@ -6618,7 +6803,7 @@
           <a:sym typeface="Arial"/>
         </a:defRPr>
       </a:lvl4pPr>
-      <a:lvl5pPr lvl="4" marR="0" rtl="0" algn="l">
+      <a:lvl5pPr marR="0" lvl="4" algn="l" rtl="0">
         <a:lnSpc>
           <a:spcPct val="100000"/>
         </a:lnSpc>
@@ -6632,7 +6817,7 @@
           <a:srgbClr val="000000"/>
         </a:buClr>
         <a:buFont typeface="Arial"/>
-        <a:defRPr b="0" i="0" spc="0" sz="1400" u="none" cap="none" strike="noStrike">
+        <a:defRPr sz="1400" b="0" i="0" u="none" strike="noStrike" cap="none" spc="0">
           <a:solidFill>
             <a:srgbClr val="000000"/>
           </a:solidFill>
@@ -6642,7 +6827,7 @@
           <a:sym typeface="Arial"/>
         </a:defRPr>
       </a:lvl5pPr>
-      <a:lvl6pPr lvl="5" marR="0" rtl="0" algn="l">
+      <a:lvl6pPr marR="0" lvl="5" algn="l" rtl="0">
         <a:lnSpc>
           <a:spcPct val="100000"/>
         </a:lnSpc>
@@ -6656,7 +6841,7 @@
           <a:srgbClr val="000000"/>
         </a:buClr>
         <a:buFont typeface="Arial"/>
-        <a:defRPr b="0" i="0" spc="0" sz="1400" u="none" cap="none" strike="noStrike">
+        <a:defRPr sz="1400" b="0" i="0" u="none" strike="noStrike" cap="none" spc="0">
           <a:solidFill>
             <a:srgbClr val="000000"/>
           </a:solidFill>
@@ -6666,7 +6851,7 @@
           <a:sym typeface="Arial"/>
         </a:defRPr>
       </a:lvl6pPr>
-      <a:lvl7pPr lvl="6" marR="0" rtl="0" algn="l">
+      <a:lvl7pPr marR="0" lvl="6" algn="l" rtl="0">
         <a:lnSpc>
           <a:spcPct val="100000"/>
         </a:lnSpc>
@@ -6680,7 +6865,7 @@
           <a:srgbClr val="000000"/>
         </a:buClr>
         <a:buFont typeface="Arial"/>
-        <a:defRPr b="0" i="0" spc="0" sz="1400" u="none" cap="none" strike="noStrike">
+        <a:defRPr sz="1400" b="0" i="0" u="none" strike="noStrike" cap="none" spc="0">
           <a:solidFill>
             <a:srgbClr val="000000"/>
           </a:solidFill>
@@ -6690,7 +6875,7 @@
           <a:sym typeface="Arial"/>
         </a:defRPr>
       </a:lvl7pPr>
-      <a:lvl8pPr lvl="7" marR="0" rtl="0" algn="l">
+      <a:lvl8pPr marR="0" lvl="7" algn="l" rtl="0">
         <a:lnSpc>
           <a:spcPct val="100000"/>
         </a:lnSpc>
@@ -6704,7 +6889,7 @@
           <a:srgbClr val="000000"/>
         </a:buClr>
         <a:buFont typeface="Arial"/>
-        <a:defRPr b="0" i="0" spc="0" sz="1400" u="none" cap="none" strike="noStrike">
+        <a:defRPr sz="1400" b="0" i="0" u="none" strike="noStrike" cap="none" spc="0">
           <a:solidFill>
             <a:srgbClr val="000000"/>
           </a:solidFill>
@@ -6714,7 +6899,7 @@
           <a:sym typeface="Arial"/>
         </a:defRPr>
       </a:lvl8pPr>
-      <a:lvl9pPr lvl="8" marR="0" rtl="0" algn="l">
+      <a:lvl9pPr marR="0" lvl="8" algn="l" rtl="0">
         <a:lnSpc>
           <a:spcPct val="100000"/>
         </a:lnSpc>
@@ -6728,7 +6913,7 @@
           <a:srgbClr val="000000"/>
         </a:buClr>
         <a:buFont typeface="Arial"/>
-        <a:defRPr b="0" i="0" spc="0" sz="1400" u="none" cap="none" strike="noStrike">
+        <a:defRPr sz="1400" b="0" i="0" u="none" strike="noStrike" cap="none" spc="0">
           <a:solidFill>
             <a:srgbClr val="000000"/>
           </a:solidFill>
@@ -6744,7 +6929,7 @@
 </file>
 
 <file path=ppt/slides/slide1.xml><?xml version="1.0" encoding="utf-8"?>
-<p:sld xmlns:a="http://schemas.openxmlformats.org/drawingml/2006/main" xmlns:r="http://schemas.openxmlformats.org/officeDocument/2006/relationships" xmlns:mc="http://schemas.openxmlformats.org/markup-compatibility/2006" xmlns:mv="urn:schemas-microsoft-com:mac:vml" xmlns:p="http://schemas.openxmlformats.org/presentationml/2006/main" xmlns:c="http://schemas.openxmlformats.org/drawingml/2006/chart" xmlns:dgm="http://schemas.openxmlformats.org/drawingml/2006/diagram" xmlns:o="urn:schemas-microsoft-com:office:office" xmlns:v="urn:schemas-microsoft-com:vml" xmlns:pvml="urn:schemas-microsoft-com:office:powerpoint" xmlns:com="http://schemas.openxmlformats.org/drawingml/2006/compatibility" xmlns:p14="http://schemas.microsoft.com/office/powerpoint/2010/main" xmlns:p15="http://schemas.microsoft.com/office/powerpoint/2012/main" xmlns:ahyp="http://schemas.microsoft.com/office/drawing/2018/hyperlinkcolor">
+<p:sld xmlns:a="http://schemas.openxmlformats.org/drawingml/2006/main" xmlns:r="http://schemas.openxmlformats.org/officeDocument/2006/relationships" xmlns:p="http://schemas.openxmlformats.org/presentationml/2006/main">
   <p:cSld>
     <p:bg>
       <p:bgPr>
@@ -6756,11 +6941,12 @@
             <a:fillRect/>
           </a:stretch>
         </a:blipFill>
+        <a:effectLst/>
       </p:bgPr>
     </p:bg>
     <p:spTree>
       <p:nvGrpSpPr>
-        <p:cNvPr id="53" name="Shape 53"/>
+        <p:cNvPr id="1" name="Shape 53"/>
         <p:cNvGrpSpPr/>
         <p:nvPr/>
       </p:nvGrpSpPr>
@@ -6792,12 +6978,12 @@
           </a:ln>
         </p:spPr>
         <p:txBody>
-          <a:bodyPr anchorCtr="0" anchor="t" bIns="91425" lIns="91425" spcFirstLastPara="1" rIns="91425" wrap="square" tIns="91425">
+          <a:bodyPr spcFirstLastPara="1" wrap="square" lIns="91425" tIns="91425" rIns="91425" bIns="91425" anchor="t" anchorCtr="0">
             <a:normAutofit/>
           </a:bodyPr>
           <a:lstStyle/>
           <a:p>
-            <a:pPr indent="0" lvl="0" marL="0" rtl="0" algn="l">
+            <a:pPr marL="0" lvl="0" indent="0" algn="l" rtl="0">
               <a:spcBef>
                 <a:spcPts val="0"/>
               </a:spcBef>
@@ -6807,7 +6993,7 @@
               <a:buNone/>
             </a:pPr>
             <a:r>
-              <a:rPr b="1" lang="en" sz="3200">
+              <a:rPr lang="en" sz="3200" b="1" dirty="0">
                 <a:solidFill>
                   <a:srgbClr val="000000"/>
                 </a:solidFill>
@@ -6816,9 +7002,9 @@
                 <a:cs typeface="Public Sans"/>
                 <a:sym typeface="Public Sans"/>
               </a:rPr>
-              <a:t>&lt;&lt;NOMBRE COMPLETO&gt;&gt;</a:t>
+              <a:t>&lt;&lt;f10001&gt;&gt;</a:t>
             </a:r>
-            <a:endParaRPr b="1" sz="3200">
+            <a:endParaRPr sz="3200" b="1" dirty="0">
               <a:solidFill>
                 <a:srgbClr val="000000"/>
               </a:solidFill>
@@ -6839,7 +7025,7 @@
 </file>
 
 <file path=ppt/slides/slide10.xml><?xml version="1.0" encoding="utf-8"?>
-<p:sld xmlns:a="http://schemas.openxmlformats.org/drawingml/2006/main" xmlns:r="http://schemas.openxmlformats.org/officeDocument/2006/relationships" xmlns:mc="http://schemas.openxmlformats.org/markup-compatibility/2006" xmlns:mv="urn:schemas-microsoft-com:mac:vml" xmlns:p="http://schemas.openxmlformats.org/presentationml/2006/main" xmlns:c="http://schemas.openxmlformats.org/drawingml/2006/chart" xmlns:dgm="http://schemas.openxmlformats.org/drawingml/2006/diagram" xmlns:o="urn:schemas-microsoft-com:office:office" xmlns:v="urn:schemas-microsoft-com:vml" xmlns:pvml="urn:schemas-microsoft-com:office:powerpoint" xmlns:com="http://schemas.openxmlformats.org/drawingml/2006/compatibility" xmlns:p14="http://schemas.microsoft.com/office/powerpoint/2010/main" xmlns:p15="http://schemas.microsoft.com/office/powerpoint/2012/main" xmlns:ahyp="http://schemas.microsoft.com/office/drawing/2018/hyperlinkcolor">
+<p:sld xmlns:a="http://schemas.openxmlformats.org/drawingml/2006/main" xmlns:r="http://schemas.openxmlformats.org/officeDocument/2006/relationships" xmlns:p="http://schemas.openxmlformats.org/presentationml/2006/main">
   <p:cSld>
     <p:bg>
       <p:bgPr>
@@ -6851,11 +7037,12 @@
             <a:fillRect/>
           </a:stretch>
         </a:blipFill>
+        <a:effectLst/>
       </p:bgPr>
     </p:bg>
     <p:spTree>
       <p:nvGrpSpPr>
-        <p:cNvPr id="96" name="Shape 96"/>
+        <p:cNvPr id="1" name="Shape 96"/>
         <p:cNvGrpSpPr/>
         <p:nvPr/>
       </p:nvGrpSpPr>
@@ -6887,12 +7074,12 @@
           </a:ln>
         </p:spPr>
         <p:txBody>
-          <a:bodyPr anchorCtr="0" anchor="t" bIns="91425" lIns="91425" spcFirstLastPara="1" rIns="91425" wrap="square" tIns="91425">
-            <a:normAutofit fontScale="92500" lnSpcReduction="20000"/>
+          <a:bodyPr spcFirstLastPara="1" wrap="square" lIns="91425" tIns="91425" rIns="91425" bIns="91425" anchor="t" anchorCtr="0">
+            <a:normAutofit/>
           </a:bodyPr>
           <a:lstStyle/>
           <a:p>
-            <a:pPr indent="0" lvl="0" marL="0" rtl="0" algn="l">
+            <a:pPr marL="0" lvl="0" indent="0" algn="l" rtl="0">
               <a:lnSpc>
                 <a:spcPct val="100000"/>
               </a:lnSpc>
@@ -6906,7 +7093,7 @@
               <a:buNone/>
             </a:pPr>
             <a:r>
-              <a:rPr lang="en" sz="2955">
+              <a:rPr lang="en" sz="2955" dirty="0">
                 <a:solidFill>
                   <a:schemeClr val="dk1"/>
                 </a:solidFill>
@@ -6915,9 +7102,9 @@
                 <a:cs typeface="Public Sans"/>
                 <a:sym typeface="Public Sans"/>
               </a:rPr>
-              <a:t>&lt;&lt;Estudios realizados. Comente brevemente su recorrido en el Sistema Educativo. Aclare si empezó y dejó inconclusa alguna carrera o estudio&gt;&gt;</a:t>
+              <a:t>&lt;&lt;f10008&gt;&gt;</a:t>
             </a:r>
-            <a:endParaRPr sz="2955">
+            <a:endParaRPr sz="2955" dirty="0">
               <a:solidFill>
                 <a:schemeClr val="dk1"/>
               </a:solidFill>
@@ -6928,7 +7115,7 @@
             </a:endParaRPr>
           </a:p>
           <a:p>
-            <a:pPr indent="0" lvl="0" marL="0" rtl="0" algn="l">
+            <a:pPr marL="0" lvl="0" indent="0" algn="l" rtl="0">
               <a:lnSpc>
                 <a:spcPct val="100000"/>
               </a:lnSpc>
@@ -6941,10 +7128,7 @@
               <a:buSzPct val="28849"/>
               <a:buNone/>
             </a:pPr>
-            <a:r>
-              <a:t/>
-            </a:r>
-            <a:endParaRPr sz="2955">
+            <a:endParaRPr sz="2955" dirty="0">
               <a:solidFill>
                 <a:schemeClr val="dk1"/>
               </a:solidFill>
@@ -6955,7 +7139,7 @@
             </a:endParaRPr>
           </a:p>
           <a:p>
-            <a:pPr indent="0" lvl="0" marL="0" rtl="0" algn="l">
+            <a:pPr marL="0" lvl="0" indent="0" algn="l" rtl="0">
               <a:lnSpc>
                 <a:spcPct val="100000"/>
               </a:lnSpc>
@@ -6968,10 +7152,7 @@
               <a:buSzPct val="35527"/>
               <a:buNone/>
             </a:pPr>
-            <a:r>
-              <a:t/>
-            </a:r>
-            <a:endParaRPr sz="2400">
+            <a:endParaRPr sz="2400" dirty="0">
               <a:solidFill>
                 <a:schemeClr val="dk1"/>
               </a:solidFill>
@@ -7003,12 +7184,12 @@
           </a:ln>
         </p:spPr>
         <p:txBody>
-          <a:bodyPr anchorCtr="0" anchor="t" bIns="91425" lIns="91425" spcFirstLastPara="1" rIns="91425" wrap="square" tIns="91425">
+          <a:bodyPr spcFirstLastPara="1" wrap="square" lIns="91425" tIns="91425" rIns="91425" bIns="91425" anchor="t" anchorCtr="0">
             <a:normAutofit/>
           </a:bodyPr>
           <a:lstStyle/>
           <a:p>
-            <a:pPr indent="0" lvl="0" marL="0" rtl="0" algn="l">
+            <a:pPr marL="0" lvl="0" indent="0" algn="l" rtl="0">
               <a:lnSpc>
                 <a:spcPct val="100000"/>
               </a:lnSpc>
@@ -7022,7 +7203,7 @@
               <a:buNone/>
             </a:pPr>
             <a:r>
-              <a:rPr lang="en" sz="2955">
+              <a:rPr lang="en" sz="2955" dirty="0">
                 <a:solidFill>
                   <a:schemeClr val="dk1"/>
                 </a:solidFill>
@@ -7031,9 +7212,9 @@
                 <a:cs typeface="Public Sans"/>
                 <a:sym typeface="Public Sans"/>
               </a:rPr>
-              <a:t>&lt;&lt;¿Cuál es su ocupación actual?&gt;&gt;</a:t>
+              <a:t>&lt;&lt;f10009&gt;&gt;</a:t>
             </a:r>
-            <a:endParaRPr sz="2955">
+            <a:endParaRPr sz="2955" dirty="0">
               <a:solidFill>
                 <a:schemeClr val="dk1"/>
               </a:solidFill>
@@ -7044,7 +7225,7 @@
             </a:endParaRPr>
           </a:p>
           <a:p>
-            <a:pPr indent="0" lvl="0" marL="0" rtl="0" algn="l">
+            <a:pPr marL="0" lvl="0" indent="0" algn="l" rtl="0">
               <a:lnSpc>
                 <a:spcPct val="100000"/>
               </a:lnSpc>
@@ -7057,10 +7238,7 @@
               <a:buSzPts val="853"/>
               <a:buNone/>
             </a:pPr>
-            <a:r>
-              <a:t/>
-            </a:r>
-            <a:endParaRPr sz="2955">
+            <a:endParaRPr sz="2955" dirty="0">
               <a:solidFill>
                 <a:schemeClr val="dk1"/>
               </a:solidFill>
@@ -7071,7 +7249,7 @@
             </a:endParaRPr>
           </a:p>
           <a:p>
-            <a:pPr indent="0" lvl="0" marL="0" rtl="0" algn="l">
+            <a:pPr marL="0" lvl="0" indent="0" algn="l" rtl="0">
               <a:lnSpc>
                 <a:spcPct val="100000"/>
               </a:lnSpc>
@@ -7084,10 +7262,7 @@
               <a:buSzPts val="853"/>
               <a:buNone/>
             </a:pPr>
-            <a:r>
-              <a:t/>
-            </a:r>
-            <a:endParaRPr sz="2955">
+            <a:endParaRPr sz="2955" dirty="0">
               <a:solidFill>
                 <a:schemeClr val="dk1"/>
               </a:solidFill>
@@ -7098,7 +7273,7 @@
             </a:endParaRPr>
           </a:p>
           <a:p>
-            <a:pPr indent="0" lvl="0" marL="0" rtl="0" algn="l">
+            <a:pPr marL="0" lvl="0" indent="0" algn="l" rtl="0">
               <a:lnSpc>
                 <a:spcPct val="100000"/>
               </a:lnSpc>
@@ -7111,10 +7286,7 @@
               <a:buSzPts val="853"/>
               <a:buNone/>
             </a:pPr>
-            <a:r>
-              <a:t/>
-            </a:r>
-            <a:endParaRPr sz="2400">
+            <a:endParaRPr sz="2400" dirty="0">
               <a:solidFill>
                 <a:schemeClr val="dk1"/>
               </a:solidFill>
@@ -7146,12 +7318,12 @@
           </a:ln>
         </p:spPr>
         <p:txBody>
-          <a:bodyPr anchorCtr="0" anchor="t" bIns="91425" lIns="91425" spcFirstLastPara="1" rIns="91425" wrap="square" tIns="91425">
+          <a:bodyPr spcFirstLastPara="1" wrap="square" lIns="91425" tIns="91425" rIns="91425" bIns="91425" anchor="t" anchorCtr="0">
             <a:normAutofit/>
           </a:bodyPr>
           <a:lstStyle/>
           <a:p>
-            <a:pPr indent="0" lvl="0" marL="0" rtl="0" algn="l">
+            <a:pPr marL="0" lvl="0" indent="0" algn="l" rtl="0">
               <a:lnSpc>
                 <a:spcPct val="100000"/>
               </a:lnSpc>
@@ -7165,7 +7337,7 @@
               <a:buNone/>
             </a:pPr>
             <a:r>
-              <a:rPr lang="en" sz="2955">
+              <a:rPr lang="en" sz="2955" dirty="0">
                 <a:solidFill>
                   <a:schemeClr val="dk1"/>
                 </a:solidFill>
@@ -7174,9 +7346,9 @@
                 <a:cs typeface="Public Sans"/>
                 <a:sym typeface="Public Sans"/>
               </a:rPr>
-              <a:t>&lt;&lt;¿Qué podría comentar de su profesión/ocupación?&gt;&gt;</a:t>
+              <a:t>&lt;&lt;f10010&gt;&gt;</a:t>
             </a:r>
-            <a:endParaRPr sz="2955">
+            <a:endParaRPr sz="2955" dirty="0">
               <a:solidFill>
                 <a:schemeClr val="dk1"/>
               </a:solidFill>
@@ -7187,7 +7359,7 @@
             </a:endParaRPr>
           </a:p>
           <a:p>
-            <a:pPr indent="0" lvl="0" marL="0" rtl="0" algn="l">
+            <a:pPr marL="0" lvl="0" indent="0" algn="l" rtl="0">
               <a:lnSpc>
                 <a:spcPct val="100000"/>
               </a:lnSpc>
@@ -7200,10 +7372,7 @@
               <a:buSzPts val="853"/>
               <a:buNone/>
             </a:pPr>
-            <a:r>
-              <a:t/>
-            </a:r>
-            <a:endParaRPr sz="2955">
+            <a:endParaRPr sz="2955" dirty="0">
               <a:solidFill>
                 <a:schemeClr val="dk1"/>
               </a:solidFill>
@@ -7214,7 +7383,7 @@
             </a:endParaRPr>
           </a:p>
           <a:p>
-            <a:pPr indent="0" lvl="0" marL="0" rtl="0" algn="l">
+            <a:pPr marL="0" lvl="0" indent="0" algn="l" rtl="0">
               <a:lnSpc>
                 <a:spcPct val="100000"/>
               </a:lnSpc>
@@ -7227,10 +7396,7 @@
               <a:buSzPts val="853"/>
               <a:buNone/>
             </a:pPr>
-            <a:r>
-              <a:t/>
-            </a:r>
-            <a:endParaRPr sz="2955">
+            <a:endParaRPr sz="2955" dirty="0">
               <a:solidFill>
                 <a:schemeClr val="dk1"/>
               </a:solidFill>
@@ -7241,7 +7407,7 @@
             </a:endParaRPr>
           </a:p>
           <a:p>
-            <a:pPr indent="0" lvl="0" marL="0" rtl="0" algn="l">
+            <a:pPr marL="0" lvl="0" indent="0" algn="l" rtl="0">
               <a:lnSpc>
                 <a:spcPct val="100000"/>
               </a:lnSpc>
@@ -7254,10 +7420,7 @@
               <a:buSzPts val="853"/>
               <a:buNone/>
             </a:pPr>
-            <a:r>
-              <a:t/>
-            </a:r>
-            <a:endParaRPr sz="2400">
+            <a:endParaRPr sz="2400" dirty="0">
               <a:solidFill>
                 <a:schemeClr val="dk1"/>
               </a:solidFill>
@@ -7278,7 +7441,7 @@
 </file>
 
 <file path=ppt/slides/slide11.xml><?xml version="1.0" encoding="utf-8"?>
-<p:sld xmlns:a="http://schemas.openxmlformats.org/drawingml/2006/main" xmlns:r="http://schemas.openxmlformats.org/officeDocument/2006/relationships" xmlns:mc="http://schemas.openxmlformats.org/markup-compatibility/2006" xmlns:mv="urn:schemas-microsoft-com:mac:vml" xmlns:p="http://schemas.openxmlformats.org/presentationml/2006/main" xmlns:c="http://schemas.openxmlformats.org/drawingml/2006/chart" xmlns:dgm="http://schemas.openxmlformats.org/drawingml/2006/diagram" xmlns:o="urn:schemas-microsoft-com:office:office" xmlns:v="urn:schemas-microsoft-com:vml" xmlns:pvml="urn:schemas-microsoft-com:office:powerpoint" xmlns:com="http://schemas.openxmlformats.org/drawingml/2006/compatibility" xmlns:p14="http://schemas.microsoft.com/office/powerpoint/2010/main" xmlns:p15="http://schemas.microsoft.com/office/powerpoint/2012/main" xmlns:ahyp="http://schemas.microsoft.com/office/drawing/2018/hyperlinkcolor">
+<p:sld xmlns:a="http://schemas.openxmlformats.org/drawingml/2006/main" xmlns:r="http://schemas.openxmlformats.org/officeDocument/2006/relationships" xmlns:p="http://schemas.openxmlformats.org/presentationml/2006/main">
   <p:cSld>
     <p:bg>
       <p:bgPr>
@@ -7290,11 +7453,12 @@
             <a:fillRect/>
           </a:stretch>
         </a:blipFill>
+        <a:effectLst/>
       </p:bgPr>
     </p:bg>
     <p:spTree>
       <p:nvGrpSpPr>
-        <p:cNvPr id="103" name="Shape 103"/>
+        <p:cNvPr id="1" name="Shape 103"/>
         <p:cNvGrpSpPr/>
         <p:nvPr/>
       </p:nvGrpSpPr>
@@ -7326,12 +7490,12 @@
           </a:ln>
         </p:spPr>
         <p:txBody>
-          <a:bodyPr anchorCtr="0" anchor="t" bIns="91425" lIns="91425" spcFirstLastPara="1" rIns="91425" wrap="square" tIns="91425">
+          <a:bodyPr spcFirstLastPara="1" wrap="square" lIns="91425" tIns="91425" rIns="91425" bIns="91425" anchor="t" anchorCtr="0">
             <a:normAutofit/>
           </a:bodyPr>
           <a:lstStyle/>
           <a:p>
-            <a:pPr indent="0" lvl="0" marL="0" rtl="0" algn="l">
+            <a:pPr marL="0" lvl="0" indent="0" algn="l" rtl="0">
               <a:lnSpc>
                 <a:spcPct val="100000"/>
               </a:lnSpc>
@@ -7345,7 +7509,7 @@
               <a:buNone/>
             </a:pPr>
             <a:r>
-              <a:rPr lang="en" sz="2955">
+              <a:rPr lang="en" sz="2955" dirty="0">
                 <a:solidFill>
                   <a:schemeClr val="dk1"/>
                 </a:solidFill>
@@ -7354,9 +7518,9 @@
                 <a:cs typeface="Public Sans"/>
                 <a:sym typeface="Public Sans"/>
               </a:rPr>
-              <a:t>&lt;&lt;¿Ha sido muy cambiante en sus actividades laborales?&gt;&gt;</a:t>
+              <a:t>&lt;&lt;f10011&gt;&gt;</a:t>
             </a:r>
-            <a:endParaRPr sz="2955">
+            <a:endParaRPr sz="2955" dirty="0">
               <a:solidFill>
                 <a:schemeClr val="dk1"/>
               </a:solidFill>
@@ -7367,7 +7531,7 @@
             </a:endParaRPr>
           </a:p>
           <a:p>
-            <a:pPr indent="0" lvl="0" marL="0" rtl="0" algn="l">
+            <a:pPr marL="0" lvl="0" indent="0" algn="l" rtl="0">
               <a:lnSpc>
                 <a:spcPct val="100000"/>
               </a:lnSpc>
@@ -7380,10 +7544,7 @@
               <a:buSzPts val="853"/>
               <a:buNone/>
             </a:pPr>
-            <a:r>
-              <a:t/>
-            </a:r>
-            <a:endParaRPr sz="2955">
+            <a:endParaRPr sz="2955" dirty="0">
               <a:solidFill>
                 <a:schemeClr val="dk1"/>
               </a:solidFill>
@@ -7394,7 +7555,7 @@
             </a:endParaRPr>
           </a:p>
           <a:p>
-            <a:pPr indent="0" lvl="0" marL="0" rtl="0" algn="l">
+            <a:pPr marL="0" lvl="0" indent="0" algn="l" rtl="0">
               <a:lnSpc>
                 <a:spcPct val="100000"/>
               </a:lnSpc>
@@ -7407,10 +7568,7 @@
               <a:buSzPts val="853"/>
               <a:buNone/>
             </a:pPr>
-            <a:r>
-              <a:t/>
-            </a:r>
-            <a:endParaRPr sz="2955">
+            <a:endParaRPr sz="2955" dirty="0">
               <a:solidFill>
                 <a:schemeClr val="dk1"/>
               </a:solidFill>
@@ -7421,7 +7579,7 @@
             </a:endParaRPr>
           </a:p>
           <a:p>
-            <a:pPr indent="0" lvl="0" marL="0" rtl="0" algn="l">
+            <a:pPr marL="0" lvl="0" indent="0" algn="l" rtl="0">
               <a:lnSpc>
                 <a:spcPct val="100000"/>
               </a:lnSpc>
@@ -7434,10 +7592,7 @@
               <a:buSzPts val="853"/>
               <a:buNone/>
             </a:pPr>
-            <a:r>
-              <a:t/>
-            </a:r>
-            <a:endParaRPr sz="2400">
+            <a:endParaRPr sz="2400" dirty="0">
               <a:solidFill>
                 <a:schemeClr val="dk1"/>
               </a:solidFill>
@@ -7469,12 +7624,12 @@
           </a:ln>
         </p:spPr>
         <p:txBody>
-          <a:bodyPr anchorCtr="0" anchor="t" bIns="91425" lIns="91425" spcFirstLastPara="1" rIns="91425" wrap="square" tIns="91425">
-            <a:normAutofit fontScale="77500" lnSpcReduction="10000"/>
+          <a:bodyPr spcFirstLastPara="1" wrap="square" lIns="91425" tIns="91425" rIns="91425" bIns="91425" anchor="t" anchorCtr="0">
+            <a:normAutofit/>
           </a:bodyPr>
           <a:lstStyle/>
           <a:p>
-            <a:pPr indent="0" lvl="0" marL="0" rtl="0" algn="l">
+            <a:pPr marL="0" lvl="0" indent="0" algn="l" rtl="0">
               <a:lnSpc>
                 <a:spcPct val="100000"/>
               </a:lnSpc>
@@ -7488,7 +7643,7 @@
               <a:buNone/>
             </a:pPr>
             <a:r>
-              <a:rPr lang="en" sz="2955">
+              <a:rPr lang="en" sz="2955" dirty="0">
                 <a:solidFill>
                   <a:schemeClr val="dk1"/>
                 </a:solidFill>
@@ -7497,9 +7652,9 @@
                 <a:cs typeface="Public Sans"/>
                 <a:sym typeface="Public Sans"/>
               </a:rPr>
-              <a:t>&lt;&lt;¿Hubiera deseado estudiar alguna carrera o emprender otra actividad diferente a la que se dedica?&gt;&gt;</a:t>
+              <a:t>&lt;&lt;f10012&gt;&gt;</a:t>
             </a:r>
-            <a:endParaRPr sz="2955">
+            <a:endParaRPr sz="2955" dirty="0">
               <a:solidFill>
                 <a:schemeClr val="dk1"/>
               </a:solidFill>
@@ -7510,7 +7665,7 @@
             </a:endParaRPr>
           </a:p>
           <a:p>
-            <a:pPr indent="0" lvl="0" marL="0" rtl="0" algn="l">
+            <a:pPr marL="0" lvl="0" indent="0" algn="l" rtl="0">
               <a:lnSpc>
                 <a:spcPct val="100000"/>
               </a:lnSpc>
@@ -7523,10 +7678,7 @@
               <a:buSzPct val="28849"/>
               <a:buNone/>
             </a:pPr>
-            <a:r>
-              <a:t/>
-            </a:r>
-            <a:endParaRPr sz="2955">
+            <a:endParaRPr sz="2955" dirty="0">
               <a:solidFill>
                 <a:schemeClr val="dk1"/>
               </a:solidFill>
@@ -7537,7 +7689,7 @@
             </a:endParaRPr>
           </a:p>
           <a:p>
-            <a:pPr indent="0" lvl="0" marL="0" rtl="0" algn="l">
+            <a:pPr marL="0" lvl="0" indent="0" algn="l" rtl="0">
               <a:lnSpc>
                 <a:spcPct val="100000"/>
               </a:lnSpc>
@@ -7550,10 +7702,7 @@
               <a:buSzPct val="28849"/>
               <a:buNone/>
             </a:pPr>
-            <a:r>
-              <a:t/>
-            </a:r>
-            <a:endParaRPr sz="2955">
+            <a:endParaRPr sz="2955" dirty="0">
               <a:solidFill>
                 <a:schemeClr val="dk1"/>
               </a:solidFill>
@@ -7564,7 +7713,7 @@
             </a:endParaRPr>
           </a:p>
           <a:p>
-            <a:pPr indent="0" lvl="0" marL="0" rtl="0" algn="l">
+            <a:pPr marL="0" lvl="0" indent="0" algn="l" rtl="0">
               <a:lnSpc>
                 <a:spcPct val="100000"/>
               </a:lnSpc>
@@ -7577,10 +7726,7 @@
               <a:buSzPct val="28849"/>
               <a:buNone/>
             </a:pPr>
-            <a:r>
-              <a:t/>
-            </a:r>
-            <a:endParaRPr sz="2955">
+            <a:endParaRPr sz="2955" dirty="0">
               <a:solidFill>
                 <a:schemeClr val="dk1"/>
               </a:solidFill>
@@ -7591,7 +7737,7 @@
             </a:endParaRPr>
           </a:p>
           <a:p>
-            <a:pPr indent="0" lvl="0" marL="0" rtl="0" algn="l">
+            <a:pPr marL="0" lvl="0" indent="0" algn="l" rtl="0">
               <a:lnSpc>
                 <a:spcPct val="100000"/>
               </a:lnSpc>
@@ -7604,10 +7750,7 @@
               <a:buSzPct val="35527"/>
               <a:buNone/>
             </a:pPr>
-            <a:r>
-              <a:t/>
-            </a:r>
-            <a:endParaRPr sz="2400">
+            <a:endParaRPr sz="2400" dirty="0">
               <a:solidFill>
                 <a:schemeClr val="dk1"/>
               </a:solidFill>
@@ -7639,12 +7782,12 @@
           </a:ln>
         </p:spPr>
         <p:txBody>
-          <a:bodyPr anchorCtr="0" anchor="t" bIns="91425" lIns="91425" spcFirstLastPara="1" rIns="91425" wrap="square" tIns="91425">
-            <a:normAutofit lnSpcReduction="20000"/>
+          <a:bodyPr spcFirstLastPara="1" wrap="square" lIns="91425" tIns="91425" rIns="91425" bIns="91425" anchor="t" anchorCtr="0">
+            <a:normAutofit/>
           </a:bodyPr>
           <a:lstStyle/>
           <a:p>
-            <a:pPr indent="0" lvl="0" marL="0" rtl="0" algn="l">
+            <a:pPr marL="0" lvl="0" indent="0" algn="l" rtl="0">
               <a:lnSpc>
                 <a:spcPct val="100000"/>
               </a:lnSpc>
@@ -7658,7 +7801,7 @@
               <a:buNone/>
             </a:pPr>
             <a:r>
-              <a:rPr lang="en" sz="2955">
+              <a:rPr lang="en" sz="2955" dirty="0">
                 <a:solidFill>
                   <a:schemeClr val="dk1"/>
                 </a:solidFill>
@@ -7667,9 +7810,9 @@
                 <a:cs typeface="Public Sans"/>
                 <a:sym typeface="Public Sans"/>
               </a:rPr>
-              <a:t>&lt;&lt;¿Cuáles son actualmente las profesiones y/u ocupaciones que usted valora más?&gt;&gt;</a:t>
+              <a:t>&lt;&lt;f10013&gt;&gt;</a:t>
             </a:r>
-            <a:endParaRPr sz="2955">
+            <a:endParaRPr sz="2955" dirty="0">
               <a:solidFill>
                 <a:schemeClr val="dk1"/>
               </a:solidFill>
@@ -7680,7 +7823,7 @@
             </a:endParaRPr>
           </a:p>
           <a:p>
-            <a:pPr indent="0" lvl="0" marL="0" rtl="0" algn="l">
+            <a:pPr marL="0" lvl="0" indent="0" algn="l" rtl="0">
               <a:lnSpc>
                 <a:spcPct val="100000"/>
               </a:lnSpc>
@@ -7693,10 +7836,7 @@
               <a:buSzPts val="853"/>
               <a:buNone/>
             </a:pPr>
-            <a:r>
-              <a:t/>
-            </a:r>
-            <a:endParaRPr sz="2955">
+            <a:endParaRPr sz="2955" dirty="0">
               <a:solidFill>
                 <a:schemeClr val="dk1"/>
               </a:solidFill>
@@ -7707,7 +7847,7 @@
             </a:endParaRPr>
           </a:p>
           <a:p>
-            <a:pPr indent="0" lvl="0" marL="0" rtl="0" algn="l">
+            <a:pPr marL="0" lvl="0" indent="0" algn="l" rtl="0">
               <a:lnSpc>
                 <a:spcPct val="100000"/>
               </a:lnSpc>
@@ -7720,10 +7860,7 @@
               <a:buSzPts val="853"/>
               <a:buNone/>
             </a:pPr>
-            <a:r>
-              <a:t/>
-            </a:r>
-            <a:endParaRPr sz="2955">
+            <a:endParaRPr sz="2955" dirty="0">
               <a:solidFill>
                 <a:schemeClr val="dk1"/>
               </a:solidFill>
@@ -7734,7 +7871,7 @@
             </a:endParaRPr>
           </a:p>
           <a:p>
-            <a:pPr indent="0" lvl="0" marL="0" rtl="0" algn="l">
+            <a:pPr marL="0" lvl="0" indent="0" algn="l" rtl="0">
               <a:lnSpc>
                 <a:spcPct val="100000"/>
               </a:lnSpc>
@@ -7747,10 +7884,7 @@
               <a:buSzPts val="853"/>
               <a:buNone/>
             </a:pPr>
-            <a:r>
-              <a:t/>
-            </a:r>
-            <a:endParaRPr sz="2955">
+            <a:endParaRPr sz="2955" dirty="0">
               <a:solidFill>
                 <a:schemeClr val="dk1"/>
               </a:solidFill>
@@ -7761,7 +7895,7 @@
             </a:endParaRPr>
           </a:p>
           <a:p>
-            <a:pPr indent="0" lvl="0" marL="0" rtl="0" algn="l">
+            <a:pPr marL="0" lvl="0" indent="0" algn="l" rtl="0">
               <a:lnSpc>
                 <a:spcPct val="100000"/>
               </a:lnSpc>
@@ -7774,10 +7908,7 @@
               <a:buSzPts val="853"/>
               <a:buNone/>
             </a:pPr>
-            <a:r>
-              <a:t/>
-            </a:r>
-            <a:endParaRPr sz="2400">
+            <a:endParaRPr sz="2400" dirty="0">
               <a:solidFill>
                 <a:schemeClr val="dk1"/>
               </a:solidFill>
@@ -7798,7 +7929,7 @@
 </file>
 
 <file path=ppt/slides/slide12.xml><?xml version="1.0" encoding="utf-8"?>
-<p:sld xmlns:a="http://schemas.openxmlformats.org/drawingml/2006/main" xmlns:r="http://schemas.openxmlformats.org/officeDocument/2006/relationships" xmlns:mc="http://schemas.openxmlformats.org/markup-compatibility/2006" xmlns:mv="urn:schemas-microsoft-com:mac:vml" xmlns:p="http://schemas.openxmlformats.org/presentationml/2006/main" xmlns:c="http://schemas.openxmlformats.org/drawingml/2006/chart" xmlns:dgm="http://schemas.openxmlformats.org/drawingml/2006/diagram" xmlns:o="urn:schemas-microsoft-com:office:office" xmlns:v="urn:schemas-microsoft-com:vml" xmlns:pvml="urn:schemas-microsoft-com:office:powerpoint" xmlns:com="http://schemas.openxmlformats.org/drawingml/2006/compatibility" xmlns:p14="http://schemas.microsoft.com/office/powerpoint/2010/main" xmlns:p15="http://schemas.microsoft.com/office/powerpoint/2012/main" xmlns:ahyp="http://schemas.microsoft.com/office/drawing/2018/hyperlinkcolor">
+<p:sld xmlns:a="http://schemas.openxmlformats.org/drawingml/2006/main" xmlns:r="http://schemas.openxmlformats.org/officeDocument/2006/relationships" xmlns:p="http://schemas.openxmlformats.org/presentationml/2006/main">
   <p:cSld>
     <p:bg>
       <p:bgPr>
@@ -7810,11 +7941,12 @@
             <a:fillRect/>
           </a:stretch>
         </a:blipFill>
+        <a:effectLst/>
       </p:bgPr>
     </p:bg>
     <p:spTree>
       <p:nvGrpSpPr>
-        <p:cNvPr id="110" name="Shape 110"/>
+        <p:cNvPr id="1" name="Shape 110"/>
         <p:cNvGrpSpPr/>
         <p:nvPr/>
       </p:nvGrpSpPr>
@@ -7846,12 +7978,12 @@
           </a:ln>
         </p:spPr>
         <p:txBody>
-          <a:bodyPr anchorCtr="0" anchor="t" bIns="91425" lIns="91425" spcFirstLastPara="1" rIns="91425" wrap="square" tIns="91425">
+          <a:bodyPr spcFirstLastPara="1" wrap="square" lIns="91425" tIns="91425" rIns="91425" bIns="91425" anchor="t" anchorCtr="0">
             <a:normAutofit/>
           </a:bodyPr>
           <a:lstStyle/>
           <a:p>
-            <a:pPr indent="0" lvl="0" marL="0" rtl="0" algn="l">
+            <a:pPr marL="0" lvl="0" indent="0" algn="l" rtl="0">
               <a:lnSpc>
                 <a:spcPct val="100000"/>
               </a:lnSpc>
@@ -7865,7 +7997,7 @@
               <a:buNone/>
             </a:pPr>
             <a:r>
-              <a:rPr lang="en" sz="2955">
+              <a:rPr lang="en" sz="2955" dirty="0">
                 <a:solidFill>
                   <a:schemeClr val="dk1"/>
                 </a:solidFill>
@@ -7874,9 +8006,9 @@
                 <a:cs typeface="Public Sans"/>
                 <a:sym typeface="Public Sans"/>
               </a:rPr>
-              <a:t>&lt;&lt;¿Desea que su hijo/a siga estudiando?&gt;&gt;</a:t>
+              <a:t>&lt;&lt;f10014&gt;&gt;</a:t>
             </a:r>
-            <a:endParaRPr sz="2955">
+            <a:endParaRPr sz="2955" dirty="0">
               <a:solidFill>
                 <a:schemeClr val="dk1"/>
               </a:solidFill>
@@ -7887,7 +8019,7 @@
             </a:endParaRPr>
           </a:p>
           <a:p>
-            <a:pPr indent="0" lvl="0" marL="0" rtl="0" algn="l">
+            <a:pPr marL="0" lvl="0" indent="0" algn="l" rtl="0">
               <a:lnSpc>
                 <a:spcPct val="100000"/>
               </a:lnSpc>
@@ -7900,10 +8032,7 @@
               <a:buSzPts val="853"/>
               <a:buNone/>
             </a:pPr>
-            <a:r>
-              <a:t/>
-            </a:r>
-            <a:endParaRPr sz="2955">
+            <a:endParaRPr sz="2955" dirty="0">
               <a:solidFill>
                 <a:schemeClr val="dk1"/>
               </a:solidFill>
@@ -7914,7 +8043,7 @@
             </a:endParaRPr>
           </a:p>
           <a:p>
-            <a:pPr indent="0" lvl="0" marL="0" rtl="0" algn="l">
+            <a:pPr marL="0" lvl="0" indent="0" algn="l" rtl="0">
               <a:lnSpc>
                 <a:spcPct val="100000"/>
               </a:lnSpc>
@@ -7927,10 +8056,7 @@
               <a:buSzPts val="853"/>
               <a:buNone/>
             </a:pPr>
-            <a:r>
-              <a:t/>
-            </a:r>
-            <a:endParaRPr sz="2955">
+            <a:endParaRPr sz="2955" dirty="0">
               <a:solidFill>
                 <a:schemeClr val="dk1"/>
               </a:solidFill>
@@ -7941,7 +8067,7 @@
             </a:endParaRPr>
           </a:p>
           <a:p>
-            <a:pPr indent="0" lvl="0" marL="0" rtl="0" algn="l">
+            <a:pPr marL="0" lvl="0" indent="0" algn="l" rtl="0">
               <a:lnSpc>
                 <a:spcPct val="100000"/>
               </a:lnSpc>
@@ -7954,10 +8080,7 @@
               <a:buSzPts val="853"/>
               <a:buNone/>
             </a:pPr>
-            <a:r>
-              <a:t/>
-            </a:r>
-            <a:endParaRPr sz="2955">
+            <a:endParaRPr sz="2955" dirty="0">
               <a:solidFill>
                 <a:schemeClr val="dk1"/>
               </a:solidFill>
@@ -7968,7 +8091,7 @@
             </a:endParaRPr>
           </a:p>
           <a:p>
-            <a:pPr indent="0" lvl="0" marL="0" rtl="0" algn="l">
+            <a:pPr marL="0" lvl="0" indent="0" algn="l" rtl="0">
               <a:lnSpc>
                 <a:spcPct val="100000"/>
               </a:lnSpc>
@@ -7981,10 +8104,7 @@
               <a:buSzPts val="853"/>
               <a:buNone/>
             </a:pPr>
-            <a:r>
-              <a:t/>
-            </a:r>
-            <a:endParaRPr sz="2400">
+            <a:endParaRPr sz="2400" dirty="0">
               <a:solidFill>
                 <a:schemeClr val="dk1"/>
               </a:solidFill>
@@ -8016,12 +8136,12 @@
           </a:ln>
         </p:spPr>
         <p:txBody>
-          <a:bodyPr anchorCtr="0" anchor="t" bIns="91425" lIns="91425" spcFirstLastPara="1" rIns="91425" wrap="square" tIns="91425">
-            <a:normAutofit lnSpcReduction="20000"/>
+          <a:bodyPr spcFirstLastPara="1" wrap="square" lIns="91425" tIns="91425" rIns="91425" bIns="91425" anchor="t" anchorCtr="0">
+            <a:normAutofit/>
           </a:bodyPr>
           <a:lstStyle/>
           <a:p>
-            <a:pPr indent="0" lvl="0" marL="0" rtl="0" algn="l">
+            <a:pPr marL="0" lvl="0" indent="0" algn="l" rtl="0">
               <a:lnSpc>
                 <a:spcPct val="100000"/>
               </a:lnSpc>
@@ -8035,7 +8155,7 @@
               <a:buNone/>
             </a:pPr>
             <a:r>
-              <a:rPr lang="en" sz="2955">
+              <a:rPr lang="en" sz="2955" dirty="0">
                 <a:solidFill>
                   <a:schemeClr val="dk1"/>
                 </a:solidFill>
@@ -8044,9 +8164,9 @@
                 <a:cs typeface="Public Sans"/>
                 <a:sym typeface="Public Sans"/>
               </a:rPr>
-              <a:t>&lt;&lt;¿Está usted interesado/a en que el estudio que elija su hijo/a le permita obtener beneficios económicos rápidamente?&gt;&gt;</a:t>
+              <a:t>&lt;&lt;f10015&gt;&gt;</a:t>
             </a:r>
-            <a:endParaRPr sz="2955">
+            <a:endParaRPr sz="2955" dirty="0">
               <a:solidFill>
                 <a:schemeClr val="dk1"/>
               </a:solidFill>
@@ -8057,7 +8177,7 @@
             </a:endParaRPr>
           </a:p>
           <a:p>
-            <a:pPr indent="0" lvl="0" marL="0" rtl="0" algn="l">
+            <a:pPr marL="0" lvl="0" indent="0" algn="l" rtl="0">
               <a:lnSpc>
                 <a:spcPct val="100000"/>
               </a:lnSpc>
@@ -8070,10 +8190,7 @@
               <a:buSzPts val="853"/>
               <a:buNone/>
             </a:pPr>
-            <a:r>
-              <a:t/>
-            </a:r>
-            <a:endParaRPr sz="2955">
+            <a:endParaRPr sz="2955" dirty="0">
               <a:solidFill>
                 <a:schemeClr val="dk1"/>
               </a:solidFill>
@@ -8084,7 +8201,7 @@
             </a:endParaRPr>
           </a:p>
           <a:p>
-            <a:pPr indent="0" lvl="0" marL="0" rtl="0" algn="l">
+            <a:pPr marL="0" lvl="0" indent="0" algn="l" rtl="0">
               <a:lnSpc>
                 <a:spcPct val="100000"/>
               </a:lnSpc>
@@ -8097,10 +8214,7 @@
               <a:buSzPts val="853"/>
               <a:buNone/>
             </a:pPr>
-            <a:r>
-              <a:t/>
-            </a:r>
-            <a:endParaRPr sz="2955">
+            <a:endParaRPr sz="2955" dirty="0">
               <a:solidFill>
                 <a:schemeClr val="dk1"/>
               </a:solidFill>
@@ -8111,7 +8225,7 @@
             </a:endParaRPr>
           </a:p>
           <a:p>
-            <a:pPr indent="0" lvl="0" marL="0" rtl="0" algn="l">
+            <a:pPr marL="0" lvl="0" indent="0" algn="l" rtl="0">
               <a:lnSpc>
                 <a:spcPct val="100000"/>
               </a:lnSpc>
@@ -8124,10 +8238,7 @@
               <a:buSzPts val="853"/>
               <a:buNone/>
             </a:pPr>
-            <a:r>
-              <a:t/>
-            </a:r>
-            <a:endParaRPr sz="2955">
+            <a:endParaRPr sz="2955" dirty="0">
               <a:solidFill>
                 <a:schemeClr val="dk1"/>
               </a:solidFill>
@@ -8138,7 +8249,7 @@
             </a:endParaRPr>
           </a:p>
           <a:p>
-            <a:pPr indent="0" lvl="0" marL="0" rtl="0" algn="l">
+            <a:pPr marL="0" lvl="0" indent="0" algn="l" rtl="0">
               <a:lnSpc>
                 <a:spcPct val="100000"/>
               </a:lnSpc>
@@ -8151,10 +8262,7 @@
               <a:buSzPts val="853"/>
               <a:buNone/>
             </a:pPr>
-            <a:r>
-              <a:t/>
-            </a:r>
-            <a:endParaRPr sz="2955">
+            <a:endParaRPr sz="2955" dirty="0">
               <a:solidFill>
                 <a:schemeClr val="dk1"/>
               </a:solidFill>
@@ -8165,7 +8273,7 @@
             </a:endParaRPr>
           </a:p>
           <a:p>
-            <a:pPr indent="0" lvl="0" marL="0" rtl="0" algn="l">
+            <a:pPr marL="0" lvl="0" indent="0" algn="l" rtl="0">
               <a:lnSpc>
                 <a:spcPct val="100000"/>
               </a:lnSpc>
@@ -8178,10 +8286,7 @@
               <a:buSzPts val="853"/>
               <a:buNone/>
             </a:pPr>
-            <a:r>
-              <a:t/>
-            </a:r>
-            <a:endParaRPr sz="2400">
+            <a:endParaRPr sz="2400" dirty="0">
               <a:solidFill>
                 <a:schemeClr val="dk1"/>
               </a:solidFill>
@@ -8213,12 +8318,12 @@
           </a:ln>
         </p:spPr>
         <p:txBody>
-          <a:bodyPr anchorCtr="0" anchor="t" bIns="91425" lIns="91425" spcFirstLastPara="1" rIns="91425" wrap="square" tIns="91425">
-            <a:normAutofit fontScale="85000" lnSpcReduction="10000"/>
+          <a:bodyPr spcFirstLastPara="1" wrap="square" lIns="91425" tIns="91425" rIns="91425" bIns="91425" anchor="t" anchorCtr="0">
+            <a:normAutofit/>
           </a:bodyPr>
           <a:lstStyle/>
           <a:p>
-            <a:pPr indent="0" lvl="0" marL="0" rtl="0" algn="l">
+            <a:pPr marL="0" lvl="0" indent="0" algn="l" rtl="0">
               <a:lnSpc>
                 <a:spcPct val="100000"/>
               </a:lnSpc>
@@ -8232,7 +8337,7 @@
               <a:buNone/>
             </a:pPr>
             <a:r>
-              <a:rPr lang="en" sz="2955">
+              <a:rPr lang="en" sz="2955" dirty="0">
                 <a:solidFill>
                   <a:schemeClr val="dk1"/>
                 </a:solidFill>
@@ -8241,9 +8346,9 @@
                 <a:cs typeface="Public Sans"/>
                 <a:sym typeface="Public Sans"/>
               </a:rPr>
-              <a:t>&lt;&lt;¿Hay en la familia alguna profesión, comercio, empresa que requiera que algún hijo/a la continúe?&gt;&gt;</a:t>
+              <a:t>&lt;&lt;f10016&gt;&gt;</a:t>
             </a:r>
-            <a:endParaRPr sz="2955">
+            <a:endParaRPr sz="2955" dirty="0">
               <a:solidFill>
                 <a:schemeClr val="dk1"/>
               </a:solidFill>
@@ -8254,7 +8359,7 @@
             </a:endParaRPr>
           </a:p>
           <a:p>
-            <a:pPr indent="0" lvl="0" marL="0" rtl="0" algn="l">
+            <a:pPr marL="0" lvl="0" indent="0" algn="l" rtl="0">
               <a:lnSpc>
                 <a:spcPct val="100000"/>
               </a:lnSpc>
@@ -8267,10 +8372,7 @@
               <a:buSzPct val="28849"/>
               <a:buNone/>
             </a:pPr>
-            <a:r>
-              <a:t/>
-            </a:r>
-            <a:endParaRPr sz="2955">
+            <a:endParaRPr sz="2955" dirty="0">
               <a:solidFill>
                 <a:schemeClr val="dk1"/>
               </a:solidFill>
@@ -8281,7 +8383,7 @@
             </a:endParaRPr>
           </a:p>
           <a:p>
-            <a:pPr indent="0" lvl="0" marL="0" rtl="0" algn="l">
+            <a:pPr marL="0" lvl="0" indent="0" algn="l" rtl="0">
               <a:lnSpc>
                 <a:spcPct val="100000"/>
               </a:lnSpc>
@@ -8294,10 +8396,7 @@
               <a:buSzPct val="28849"/>
               <a:buNone/>
             </a:pPr>
-            <a:r>
-              <a:t/>
-            </a:r>
-            <a:endParaRPr sz="2955">
+            <a:endParaRPr sz="2955" dirty="0">
               <a:solidFill>
                 <a:schemeClr val="dk1"/>
               </a:solidFill>
@@ -8308,7 +8407,7 @@
             </a:endParaRPr>
           </a:p>
           <a:p>
-            <a:pPr indent="0" lvl="0" marL="0" rtl="0" algn="l">
+            <a:pPr marL="0" lvl="0" indent="0" algn="l" rtl="0">
               <a:lnSpc>
                 <a:spcPct val="100000"/>
               </a:lnSpc>
@@ -8321,10 +8420,7 @@
               <a:buSzPct val="28849"/>
               <a:buNone/>
             </a:pPr>
-            <a:r>
-              <a:t/>
-            </a:r>
-            <a:endParaRPr sz="2955">
+            <a:endParaRPr sz="2955" dirty="0">
               <a:solidFill>
                 <a:schemeClr val="dk1"/>
               </a:solidFill>
@@ -8335,7 +8431,7 @@
             </a:endParaRPr>
           </a:p>
           <a:p>
-            <a:pPr indent="0" lvl="0" marL="0" rtl="0" algn="l">
+            <a:pPr marL="0" lvl="0" indent="0" algn="l" rtl="0">
               <a:lnSpc>
                 <a:spcPct val="100000"/>
               </a:lnSpc>
@@ -8348,10 +8444,7 @@
               <a:buSzPct val="28849"/>
               <a:buNone/>
             </a:pPr>
-            <a:r>
-              <a:t/>
-            </a:r>
-            <a:endParaRPr sz="2955">
+            <a:endParaRPr sz="2955" dirty="0">
               <a:solidFill>
                 <a:schemeClr val="dk1"/>
               </a:solidFill>
@@ -8362,7 +8455,7 @@
             </a:endParaRPr>
           </a:p>
           <a:p>
-            <a:pPr indent="0" lvl="0" marL="0" rtl="0" algn="l">
+            <a:pPr marL="0" lvl="0" indent="0" algn="l" rtl="0">
               <a:lnSpc>
                 <a:spcPct val="100000"/>
               </a:lnSpc>
@@ -8375,10 +8468,7 @@
               <a:buSzPct val="35527"/>
               <a:buNone/>
             </a:pPr>
-            <a:r>
-              <a:t/>
-            </a:r>
-            <a:endParaRPr sz="2400">
+            <a:endParaRPr sz="2400" dirty="0">
               <a:solidFill>
                 <a:schemeClr val="dk1"/>
               </a:solidFill>
@@ -8399,7 +8489,7 @@
 </file>
 
 <file path=ppt/slides/slide13.xml><?xml version="1.0" encoding="utf-8"?>
-<p:sld xmlns:a="http://schemas.openxmlformats.org/drawingml/2006/main" xmlns:r="http://schemas.openxmlformats.org/officeDocument/2006/relationships" xmlns:mc="http://schemas.openxmlformats.org/markup-compatibility/2006" xmlns:mv="urn:schemas-microsoft-com:mac:vml" xmlns:p="http://schemas.openxmlformats.org/presentationml/2006/main" xmlns:c="http://schemas.openxmlformats.org/drawingml/2006/chart" xmlns:dgm="http://schemas.openxmlformats.org/drawingml/2006/diagram" xmlns:o="urn:schemas-microsoft-com:office:office" xmlns:v="urn:schemas-microsoft-com:vml" xmlns:pvml="urn:schemas-microsoft-com:office:powerpoint" xmlns:com="http://schemas.openxmlformats.org/drawingml/2006/compatibility" xmlns:p14="http://schemas.microsoft.com/office/powerpoint/2010/main" xmlns:p15="http://schemas.microsoft.com/office/powerpoint/2012/main" xmlns:ahyp="http://schemas.microsoft.com/office/drawing/2018/hyperlinkcolor">
+<p:sld xmlns:a="http://schemas.openxmlformats.org/drawingml/2006/main" xmlns:r="http://schemas.openxmlformats.org/officeDocument/2006/relationships" xmlns:p="http://schemas.openxmlformats.org/presentationml/2006/main">
   <p:cSld>
     <p:bg>
       <p:bgPr>
@@ -8411,11 +8501,12 @@
             <a:fillRect/>
           </a:stretch>
         </a:blipFill>
+        <a:effectLst/>
       </p:bgPr>
     </p:bg>
     <p:spTree>
       <p:nvGrpSpPr>
-        <p:cNvPr id="117" name="Shape 117"/>
+        <p:cNvPr id="1" name="Shape 117"/>
         <p:cNvGrpSpPr/>
         <p:nvPr/>
       </p:nvGrpSpPr>
@@ -8447,12 +8538,12 @@
           </a:ln>
         </p:spPr>
         <p:txBody>
-          <a:bodyPr anchorCtr="0" anchor="t" bIns="91425" lIns="91425" spcFirstLastPara="1" rIns="91425" wrap="square" tIns="91425">
+          <a:bodyPr spcFirstLastPara="1" wrap="square" lIns="91425" tIns="91425" rIns="91425" bIns="91425" anchor="t" anchorCtr="0">
             <a:normAutofit/>
           </a:bodyPr>
           <a:lstStyle/>
           <a:p>
-            <a:pPr indent="0" lvl="0" marL="0" rtl="0" algn="l">
+            <a:pPr marL="0" lvl="0" indent="0" algn="l" rtl="0">
               <a:lnSpc>
                 <a:spcPct val="100000"/>
               </a:lnSpc>
@@ -8466,7 +8557,7 @@
               <a:buNone/>
             </a:pPr>
             <a:r>
-              <a:rPr lang="en" sz="2955">
+              <a:rPr lang="en" sz="2955" dirty="0">
                 <a:solidFill>
                   <a:schemeClr val="dk1"/>
                 </a:solidFill>
@@ -8475,9 +8566,9 @@
                 <a:cs typeface="Public Sans"/>
                 <a:sym typeface="Public Sans"/>
               </a:rPr>
-              <a:t>&lt;&lt;¿Hay alguna carrera, ocupación o profesión que a usted le gustaría que hiciera?&gt;&gt;</a:t>
+              <a:t>&lt;&lt;f10017&gt;&gt;</a:t>
             </a:r>
-            <a:endParaRPr sz="2955">
+            <a:endParaRPr sz="2955" dirty="0">
               <a:solidFill>
                 <a:schemeClr val="dk1"/>
               </a:solidFill>
@@ -8488,7 +8579,7 @@
             </a:endParaRPr>
           </a:p>
           <a:p>
-            <a:pPr indent="0" lvl="0" marL="0" rtl="0" algn="l">
+            <a:pPr marL="0" lvl="0" indent="0" algn="l" rtl="0">
               <a:lnSpc>
                 <a:spcPct val="100000"/>
               </a:lnSpc>
@@ -8501,10 +8592,7 @@
               <a:buSzPts val="853"/>
               <a:buNone/>
             </a:pPr>
-            <a:r>
-              <a:t/>
-            </a:r>
-            <a:endParaRPr sz="2955">
+            <a:endParaRPr sz="2955" dirty="0">
               <a:solidFill>
                 <a:schemeClr val="dk1"/>
               </a:solidFill>
@@ -8515,7 +8603,7 @@
             </a:endParaRPr>
           </a:p>
           <a:p>
-            <a:pPr indent="0" lvl="0" marL="0" rtl="0" algn="l">
+            <a:pPr marL="0" lvl="0" indent="0" algn="l" rtl="0">
               <a:lnSpc>
                 <a:spcPct val="100000"/>
               </a:lnSpc>
@@ -8528,10 +8616,7 @@
               <a:buSzPts val="853"/>
               <a:buNone/>
             </a:pPr>
-            <a:r>
-              <a:t/>
-            </a:r>
-            <a:endParaRPr sz="2955">
+            <a:endParaRPr sz="2955" dirty="0">
               <a:solidFill>
                 <a:schemeClr val="dk1"/>
               </a:solidFill>
@@ -8542,7 +8627,7 @@
             </a:endParaRPr>
           </a:p>
           <a:p>
-            <a:pPr indent="0" lvl="0" marL="0" rtl="0" algn="l">
+            <a:pPr marL="0" lvl="0" indent="0" algn="l" rtl="0">
               <a:lnSpc>
                 <a:spcPct val="100000"/>
               </a:lnSpc>
@@ -8555,10 +8640,7 @@
               <a:buSzPts val="853"/>
               <a:buNone/>
             </a:pPr>
-            <a:r>
-              <a:t/>
-            </a:r>
-            <a:endParaRPr sz="2955">
+            <a:endParaRPr sz="2955" dirty="0">
               <a:solidFill>
                 <a:schemeClr val="dk1"/>
               </a:solidFill>
@@ -8569,7 +8651,7 @@
             </a:endParaRPr>
           </a:p>
           <a:p>
-            <a:pPr indent="0" lvl="0" marL="0" rtl="0" algn="l">
+            <a:pPr marL="0" lvl="0" indent="0" algn="l" rtl="0">
               <a:lnSpc>
                 <a:spcPct val="100000"/>
               </a:lnSpc>
@@ -8582,10 +8664,7 @@
               <a:buSzPts val="853"/>
               <a:buNone/>
             </a:pPr>
-            <a:r>
-              <a:t/>
-            </a:r>
-            <a:endParaRPr sz="2955">
+            <a:endParaRPr sz="2955" dirty="0">
               <a:solidFill>
                 <a:schemeClr val="dk1"/>
               </a:solidFill>
@@ -8596,7 +8675,7 @@
             </a:endParaRPr>
           </a:p>
           <a:p>
-            <a:pPr indent="0" lvl="0" marL="0" rtl="0" algn="l">
+            <a:pPr marL="0" lvl="0" indent="0" algn="l" rtl="0">
               <a:lnSpc>
                 <a:spcPct val="100000"/>
               </a:lnSpc>
@@ -8609,10 +8688,7 @@
               <a:buSzPts val="853"/>
               <a:buNone/>
             </a:pPr>
-            <a:r>
-              <a:t/>
-            </a:r>
-            <a:endParaRPr sz="2400">
+            <a:endParaRPr sz="2400" dirty="0">
               <a:solidFill>
                 <a:schemeClr val="dk1"/>
               </a:solidFill>
@@ -8644,12 +8720,12 @@
           </a:ln>
         </p:spPr>
         <p:txBody>
-          <a:bodyPr anchorCtr="0" anchor="t" bIns="91425" lIns="91425" spcFirstLastPara="1" rIns="91425" wrap="square" tIns="91425">
-            <a:normAutofit fontScale="92500" lnSpcReduction="10000"/>
+          <a:bodyPr spcFirstLastPara="1" wrap="square" lIns="91425" tIns="91425" rIns="91425" bIns="91425" anchor="t" anchorCtr="0">
+            <a:normAutofit/>
           </a:bodyPr>
           <a:lstStyle/>
           <a:p>
-            <a:pPr indent="0" lvl="0" marL="0" rtl="0" algn="l">
+            <a:pPr marL="0" lvl="0" indent="0" algn="l" rtl="0">
               <a:lnSpc>
                 <a:spcPct val="100000"/>
               </a:lnSpc>
@@ -8663,7 +8739,7 @@
               <a:buNone/>
             </a:pPr>
             <a:r>
-              <a:rPr lang="en" sz="2955">
+              <a:rPr lang="en" sz="2955" dirty="0">
                 <a:solidFill>
                   <a:schemeClr val="dk1"/>
                 </a:solidFill>
@@ -8672,9 +8748,9 @@
                 <a:cs typeface="Public Sans"/>
                 <a:sym typeface="Public Sans"/>
               </a:rPr>
-              <a:t>&lt;&lt;¿Cuál cree usted que es la carrera, ocupación o profesión que su hijo/a prefiere? ¿Por qué?&gt;&gt;</a:t>
+              <a:t>&lt;&lt;f10018&gt;&gt;</a:t>
             </a:r>
-            <a:endParaRPr sz="2955">
+            <a:endParaRPr sz="2955" dirty="0">
               <a:solidFill>
                 <a:schemeClr val="dk1"/>
               </a:solidFill>
@@ -8685,7 +8761,7 @@
             </a:endParaRPr>
           </a:p>
           <a:p>
-            <a:pPr indent="0" lvl="0" marL="0" rtl="0" algn="l">
+            <a:pPr marL="0" lvl="0" indent="0" algn="l" rtl="0">
               <a:lnSpc>
                 <a:spcPct val="100000"/>
               </a:lnSpc>
@@ -8698,10 +8774,7 @@
               <a:buSzPct val="28849"/>
               <a:buNone/>
             </a:pPr>
-            <a:r>
-              <a:t/>
-            </a:r>
-            <a:endParaRPr sz="2955">
+            <a:endParaRPr sz="2955" dirty="0">
               <a:solidFill>
                 <a:schemeClr val="dk1"/>
               </a:solidFill>
@@ -8712,7 +8785,7 @@
             </a:endParaRPr>
           </a:p>
           <a:p>
-            <a:pPr indent="0" lvl="0" marL="0" rtl="0" algn="l">
+            <a:pPr marL="0" lvl="0" indent="0" algn="l" rtl="0">
               <a:lnSpc>
                 <a:spcPct val="100000"/>
               </a:lnSpc>
@@ -8725,10 +8798,7 @@
               <a:buSzPct val="28849"/>
               <a:buNone/>
             </a:pPr>
-            <a:r>
-              <a:t/>
-            </a:r>
-            <a:endParaRPr sz="2955">
+            <a:endParaRPr sz="2955" dirty="0">
               <a:solidFill>
                 <a:schemeClr val="dk1"/>
               </a:solidFill>
@@ -8739,7 +8809,7 @@
             </a:endParaRPr>
           </a:p>
           <a:p>
-            <a:pPr indent="0" lvl="0" marL="0" rtl="0" algn="l">
+            <a:pPr marL="0" lvl="0" indent="0" algn="l" rtl="0">
               <a:lnSpc>
                 <a:spcPct val="100000"/>
               </a:lnSpc>
@@ -8752,10 +8822,7 @@
               <a:buSzPct val="28849"/>
               <a:buNone/>
             </a:pPr>
-            <a:r>
-              <a:t/>
-            </a:r>
-            <a:endParaRPr sz="2955">
+            <a:endParaRPr sz="2955" dirty="0">
               <a:solidFill>
                 <a:schemeClr val="dk1"/>
               </a:solidFill>
@@ -8766,7 +8833,7 @@
             </a:endParaRPr>
           </a:p>
           <a:p>
-            <a:pPr indent="0" lvl="0" marL="0" rtl="0" algn="l">
+            <a:pPr marL="0" lvl="0" indent="0" algn="l" rtl="0">
               <a:lnSpc>
                 <a:spcPct val="100000"/>
               </a:lnSpc>
@@ -8779,10 +8846,7 @@
               <a:buSzPct val="28849"/>
               <a:buNone/>
             </a:pPr>
-            <a:r>
-              <a:t/>
-            </a:r>
-            <a:endParaRPr sz="2955">
+            <a:endParaRPr sz="2955" dirty="0">
               <a:solidFill>
                 <a:schemeClr val="dk1"/>
               </a:solidFill>
@@ -8793,7 +8857,7 @@
             </a:endParaRPr>
           </a:p>
           <a:p>
-            <a:pPr indent="0" lvl="0" marL="0" rtl="0" algn="l">
+            <a:pPr marL="0" lvl="0" indent="0" algn="l" rtl="0">
               <a:lnSpc>
                 <a:spcPct val="100000"/>
               </a:lnSpc>
@@ -8806,10 +8870,7 @@
               <a:buSzPct val="28849"/>
               <a:buNone/>
             </a:pPr>
-            <a:r>
-              <a:t/>
-            </a:r>
-            <a:endParaRPr sz="2955">
+            <a:endParaRPr sz="2955" dirty="0">
               <a:solidFill>
                 <a:schemeClr val="dk1"/>
               </a:solidFill>
@@ -8820,7 +8881,7 @@
             </a:endParaRPr>
           </a:p>
           <a:p>
-            <a:pPr indent="0" lvl="0" marL="0" rtl="0" algn="l">
+            <a:pPr marL="0" lvl="0" indent="0" algn="l" rtl="0">
               <a:lnSpc>
                 <a:spcPct val="100000"/>
               </a:lnSpc>
@@ -8833,10 +8894,7 @@
               <a:buSzPct val="35527"/>
               <a:buNone/>
             </a:pPr>
-            <a:r>
-              <a:t/>
-            </a:r>
-            <a:endParaRPr sz="2400">
+            <a:endParaRPr sz="2400" dirty="0">
               <a:solidFill>
                 <a:schemeClr val="dk1"/>
               </a:solidFill>
@@ -8868,12 +8926,12 @@
           </a:ln>
         </p:spPr>
         <p:txBody>
-          <a:bodyPr anchorCtr="0" anchor="t" bIns="91425" lIns="91425" spcFirstLastPara="1" rIns="91425" wrap="square" tIns="91425">
-            <a:normAutofit fontScale="92500" lnSpcReduction="20000"/>
+          <a:bodyPr spcFirstLastPara="1" wrap="square" lIns="91425" tIns="91425" rIns="91425" bIns="91425" anchor="t" anchorCtr="0">
+            <a:normAutofit/>
           </a:bodyPr>
           <a:lstStyle/>
           <a:p>
-            <a:pPr indent="0" lvl="0" marL="0" rtl="0" algn="l">
+            <a:pPr marL="0" lvl="0" indent="0" algn="l" rtl="0">
               <a:lnSpc>
                 <a:spcPct val="100000"/>
               </a:lnSpc>
@@ -8887,7 +8945,7 @@
               <a:buNone/>
             </a:pPr>
             <a:r>
-              <a:rPr lang="en" sz="2955">
+              <a:rPr lang="en" sz="2955" dirty="0">
                 <a:solidFill>
                   <a:schemeClr val="dk1"/>
                 </a:solidFill>
@@ -8896,9 +8954,9 @@
                 <a:cs typeface="Public Sans"/>
                 <a:sym typeface="Public Sans"/>
               </a:rPr>
-              <a:t>&lt;&lt;¿Cuál es su opinión sobre dicha preferencia?&gt;&gt;</a:t>
+              <a:t>&lt;&lt;f10019&gt;&gt;</a:t>
             </a:r>
-            <a:endParaRPr sz="2955">
+            <a:endParaRPr sz="2955" dirty="0">
               <a:solidFill>
                 <a:schemeClr val="dk1"/>
               </a:solidFill>
@@ -8909,7 +8967,7 @@
             </a:endParaRPr>
           </a:p>
           <a:p>
-            <a:pPr indent="0" lvl="0" marL="0" rtl="0" algn="l">
+            <a:pPr marL="0" lvl="0" indent="0" algn="l" rtl="0">
               <a:lnSpc>
                 <a:spcPct val="100000"/>
               </a:lnSpc>
@@ -8922,10 +8980,7 @@
               <a:buSzPct val="28849"/>
               <a:buNone/>
             </a:pPr>
-            <a:r>
-              <a:t/>
-            </a:r>
-            <a:endParaRPr sz="2955">
+            <a:endParaRPr sz="2955" dirty="0">
               <a:solidFill>
                 <a:schemeClr val="dk1"/>
               </a:solidFill>
@@ -8936,7 +8991,7 @@
             </a:endParaRPr>
           </a:p>
           <a:p>
-            <a:pPr indent="0" lvl="0" marL="0" rtl="0" algn="l">
+            <a:pPr marL="0" lvl="0" indent="0" algn="l" rtl="0">
               <a:lnSpc>
                 <a:spcPct val="100000"/>
               </a:lnSpc>
@@ -8949,10 +9004,7 @@
               <a:buSzPct val="28849"/>
               <a:buNone/>
             </a:pPr>
-            <a:r>
-              <a:t/>
-            </a:r>
-            <a:endParaRPr sz="2955">
+            <a:endParaRPr sz="2955" dirty="0">
               <a:solidFill>
                 <a:schemeClr val="dk1"/>
               </a:solidFill>
@@ -8963,7 +9015,7 @@
             </a:endParaRPr>
           </a:p>
           <a:p>
-            <a:pPr indent="0" lvl="0" marL="0" rtl="0" algn="l">
+            <a:pPr marL="0" lvl="0" indent="0" algn="l" rtl="0">
               <a:lnSpc>
                 <a:spcPct val="100000"/>
               </a:lnSpc>
@@ -8976,10 +9028,7 @@
               <a:buSzPct val="28849"/>
               <a:buNone/>
             </a:pPr>
-            <a:r>
-              <a:t/>
-            </a:r>
-            <a:endParaRPr sz="2955">
+            <a:endParaRPr sz="2955" dirty="0">
               <a:solidFill>
                 <a:schemeClr val="dk1"/>
               </a:solidFill>
@@ -8990,7 +9039,7 @@
             </a:endParaRPr>
           </a:p>
           <a:p>
-            <a:pPr indent="0" lvl="0" marL="0" rtl="0" algn="l">
+            <a:pPr marL="0" lvl="0" indent="0" algn="l" rtl="0">
               <a:lnSpc>
                 <a:spcPct val="100000"/>
               </a:lnSpc>
@@ -9003,10 +9052,7 @@
               <a:buSzPct val="28849"/>
               <a:buNone/>
             </a:pPr>
-            <a:r>
-              <a:t/>
-            </a:r>
-            <a:endParaRPr sz="2955">
+            <a:endParaRPr sz="2955" dirty="0">
               <a:solidFill>
                 <a:schemeClr val="dk1"/>
               </a:solidFill>
@@ -9017,7 +9063,7 @@
             </a:endParaRPr>
           </a:p>
           <a:p>
-            <a:pPr indent="0" lvl="0" marL="0" rtl="0" algn="l">
+            <a:pPr marL="0" lvl="0" indent="0" algn="l" rtl="0">
               <a:lnSpc>
                 <a:spcPct val="100000"/>
               </a:lnSpc>
@@ -9030,10 +9076,7 @@
               <a:buSzPct val="28849"/>
               <a:buNone/>
             </a:pPr>
-            <a:r>
-              <a:t/>
-            </a:r>
-            <a:endParaRPr sz="2955">
+            <a:endParaRPr sz="2955" dirty="0">
               <a:solidFill>
                 <a:schemeClr val="dk1"/>
               </a:solidFill>
@@ -9044,7 +9087,7 @@
             </a:endParaRPr>
           </a:p>
           <a:p>
-            <a:pPr indent="0" lvl="0" marL="0" rtl="0" algn="l">
+            <a:pPr marL="0" lvl="0" indent="0" algn="l" rtl="0">
               <a:lnSpc>
                 <a:spcPct val="100000"/>
               </a:lnSpc>
@@ -9057,10 +9100,7 @@
               <a:buSzPct val="35527"/>
               <a:buNone/>
             </a:pPr>
-            <a:r>
-              <a:t/>
-            </a:r>
-            <a:endParaRPr sz="2400">
+            <a:endParaRPr sz="2400" dirty="0">
               <a:solidFill>
                 <a:schemeClr val="dk1"/>
               </a:solidFill>
@@ -9081,7 +9121,7 @@
 </file>
 
 <file path=ppt/slides/slide14.xml><?xml version="1.0" encoding="utf-8"?>
-<p:sld xmlns:a="http://schemas.openxmlformats.org/drawingml/2006/main" xmlns:r="http://schemas.openxmlformats.org/officeDocument/2006/relationships" xmlns:mc="http://schemas.openxmlformats.org/markup-compatibility/2006" xmlns:mv="urn:schemas-microsoft-com:mac:vml" xmlns:p="http://schemas.openxmlformats.org/presentationml/2006/main" xmlns:c="http://schemas.openxmlformats.org/drawingml/2006/chart" xmlns:dgm="http://schemas.openxmlformats.org/drawingml/2006/diagram" xmlns:o="urn:schemas-microsoft-com:office:office" xmlns:v="urn:schemas-microsoft-com:vml" xmlns:pvml="urn:schemas-microsoft-com:office:powerpoint" xmlns:com="http://schemas.openxmlformats.org/drawingml/2006/compatibility" xmlns:p14="http://schemas.microsoft.com/office/powerpoint/2010/main" xmlns:p15="http://schemas.microsoft.com/office/powerpoint/2012/main" xmlns:ahyp="http://schemas.microsoft.com/office/drawing/2018/hyperlinkcolor">
+<p:sld xmlns:a="http://schemas.openxmlformats.org/drawingml/2006/main" xmlns:r="http://schemas.openxmlformats.org/officeDocument/2006/relationships" xmlns:p="http://schemas.openxmlformats.org/presentationml/2006/main">
   <p:cSld>
     <p:bg>
       <p:bgPr>
@@ -9093,11 +9133,12 @@
             <a:fillRect/>
           </a:stretch>
         </a:blipFill>
+        <a:effectLst/>
       </p:bgPr>
     </p:bg>
     <p:spTree>
       <p:nvGrpSpPr>
-        <p:cNvPr id="124" name="Shape 124"/>
+        <p:cNvPr id="1" name="Shape 124"/>
         <p:cNvGrpSpPr/>
         <p:nvPr/>
       </p:nvGrpSpPr>
@@ -9118,7 +9159,7 @@
 </file>
 
 <file path=ppt/slides/slide2.xml><?xml version="1.0" encoding="utf-8"?>
-<p:sld xmlns:a="http://schemas.openxmlformats.org/drawingml/2006/main" xmlns:r="http://schemas.openxmlformats.org/officeDocument/2006/relationships" xmlns:mc="http://schemas.openxmlformats.org/markup-compatibility/2006" xmlns:mv="urn:schemas-microsoft-com:mac:vml" xmlns:p="http://schemas.openxmlformats.org/presentationml/2006/main" xmlns:c="http://schemas.openxmlformats.org/drawingml/2006/chart" xmlns:dgm="http://schemas.openxmlformats.org/drawingml/2006/diagram" xmlns:o="urn:schemas-microsoft-com:office:office" xmlns:v="urn:schemas-microsoft-com:vml" xmlns:pvml="urn:schemas-microsoft-com:office:powerpoint" xmlns:com="http://schemas.openxmlformats.org/drawingml/2006/compatibility" xmlns:p14="http://schemas.microsoft.com/office/powerpoint/2010/main" xmlns:p15="http://schemas.microsoft.com/office/powerpoint/2012/main" xmlns:ahyp="http://schemas.microsoft.com/office/drawing/2018/hyperlinkcolor">
+<p:sld xmlns:a="http://schemas.openxmlformats.org/drawingml/2006/main" xmlns:r="http://schemas.openxmlformats.org/officeDocument/2006/relationships" xmlns:p="http://schemas.openxmlformats.org/presentationml/2006/main">
   <p:cSld>
     <p:bg>
       <p:bgPr>
@@ -9130,11 +9171,12 @@
             <a:fillRect/>
           </a:stretch>
         </a:blipFill>
+        <a:effectLst/>
       </p:bgPr>
     </p:bg>
     <p:spTree>
       <p:nvGrpSpPr>
-        <p:cNvPr id="58" name="Shape 58"/>
+        <p:cNvPr id="1" name="Shape 58"/>
         <p:cNvGrpSpPr/>
         <p:nvPr/>
       </p:nvGrpSpPr>
@@ -9155,7 +9197,7 @@
 </file>
 
 <file path=ppt/slides/slide3.xml><?xml version="1.0" encoding="utf-8"?>
-<p:sld xmlns:a="http://schemas.openxmlformats.org/drawingml/2006/main" xmlns:r="http://schemas.openxmlformats.org/officeDocument/2006/relationships" xmlns:mc="http://schemas.openxmlformats.org/markup-compatibility/2006" xmlns:mv="urn:schemas-microsoft-com:mac:vml" xmlns:p="http://schemas.openxmlformats.org/presentationml/2006/main" xmlns:c="http://schemas.openxmlformats.org/drawingml/2006/chart" xmlns:dgm="http://schemas.openxmlformats.org/drawingml/2006/diagram" xmlns:o="urn:schemas-microsoft-com:office:office" xmlns:v="urn:schemas-microsoft-com:vml" xmlns:pvml="urn:schemas-microsoft-com:office:powerpoint" xmlns:com="http://schemas.openxmlformats.org/drawingml/2006/compatibility" xmlns:p14="http://schemas.microsoft.com/office/powerpoint/2010/main" xmlns:p15="http://schemas.microsoft.com/office/powerpoint/2012/main" xmlns:ahyp="http://schemas.microsoft.com/office/drawing/2018/hyperlinkcolor">
+<p:sld xmlns:a="http://schemas.openxmlformats.org/drawingml/2006/main" xmlns:r="http://schemas.openxmlformats.org/officeDocument/2006/relationships" xmlns:p="http://schemas.openxmlformats.org/presentationml/2006/main">
   <p:cSld>
     <p:bg>
       <p:bgPr>
@@ -9167,11 +9209,12 @@
             <a:fillRect/>
           </a:stretch>
         </a:blipFill>
+        <a:effectLst/>
       </p:bgPr>
     </p:bg>
     <p:spTree>
       <p:nvGrpSpPr>
-        <p:cNvPr id="62" name="Shape 62"/>
+        <p:cNvPr id="1" name="Shape 62"/>
         <p:cNvGrpSpPr/>
         <p:nvPr/>
       </p:nvGrpSpPr>
@@ -9203,12 +9246,12 @@
           </a:ln>
         </p:spPr>
         <p:txBody>
-          <a:bodyPr anchorCtr="0" anchor="t" bIns="91425" lIns="91425" spcFirstLastPara="1" rIns="91425" wrap="square" tIns="91425">
+          <a:bodyPr spcFirstLastPara="1" wrap="square" lIns="91425" tIns="91425" rIns="91425" bIns="91425" anchor="t" anchorCtr="0">
             <a:noAutofit/>
           </a:bodyPr>
           <a:lstStyle/>
           <a:p>
-            <a:pPr indent="0" lvl="0" marL="0" rtl="0" algn="l">
+            <a:pPr marL="0" lvl="0" indent="0" algn="l" rtl="0">
               <a:spcBef>
                 <a:spcPts val="0"/>
               </a:spcBef>
@@ -9218,7 +9261,7 @@
               <a:buNone/>
             </a:pPr>
             <a:r>
-              <a:rPr b="1" lang="en" sz="3483">
+              <a:rPr lang="en" sz="3483" b="1" dirty="0">
                 <a:solidFill>
                   <a:schemeClr val="dk1"/>
                 </a:solidFill>
@@ -9230,7 +9273,7 @@
               <a:t>Tu respuesta:</a:t>
             </a:r>
             <a:r>
-              <a:rPr lang="en" sz="3483">
+              <a:rPr lang="en" sz="3483" dirty="0">
                 <a:solidFill>
                   <a:schemeClr val="dk1"/>
                 </a:solidFill>
@@ -9241,7 +9284,7 @@
               </a:rPr>
               <a:t> </a:t>
             </a:r>
-            <a:endParaRPr sz="3483">
+            <a:endParaRPr sz="3483" dirty="0">
               <a:solidFill>
                 <a:schemeClr val="dk1"/>
               </a:solidFill>
@@ -9252,19 +9295,16 @@
             </a:endParaRPr>
           </a:p>
           <a:p>
-            <a:pPr indent="0" lvl="0" marL="0" rtl="0" algn="l">
-              <a:spcBef>
-                <a:spcPts val="0"/>
-              </a:spcBef>
-              <a:spcAft>
-                <a:spcPts val="0"/>
-              </a:spcAft>
-              <a:buNone/>
-            </a:pPr>
-            <a:r>
-              <a:t/>
-            </a:r>
-            <a:endParaRPr sz="3483">
+            <a:pPr marL="0" lvl="0" indent="0" algn="l" rtl="0">
+              <a:spcBef>
+                <a:spcPts val="0"/>
+              </a:spcBef>
+              <a:spcAft>
+                <a:spcPts val="0"/>
+              </a:spcAft>
+              <a:buNone/>
+            </a:pPr>
+            <a:endParaRPr sz="3483" dirty="0">
               <a:solidFill>
                 <a:schemeClr val="dk1"/>
               </a:solidFill>
@@ -9275,7 +9315,7 @@
             </a:endParaRPr>
           </a:p>
           <a:p>
-            <a:pPr indent="0" lvl="0" marL="0" rtl="0" algn="l">
+            <a:pPr marL="0" lvl="0" indent="0" algn="l" rtl="0">
               <a:spcBef>
                 <a:spcPts val="0"/>
               </a:spcBef>
@@ -9285,7 +9325,7 @@
               <a:buNone/>
             </a:pPr>
             <a:r>
-              <a:rPr lang="en" sz="4200">
+              <a:rPr lang="en" sz="4200" dirty="0">
                 <a:solidFill>
                   <a:schemeClr val="dk1"/>
                 </a:solidFill>
@@ -9294,9 +9334,9 @@
                 <a:cs typeface="Public Sans"/>
                 <a:sym typeface="Public Sans"/>
               </a:rPr>
-              <a:t>&lt;&lt;Todos y todas tenemos una pasión&gt;&gt;</a:t>
+              <a:t>&lt;&lt;f10002&gt;&gt;</a:t>
             </a:r>
-            <a:endParaRPr sz="4200">
+            <a:endParaRPr sz="4200" dirty="0">
               <a:solidFill>
                 <a:schemeClr val="dk1"/>
               </a:solidFill>
@@ -9307,19 +9347,16 @@
             </a:endParaRPr>
           </a:p>
           <a:p>
-            <a:pPr indent="0" lvl="0" marL="0" rtl="0" algn="l">
-              <a:spcBef>
-                <a:spcPts val="0"/>
-              </a:spcBef>
-              <a:spcAft>
-                <a:spcPts val="0"/>
-              </a:spcAft>
-              <a:buNone/>
-            </a:pPr>
-            <a:r>
-              <a:t/>
-            </a:r>
-            <a:endParaRPr sz="3483">
+            <a:pPr marL="0" lvl="0" indent="0" algn="l" rtl="0">
+              <a:spcBef>
+                <a:spcPts val="0"/>
+              </a:spcBef>
+              <a:spcAft>
+                <a:spcPts val="0"/>
+              </a:spcAft>
+              <a:buNone/>
+            </a:pPr>
+            <a:endParaRPr sz="3483" dirty="0">
               <a:solidFill>
                 <a:schemeClr val="dk1"/>
               </a:solidFill>
@@ -9340,7 +9377,7 @@
 </file>
 
 <file path=ppt/slides/slide4.xml><?xml version="1.0" encoding="utf-8"?>
-<p:sld xmlns:a="http://schemas.openxmlformats.org/drawingml/2006/main" xmlns:r="http://schemas.openxmlformats.org/officeDocument/2006/relationships" xmlns:mc="http://schemas.openxmlformats.org/markup-compatibility/2006" xmlns:mv="urn:schemas-microsoft-com:mac:vml" xmlns:p="http://schemas.openxmlformats.org/presentationml/2006/main" xmlns:c="http://schemas.openxmlformats.org/drawingml/2006/chart" xmlns:dgm="http://schemas.openxmlformats.org/drawingml/2006/diagram" xmlns:o="urn:schemas-microsoft-com:office:office" xmlns:v="urn:schemas-microsoft-com:vml" xmlns:pvml="urn:schemas-microsoft-com:office:powerpoint" xmlns:com="http://schemas.openxmlformats.org/drawingml/2006/compatibility" xmlns:p14="http://schemas.microsoft.com/office/powerpoint/2010/main" xmlns:p15="http://schemas.microsoft.com/office/powerpoint/2012/main" xmlns:ahyp="http://schemas.microsoft.com/office/drawing/2018/hyperlinkcolor">
+<p:sld xmlns:a="http://schemas.openxmlformats.org/drawingml/2006/main" xmlns:r="http://schemas.openxmlformats.org/officeDocument/2006/relationships" xmlns:p="http://schemas.openxmlformats.org/presentationml/2006/main">
   <p:cSld>
     <p:bg>
       <p:bgPr>
@@ -9352,11 +9389,12 @@
             <a:fillRect/>
           </a:stretch>
         </a:blipFill>
+        <a:effectLst/>
       </p:bgPr>
     </p:bg>
     <p:spTree>
       <p:nvGrpSpPr>
-        <p:cNvPr id="67" name="Shape 67"/>
+        <p:cNvPr id="1" name="Shape 67"/>
         <p:cNvGrpSpPr/>
         <p:nvPr/>
       </p:nvGrpSpPr>
@@ -9388,12 +9426,12 @@
           </a:ln>
         </p:spPr>
         <p:txBody>
-          <a:bodyPr anchorCtr="0" anchor="t" bIns="91425" lIns="91425" spcFirstLastPara="1" rIns="91425" wrap="square" tIns="91425">
+          <a:bodyPr spcFirstLastPara="1" wrap="square" lIns="91425" tIns="91425" rIns="91425" bIns="91425" anchor="t" anchorCtr="0">
             <a:noAutofit/>
           </a:bodyPr>
           <a:lstStyle/>
           <a:p>
-            <a:pPr indent="0" lvl="0" marL="0" rtl="0" algn="l">
+            <a:pPr marL="0" lvl="0" indent="0" algn="l" rtl="0">
               <a:spcBef>
                 <a:spcPts val="0"/>
               </a:spcBef>
@@ -9403,7 +9441,7 @@
               <a:buNone/>
             </a:pPr>
             <a:r>
-              <a:rPr b="1" lang="en" sz="3483">
+              <a:rPr lang="en" sz="3483" b="1" dirty="0">
                 <a:solidFill>
                   <a:schemeClr val="dk1"/>
                 </a:solidFill>
@@ -9415,7 +9453,7 @@
               <a:t>Tu respuesta:</a:t>
             </a:r>
             <a:r>
-              <a:rPr lang="en" sz="3483">
+              <a:rPr lang="en" sz="3483" dirty="0">
                 <a:solidFill>
                   <a:schemeClr val="dk1"/>
                 </a:solidFill>
@@ -9426,7 +9464,7 @@
               </a:rPr>
               <a:t> </a:t>
             </a:r>
-            <a:endParaRPr sz="3483">
+            <a:endParaRPr sz="3483" dirty="0">
               <a:solidFill>
                 <a:schemeClr val="dk1"/>
               </a:solidFill>
@@ -9437,19 +9475,16 @@
             </a:endParaRPr>
           </a:p>
           <a:p>
-            <a:pPr indent="0" lvl="0" marL="0" rtl="0" algn="l">
-              <a:spcBef>
-                <a:spcPts val="0"/>
-              </a:spcBef>
-              <a:spcAft>
-                <a:spcPts val="0"/>
-              </a:spcAft>
-              <a:buNone/>
-            </a:pPr>
-            <a:r>
-              <a:t/>
-            </a:r>
-            <a:endParaRPr sz="3483">
+            <a:pPr marL="0" lvl="0" indent="0" algn="l" rtl="0">
+              <a:spcBef>
+                <a:spcPts val="0"/>
+              </a:spcBef>
+              <a:spcAft>
+                <a:spcPts val="0"/>
+              </a:spcAft>
+              <a:buNone/>
+            </a:pPr>
+            <a:endParaRPr sz="3483" dirty="0">
               <a:solidFill>
                 <a:schemeClr val="dk1"/>
               </a:solidFill>
@@ -9460,7 +9495,7 @@
             </a:endParaRPr>
           </a:p>
           <a:p>
-            <a:pPr indent="0" lvl="0" marL="0" rtl="0" algn="l">
+            <a:pPr marL="0" lvl="0" indent="0" algn="l" rtl="0">
               <a:spcBef>
                 <a:spcPts val="0"/>
               </a:spcBef>
@@ -9470,7 +9505,7 @@
               <a:buNone/>
             </a:pPr>
             <a:r>
-              <a:rPr lang="en" sz="4200">
+              <a:rPr lang="en" sz="4200" dirty="0">
                 <a:solidFill>
                   <a:schemeClr val="dk1"/>
                 </a:solidFill>
@@ -9479,33 +9514,9 @@
                 <a:cs typeface="Public Sans"/>
                 <a:sym typeface="Public Sans"/>
               </a:rPr>
-              <a:t>&lt;&lt;</a:t>
+              <a:t>&lt;&lt;f10003&gt;&gt;</a:t>
             </a:r>
-            <a:r>
-              <a:rPr lang="en" sz="4200">
-                <a:solidFill>
-                  <a:schemeClr val="dk1"/>
-                </a:solidFill>
-                <a:latin typeface="Public Sans"/>
-                <a:ea typeface="Public Sans"/>
-                <a:cs typeface="Public Sans"/>
-                <a:sym typeface="Public Sans"/>
-              </a:rPr>
-              <a:t>La vida es un proceso y no un resultado</a:t>
-            </a:r>
-            <a:r>
-              <a:rPr lang="en" sz="4200">
-                <a:solidFill>
-                  <a:schemeClr val="dk1"/>
-                </a:solidFill>
-                <a:latin typeface="Public Sans"/>
-                <a:ea typeface="Public Sans"/>
-                <a:cs typeface="Public Sans"/>
-                <a:sym typeface="Public Sans"/>
-              </a:rPr>
-              <a:t>&gt;&gt;</a:t>
-            </a:r>
-            <a:endParaRPr sz="4200">
+            <a:endParaRPr sz="4200" dirty="0">
               <a:solidFill>
                 <a:schemeClr val="dk1"/>
               </a:solidFill>
@@ -9516,19 +9527,16 @@
             </a:endParaRPr>
           </a:p>
           <a:p>
-            <a:pPr indent="0" lvl="0" marL="0" rtl="0" algn="l">
-              <a:spcBef>
-                <a:spcPts val="0"/>
-              </a:spcBef>
-              <a:spcAft>
-                <a:spcPts val="0"/>
-              </a:spcAft>
-              <a:buNone/>
-            </a:pPr>
-            <a:r>
-              <a:t/>
-            </a:r>
-            <a:endParaRPr sz="3483">
+            <a:pPr marL="0" lvl="0" indent="0" algn="l" rtl="0">
+              <a:spcBef>
+                <a:spcPts val="0"/>
+              </a:spcBef>
+              <a:spcAft>
+                <a:spcPts val="0"/>
+              </a:spcAft>
+              <a:buNone/>
+            </a:pPr>
+            <a:endParaRPr sz="3483" dirty="0">
               <a:solidFill>
                 <a:schemeClr val="dk1"/>
               </a:solidFill>
@@ -9549,7 +9557,7 @@
 </file>
 
 <file path=ppt/slides/slide5.xml><?xml version="1.0" encoding="utf-8"?>
-<p:sld xmlns:a="http://schemas.openxmlformats.org/drawingml/2006/main" xmlns:r="http://schemas.openxmlformats.org/officeDocument/2006/relationships" xmlns:mc="http://schemas.openxmlformats.org/markup-compatibility/2006" xmlns:mv="urn:schemas-microsoft-com:mac:vml" xmlns:p="http://schemas.openxmlformats.org/presentationml/2006/main" xmlns:c="http://schemas.openxmlformats.org/drawingml/2006/chart" xmlns:dgm="http://schemas.openxmlformats.org/drawingml/2006/diagram" xmlns:o="urn:schemas-microsoft-com:office:office" xmlns:v="urn:schemas-microsoft-com:vml" xmlns:pvml="urn:schemas-microsoft-com:office:powerpoint" xmlns:com="http://schemas.openxmlformats.org/drawingml/2006/compatibility" xmlns:p14="http://schemas.microsoft.com/office/powerpoint/2010/main" xmlns:p15="http://schemas.microsoft.com/office/powerpoint/2012/main" xmlns:ahyp="http://schemas.microsoft.com/office/drawing/2018/hyperlinkcolor">
+<p:sld xmlns:a="http://schemas.openxmlformats.org/drawingml/2006/main" xmlns:r="http://schemas.openxmlformats.org/officeDocument/2006/relationships" xmlns:p="http://schemas.openxmlformats.org/presentationml/2006/main">
   <p:cSld>
     <p:bg>
       <p:bgPr>
@@ -9561,11 +9569,12 @@
             <a:fillRect/>
           </a:stretch>
         </a:blipFill>
+        <a:effectLst/>
       </p:bgPr>
     </p:bg>
     <p:spTree>
       <p:nvGrpSpPr>
-        <p:cNvPr id="72" name="Shape 72"/>
+        <p:cNvPr id="1" name="Shape 72"/>
         <p:cNvGrpSpPr/>
         <p:nvPr/>
       </p:nvGrpSpPr>
@@ -9597,12 +9606,12 @@
           </a:ln>
         </p:spPr>
         <p:txBody>
-          <a:bodyPr anchorCtr="0" anchor="t" bIns="91425" lIns="91425" spcFirstLastPara="1" rIns="91425" wrap="square" tIns="91425">
+          <a:bodyPr spcFirstLastPara="1" wrap="square" lIns="91425" tIns="91425" rIns="91425" bIns="91425" anchor="t" anchorCtr="0">
             <a:noAutofit/>
           </a:bodyPr>
           <a:lstStyle/>
           <a:p>
-            <a:pPr indent="0" lvl="0" marL="0" rtl="0" algn="l">
+            <a:pPr marL="0" lvl="0" indent="0" algn="l" rtl="0">
               <a:spcBef>
                 <a:spcPts val="0"/>
               </a:spcBef>
@@ -9612,7 +9621,7 @@
               <a:buNone/>
             </a:pPr>
             <a:r>
-              <a:rPr b="1" lang="en" sz="3483">
+              <a:rPr lang="en" sz="3483" b="1" dirty="0">
                 <a:solidFill>
                   <a:schemeClr val="dk1"/>
                 </a:solidFill>
@@ -9624,7 +9633,7 @@
               <a:t>Tu respuesta:</a:t>
             </a:r>
             <a:r>
-              <a:rPr lang="en" sz="3483">
+              <a:rPr lang="en" sz="3483" dirty="0">
                 <a:solidFill>
                   <a:schemeClr val="dk1"/>
                 </a:solidFill>
@@ -9635,7 +9644,7 @@
               </a:rPr>
               <a:t> </a:t>
             </a:r>
-            <a:endParaRPr sz="3483">
+            <a:endParaRPr sz="3483" dirty="0">
               <a:solidFill>
                 <a:schemeClr val="dk1"/>
               </a:solidFill>
@@ -9646,19 +9655,16 @@
             </a:endParaRPr>
           </a:p>
           <a:p>
-            <a:pPr indent="0" lvl="0" marL="0" rtl="0" algn="l">
-              <a:spcBef>
-                <a:spcPts val="0"/>
-              </a:spcBef>
-              <a:spcAft>
-                <a:spcPts val="0"/>
-              </a:spcAft>
-              <a:buNone/>
-            </a:pPr>
-            <a:r>
-              <a:t/>
-            </a:r>
-            <a:endParaRPr sz="3483">
+            <a:pPr marL="0" lvl="0" indent="0" algn="l" rtl="0">
+              <a:spcBef>
+                <a:spcPts val="0"/>
+              </a:spcBef>
+              <a:spcAft>
+                <a:spcPts val="0"/>
+              </a:spcAft>
+              <a:buNone/>
+            </a:pPr>
+            <a:endParaRPr sz="3483" dirty="0">
               <a:solidFill>
                 <a:schemeClr val="dk1"/>
               </a:solidFill>
@@ -9669,7 +9675,7 @@
             </a:endParaRPr>
           </a:p>
           <a:p>
-            <a:pPr indent="0" lvl="0" marL="0" rtl="0" algn="l">
+            <a:pPr marL="0" lvl="0" indent="0" algn="l" rtl="0">
               <a:spcBef>
                 <a:spcPts val="0"/>
               </a:spcBef>
@@ -9679,7 +9685,7 @@
               <a:buNone/>
             </a:pPr>
             <a:r>
-              <a:rPr lang="en" sz="4200">
+              <a:rPr lang="en" sz="4200" dirty="0">
                 <a:solidFill>
                   <a:schemeClr val="dk1"/>
                 </a:solidFill>
@@ -9688,33 +9694,9 @@
                 <a:cs typeface="Public Sans"/>
                 <a:sym typeface="Public Sans"/>
               </a:rPr>
-              <a:t>&lt;&lt;</a:t>
+              <a:t>&lt;&lt;f10004&gt;&gt;</a:t>
             </a:r>
-            <a:r>
-              <a:rPr lang="en" sz="4200">
-                <a:solidFill>
-                  <a:schemeClr val="dk1"/>
-                </a:solidFill>
-                <a:latin typeface="Public Sans"/>
-                <a:ea typeface="Public Sans"/>
-                <a:cs typeface="Public Sans"/>
-                <a:sym typeface="Public Sans"/>
-              </a:rPr>
-              <a:t>A esta altura de mi vida debería saber a dónde voy y cómo llegar</a:t>
-            </a:r>
-            <a:r>
-              <a:rPr lang="en" sz="4200">
-                <a:solidFill>
-                  <a:schemeClr val="dk1"/>
-                </a:solidFill>
-                <a:latin typeface="Public Sans"/>
-                <a:ea typeface="Public Sans"/>
-                <a:cs typeface="Public Sans"/>
-                <a:sym typeface="Public Sans"/>
-              </a:rPr>
-              <a:t>&gt;&gt;</a:t>
-            </a:r>
-            <a:endParaRPr sz="4200">
+            <a:endParaRPr sz="4200" dirty="0">
               <a:solidFill>
                 <a:schemeClr val="dk1"/>
               </a:solidFill>
@@ -9725,19 +9707,16 @@
             </a:endParaRPr>
           </a:p>
           <a:p>
-            <a:pPr indent="0" lvl="0" marL="0" rtl="0" algn="l">
-              <a:spcBef>
-                <a:spcPts val="0"/>
-              </a:spcBef>
-              <a:spcAft>
-                <a:spcPts val="0"/>
-              </a:spcAft>
-              <a:buNone/>
-            </a:pPr>
-            <a:r>
-              <a:t/>
-            </a:r>
-            <a:endParaRPr sz="3483">
+            <a:pPr marL="0" lvl="0" indent="0" algn="l" rtl="0">
+              <a:spcBef>
+                <a:spcPts val="0"/>
+              </a:spcBef>
+              <a:spcAft>
+                <a:spcPts val="0"/>
+              </a:spcAft>
+              <a:buNone/>
+            </a:pPr>
+            <a:endParaRPr sz="3483" dirty="0">
               <a:solidFill>
                 <a:schemeClr val="dk1"/>
               </a:solidFill>
@@ -9758,7 +9737,7 @@
 </file>
 
 <file path=ppt/slides/slide6.xml><?xml version="1.0" encoding="utf-8"?>
-<p:sld xmlns:a="http://schemas.openxmlformats.org/drawingml/2006/main" xmlns:r="http://schemas.openxmlformats.org/officeDocument/2006/relationships" xmlns:mc="http://schemas.openxmlformats.org/markup-compatibility/2006" xmlns:mv="urn:schemas-microsoft-com:mac:vml" xmlns:p="http://schemas.openxmlformats.org/presentationml/2006/main" xmlns:c="http://schemas.openxmlformats.org/drawingml/2006/chart" xmlns:dgm="http://schemas.openxmlformats.org/drawingml/2006/diagram" xmlns:o="urn:schemas-microsoft-com:office:office" xmlns:v="urn:schemas-microsoft-com:vml" xmlns:pvml="urn:schemas-microsoft-com:office:powerpoint" xmlns:com="http://schemas.openxmlformats.org/drawingml/2006/compatibility" xmlns:p14="http://schemas.microsoft.com/office/powerpoint/2010/main" xmlns:p15="http://schemas.microsoft.com/office/powerpoint/2012/main" xmlns:ahyp="http://schemas.microsoft.com/office/drawing/2018/hyperlinkcolor">
+<p:sld xmlns:a="http://schemas.openxmlformats.org/drawingml/2006/main" xmlns:r="http://schemas.openxmlformats.org/officeDocument/2006/relationships" xmlns:p="http://schemas.openxmlformats.org/presentationml/2006/main">
   <p:cSld>
     <p:bg>
       <p:bgPr>
@@ -9770,11 +9749,12 @@
             <a:fillRect/>
           </a:stretch>
         </a:blipFill>
+        <a:effectLst/>
       </p:bgPr>
     </p:bg>
     <p:spTree>
       <p:nvGrpSpPr>
-        <p:cNvPr id="77" name="Shape 77"/>
+        <p:cNvPr id="1" name="Shape 77"/>
         <p:cNvGrpSpPr/>
         <p:nvPr/>
       </p:nvGrpSpPr>
@@ -9806,12 +9786,12 @@
           </a:ln>
         </p:spPr>
         <p:txBody>
-          <a:bodyPr anchorCtr="0" anchor="t" bIns="91425" lIns="91425" spcFirstLastPara="1" rIns="91425" wrap="square" tIns="91425">
+          <a:bodyPr spcFirstLastPara="1" wrap="square" lIns="91425" tIns="91425" rIns="91425" bIns="91425" anchor="t" anchorCtr="0">
             <a:noAutofit/>
           </a:bodyPr>
           <a:lstStyle/>
           <a:p>
-            <a:pPr indent="0" lvl="0" marL="0" rtl="0" algn="l">
+            <a:pPr marL="0" lvl="0" indent="0" algn="l" rtl="0">
               <a:spcBef>
                 <a:spcPts val="0"/>
               </a:spcBef>
@@ -9821,7 +9801,7 @@
               <a:buNone/>
             </a:pPr>
             <a:r>
-              <a:rPr b="1" lang="en" sz="3483">
+              <a:rPr lang="en" sz="3483" b="1" dirty="0">
                 <a:solidFill>
                   <a:schemeClr val="dk1"/>
                 </a:solidFill>
@@ -9833,7 +9813,7 @@
               <a:t>Tu respuesta:</a:t>
             </a:r>
             <a:r>
-              <a:rPr lang="en" sz="3483">
+              <a:rPr lang="en" sz="3483" dirty="0">
                 <a:solidFill>
                   <a:schemeClr val="dk1"/>
                 </a:solidFill>
@@ -9844,7 +9824,7 @@
               </a:rPr>
               <a:t> </a:t>
             </a:r>
-            <a:endParaRPr sz="3483">
+            <a:endParaRPr sz="3483" dirty="0">
               <a:solidFill>
                 <a:schemeClr val="dk1"/>
               </a:solidFill>
@@ -9855,19 +9835,16 @@
             </a:endParaRPr>
           </a:p>
           <a:p>
-            <a:pPr indent="0" lvl="0" marL="0" rtl="0" algn="l">
-              <a:spcBef>
-                <a:spcPts val="0"/>
-              </a:spcBef>
-              <a:spcAft>
-                <a:spcPts val="0"/>
-              </a:spcAft>
-              <a:buNone/>
-            </a:pPr>
-            <a:r>
-              <a:t/>
-            </a:r>
-            <a:endParaRPr sz="3483">
+            <a:pPr marL="0" lvl="0" indent="0" algn="l" rtl="0">
+              <a:spcBef>
+                <a:spcPts val="0"/>
+              </a:spcBef>
+              <a:spcAft>
+                <a:spcPts val="0"/>
+              </a:spcAft>
+              <a:buNone/>
+            </a:pPr>
+            <a:endParaRPr sz="3483" dirty="0">
               <a:solidFill>
                 <a:schemeClr val="dk1"/>
               </a:solidFill>
@@ -9878,7 +9855,7 @@
             </a:endParaRPr>
           </a:p>
           <a:p>
-            <a:pPr indent="0" lvl="0" marL="0" rtl="0" algn="l">
+            <a:pPr marL="0" lvl="0" indent="0" algn="l" rtl="0">
               <a:spcBef>
                 <a:spcPts val="0"/>
               </a:spcBef>
@@ -9888,7 +9865,7 @@
               <a:buNone/>
             </a:pPr>
             <a:r>
-              <a:rPr lang="en" sz="4200">
+              <a:rPr lang="en" sz="4200" dirty="0">
                 <a:solidFill>
                   <a:schemeClr val="dk1"/>
                 </a:solidFill>
@@ -9897,33 +9874,9 @@
                 <a:cs typeface="Public Sans"/>
                 <a:sym typeface="Public Sans"/>
               </a:rPr>
-              <a:t>&lt;&lt;</a:t>
+              <a:t>&lt;&lt;f10005&gt;&gt;</a:t>
             </a:r>
-            <a:r>
-              <a:rPr lang="en" sz="4200">
-                <a:solidFill>
-                  <a:schemeClr val="dk1"/>
-                </a:solidFill>
-                <a:latin typeface="Public Sans"/>
-                <a:ea typeface="Public Sans"/>
-                <a:cs typeface="Public Sans"/>
-                <a:sym typeface="Public Sans"/>
-              </a:rPr>
-              <a:t>Tu vida y su diseño es en colaboración con otras personas</a:t>
-            </a:r>
-            <a:r>
-              <a:rPr lang="en" sz="4200">
-                <a:solidFill>
-                  <a:schemeClr val="dk1"/>
-                </a:solidFill>
-                <a:latin typeface="Public Sans"/>
-                <a:ea typeface="Public Sans"/>
-                <a:cs typeface="Public Sans"/>
-                <a:sym typeface="Public Sans"/>
-              </a:rPr>
-              <a:t>&gt;&gt;</a:t>
-            </a:r>
-            <a:endParaRPr sz="4200">
+            <a:endParaRPr sz="4200" dirty="0">
               <a:solidFill>
                 <a:schemeClr val="dk1"/>
               </a:solidFill>
@@ -9934,19 +9887,16 @@
             </a:endParaRPr>
           </a:p>
           <a:p>
-            <a:pPr indent="0" lvl="0" marL="0" rtl="0" algn="l">
-              <a:spcBef>
-                <a:spcPts val="0"/>
-              </a:spcBef>
-              <a:spcAft>
-                <a:spcPts val="0"/>
-              </a:spcAft>
-              <a:buNone/>
-            </a:pPr>
-            <a:r>
-              <a:t/>
-            </a:r>
-            <a:endParaRPr sz="3483">
+            <a:pPr marL="0" lvl="0" indent="0" algn="l" rtl="0">
+              <a:spcBef>
+                <a:spcPts val="0"/>
+              </a:spcBef>
+              <a:spcAft>
+                <a:spcPts val="0"/>
+              </a:spcAft>
+              <a:buNone/>
+            </a:pPr>
+            <a:endParaRPr sz="3483" dirty="0">
               <a:solidFill>
                 <a:schemeClr val="dk1"/>
               </a:solidFill>
@@ -9967,7 +9917,7 @@
 </file>
 
 <file path=ppt/slides/slide7.xml><?xml version="1.0" encoding="utf-8"?>
-<p:sld xmlns:a="http://schemas.openxmlformats.org/drawingml/2006/main" xmlns:r="http://schemas.openxmlformats.org/officeDocument/2006/relationships" xmlns:mc="http://schemas.openxmlformats.org/markup-compatibility/2006" xmlns:mv="urn:schemas-microsoft-com:mac:vml" xmlns:p="http://schemas.openxmlformats.org/presentationml/2006/main" xmlns:c="http://schemas.openxmlformats.org/drawingml/2006/chart" xmlns:dgm="http://schemas.openxmlformats.org/drawingml/2006/diagram" xmlns:o="urn:schemas-microsoft-com:office:office" xmlns:v="urn:schemas-microsoft-com:vml" xmlns:pvml="urn:schemas-microsoft-com:office:powerpoint" xmlns:com="http://schemas.openxmlformats.org/drawingml/2006/compatibility" xmlns:p14="http://schemas.microsoft.com/office/powerpoint/2010/main" xmlns:p15="http://schemas.microsoft.com/office/powerpoint/2012/main" xmlns:ahyp="http://schemas.microsoft.com/office/drawing/2018/hyperlinkcolor">
+<p:sld xmlns:a="http://schemas.openxmlformats.org/drawingml/2006/main" xmlns:r="http://schemas.openxmlformats.org/officeDocument/2006/relationships" xmlns:p="http://schemas.openxmlformats.org/presentationml/2006/main">
   <p:cSld>
     <p:bg>
       <p:bgPr>
@@ -9979,11 +9929,12 @@
             <a:fillRect/>
           </a:stretch>
         </a:blipFill>
+        <a:effectLst/>
       </p:bgPr>
     </p:bg>
     <p:spTree>
       <p:nvGrpSpPr>
-        <p:cNvPr id="82" name="Shape 82"/>
+        <p:cNvPr id="1" name="Shape 82"/>
         <p:cNvGrpSpPr/>
         <p:nvPr/>
       </p:nvGrpSpPr>
@@ -10015,12 +9966,12 @@
           </a:ln>
         </p:spPr>
         <p:txBody>
-          <a:bodyPr anchorCtr="0" anchor="t" bIns="91425" lIns="91425" spcFirstLastPara="1" rIns="91425" wrap="square" tIns="91425">
+          <a:bodyPr spcFirstLastPara="1" wrap="square" lIns="91425" tIns="91425" rIns="91425" bIns="91425" anchor="t" anchorCtr="0">
             <a:noAutofit/>
           </a:bodyPr>
           <a:lstStyle/>
           <a:p>
-            <a:pPr indent="0" lvl="0" marL="0" rtl="0" algn="l">
+            <a:pPr marL="0" lvl="0" indent="0" algn="l" rtl="0">
               <a:spcBef>
                 <a:spcPts val="0"/>
               </a:spcBef>
@@ -10030,7 +9981,7 @@
               <a:buNone/>
             </a:pPr>
             <a:r>
-              <a:rPr b="1" lang="en" sz="3483">
+              <a:rPr lang="en" sz="3483" b="1" dirty="0">
                 <a:solidFill>
                   <a:schemeClr val="dk1"/>
                 </a:solidFill>
@@ -10042,7 +9993,7 @@
               <a:t>Tu respuesta:</a:t>
             </a:r>
             <a:r>
-              <a:rPr lang="en" sz="3483">
+              <a:rPr lang="en" sz="3483" dirty="0">
                 <a:solidFill>
                   <a:schemeClr val="dk1"/>
                 </a:solidFill>
@@ -10053,7 +10004,7 @@
               </a:rPr>
               <a:t> </a:t>
             </a:r>
-            <a:endParaRPr sz="3483">
+            <a:endParaRPr sz="3483" dirty="0">
               <a:solidFill>
                 <a:schemeClr val="dk1"/>
               </a:solidFill>
@@ -10064,19 +10015,16 @@
             </a:endParaRPr>
           </a:p>
           <a:p>
-            <a:pPr indent="0" lvl="0" marL="0" rtl="0" algn="l">
-              <a:spcBef>
-                <a:spcPts val="0"/>
-              </a:spcBef>
-              <a:spcAft>
-                <a:spcPts val="0"/>
-              </a:spcAft>
-              <a:buNone/>
-            </a:pPr>
-            <a:r>
-              <a:t/>
-            </a:r>
-            <a:endParaRPr sz="3483">
+            <a:pPr marL="0" lvl="0" indent="0" algn="l" rtl="0">
+              <a:spcBef>
+                <a:spcPts val="0"/>
+              </a:spcBef>
+              <a:spcAft>
+                <a:spcPts val="0"/>
+              </a:spcAft>
+              <a:buNone/>
+            </a:pPr>
+            <a:endParaRPr sz="3483" dirty="0">
               <a:solidFill>
                 <a:schemeClr val="dk1"/>
               </a:solidFill>
@@ -10087,7 +10035,7 @@
             </a:endParaRPr>
           </a:p>
           <a:p>
-            <a:pPr indent="0" lvl="0" marL="0" rtl="0" algn="l">
+            <a:pPr marL="0" lvl="0" indent="0" algn="l" rtl="0">
               <a:spcBef>
                 <a:spcPts val="0"/>
               </a:spcBef>
@@ -10097,7 +10045,7 @@
               <a:buNone/>
             </a:pPr>
             <a:r>
-              <a:rPr lang="en" sz="4200">
+              <a:rPr lang="en" sz="4200" dirty="0">
                 <a:solidFill>
                   <a:schemeClr val="dk1"/>
                 </a:solidFill>
@@ -10106,33 +10054,9 @@
                 <a:cs typeface="Public Sans"/>
                 <a:sym typeface="Public Sans"/>
               </a:rPr>
-              <a:t>&lt;&lt;</a:t>
+              <a:t>&lt;&lt;f10006&gt;&gt;</a:t>
             </a:r>
-            <a:r>
-              <a:rPr lang="en" sz="4200">
-                <a:solidFill>
-                  <a:schemeClr val="dk1"/>
-                </a:solidFill>
-                <a:latin typeface="Public Sans"/>
-                <a:ea typeface="Public Sans"/>
-                <a:cs typeface="Public Sans"/>
-                <a:sym typeface="Public Sans"/>
-              </a:rPr>
-              <a:t>Nunca estoy “en blanco” o atascado/a siempre puedo generar ideas</a:t>
-            </a:r>
-            <a:r>
-              <a:rPr lang="en" sz="4200">
-                <a:solidFill>
-                  <a:schemeClr val="dk1"/>
-                </a:solidFill>
-                <a:latin typeface="Public Sans"/>
-                <a:ea typeface="Public Sans"/>
-                <a:cs typeface="Public Sans"/>
-                <a:sym typeface="Public Sans"/>
-              </a:rPr>
-              <a:t>&gt;&gt;</a:t>
-            </a:r>
-            <a:endParaRPr sz="4200">
+            <a:endParaRPr sz="4200" dirty="0">
               <a:solidFill>
                 <a:schemeClr val="dk1"/>
               </a:solidFill>
@@ -10143,19 +10067,16 @@
             </a:endParaRPr>
           </a:p>
           <a:p>
-            <a:pPr indent="0" lvl="0" marL="0" rtl="0" algn="l">
-              <a:spcBef>
-                <a:spcPts val="0"/>
-              </a:spcBef>
-              <a:spcAft>
-                <a:spcPts val="0"/>
-              </a:spcAft>
-              <a:buNone/>
-            </a:pPr>
-            <a:r>
-              <a:t/>
-            </a:r>
-            <a:endParaRPr sz="3483">
+            <a:pPr marL="0" lvl="0" indent="0" algn="l" rtl="0">
+              <a:spcBef>
+                <a:spcPts val="0"/>
+              </a:spcBef>
+              <a:spcAft>
+                <a:spcPts val="0"/>
+              </a:spcAft>
+              <a:buNone/>
+            </a:pPr>
+            <a:endParaRPr sz="3483" dirty="0">
               <a:solidFill>
                 <a:schemeClr val="dk1"/>
               </a:solidFill>
@@ -10176,7 +10097,7 @@
 </file>
 
 <file path=ppt/slides/slide8.xml><?xml version="1.0" encoding="utf-8"?>
-<p:sld xmlns:a="http://schemas.openxmlformats.org/drawingml/2006/main" xmlns:r="http://schemas.openxmlformats.org/officeDocument/2006/relationships" xmlns:mc="http://schemas.openxmlformats.org/markup-compatibility/2006" xmlns:mv="urn:schemas-microsoft-com:mac:vml" xmlns:p="http://schemas.openxmlformats.org/presentationml/2006/main" xmlns:c="http://schemas.openxmlformats.org/drawingml/2006/chart" xmlns:dgm="http://schemas.openxmlformats.org/drawingml/2006/diagram" xmlns:o="urn:schemas-microsoft-com:office:office" xmlns:v="urn:schemas-microsoft-com:vml" xmlns:pvml="urn:schemas-microsoft-com:office:powerpoint" xmlns:com="http://schemas.openxmlformats.org/drawingml/2006/compatibility" xmlns:p14="http://schemas.microsoft.com/office/powerpoint/2010/main" xmlns:p15="http://schemas.microsoft.com/office/powerpoint/2012/main" xmlns:ahyp="http://schemas.microsoft.com/office/drawing/2018/hyperlinkcolor">
+<p:sld xmlns:a="http://schemas.openxmlformats.org/drawingml/2006/main" xmlns:r="http://schemas.openxmlformats.org/officeDocument/2006/relationships" xmlns:p="http://schemas.openxmlformats.org/presentationml/2006/main">
   <p:cSld>
     <p:bg>
       <p:bgPr>
@@ -10188,11 +10109,12 @@
             <a:fillRect/>
           </a:stretch>
         </a:blipFill>
+        <a:effectLst/>
       </p:bgPr>
     </p:bg>
     <p:spTree>
       <p:nvGrpSpPr>
-        <p:cNvPr id="87" name="Shape 87"/>
+        <p:cNvPr id="1" name="Shape 87"/>
         <p:cNvGrpSpPr/>
         <p:nvPr/>
       </p:nvGrpSpPr>
@@ -10224,12 +10146,12 @@
           </a:ln>
         </p:spPr>
         <p:txBody>
-          <a:bodyPr anchorCtr="0" anchor="t" bIns="91425" lIns="91425" spcFirstLastPara="1" rIns="91425" wrap="square" tIns="91425">
+          <a:bodyPr spcFirstLastPara="1" wrap="square" lIns="91425" tIns="91425" rIns="91425" bIns="91425" anchor="t" anchorCtr="0">
             <a:normAutofit/>
           </a:bodyPr>
           <a:lstStyle/>
           <a:p>
-            <a:pPr indent="0" lvl="0" marL="0" rtl="0" algn="l">
+            <a:pPr marL="0" lvl="0" indent="0" algn="l" rtl="0">
               <a:spcBef>
                 <a:spcPts val="0"/>
               </a:spcBef>
@@ -10239,7 +10161,7 @@
               <a:buNone/>
             </a:pPr>
             <a:r>
-              <a:rPr lang="en" sz="4200">
+              <a:rPr lang="en" sz="4200" dirty="0">
                 <a:solidFill>
                   <a:schemeClr val="dk1"/>
                 </a:solidFill>
@@ -10248,21 +10170,9 @@
                 <a:cs typeface="Public Sans"/>
                 <a:sym typeface="Public Sans"/>
               </a:rPr>
-              <a:t>&lt;&lt;¿Qué consejos, perspectivas y cuestiones del contexto tengo que tener en cuenta a la hora de tomar mi decisión?</a:t>
+              <a:t>&lt;&lt;f10007&gt;&gt;</a:t>
             </a:r>
-            <a:r>
-              <a:rPr lang="en" sz="4200">
-                <a:solidFill>
-                  <a:schemeClr val="dk1"/>
-                </a:solidFill>
-                <a:latin typeface="Public Sans"/>
-                <a:ea typeface="Public Sans"/>
-                <a:cs typeface="Public Sans"/>
-                <a:sym typeface="Public Sans"/>
-              </a:rPr>
-              <a:t>&gt;&gt;</a:t>
-            </a:r>
-            <a:endParaRPr sz="4200">
+            <a:endParaRPr sz="4200" dirty="0">
               <a:solidFill>
                 <a:schemeClr val="dk1"/>
               </a:solidFill>
@@ -10273,19 +10183,16 @@
             </a:endParaRPr>
           </a:p>
           <a:p>
-            <a:pPr indent="0" lvl="0" marL="0" rtl="0" algn="l">
-              <a:spcBef>
-                <a:spcPts val="0"/>
-              </a:spcBef>
-              <a:spcAft>
-                <a:spcPts val="0"/>
-              </a:spcAft>
-              <a:buNone/>
-            </a:pPr>
-            <a:r>
-              <a:t/>
-            </a:r>
-            <a:endParaRPr sz="3483">
+            <a:pPr marL="0" lvl="0" indent="0" algn="l" rtl="0">
+              <a:spcBef>
+                <a:spcPts val="0"/>
+              </a:spcBef>
+              <a:spcAft>
+                <a:spcPts val="0"/>
+              </a:spcAft>
+              <a:buNone/>
+            </a:pPr>
+            <a:endParaRPr sz="3483" dirty="0">
               <a:solidFill>
                 <a:schemeClr val="dk1"/>
               </a:solidFill>
@@ -10306,7 +10213,7 @@
 </file>
 
 <file path=ppt/slides/slide9.xml><?xml version="1.0" encoding="utf-8"?>
-<p:sld xmlns:a="http://schemas.openxmlformats.org/drawingml/2006/main" xmlns:r="http://schemas.openxmlformats.org/officeDocument/2006/relationships" xmlns:mc="http://schemas.openxmlformats.org/markup-compatibility/2006" xmlns:mv="urn:schemas-microsoft-com:mac:vml" xmlns:p="http://schemas.openxmlformats.org/presentationml/2006/main" xmlns:c="http://schemas.openxmlformats.org/drawingml/2006/chart" xmlns:dgm="http://schemas.openxmlformats.org/drawingml/2006/diagram" xmlns:o="urn:schemas-microsoft-com:office:office" xmlns:v="urn:schemas-microsoft-com:vml" xmlns:pvml="urn:schemas-microsoft-com:office:powerpoint" xmlns:com="http://schemas.openxmlformats.org/drawingml/2006/compatibility" xmlns:p14="http://schemas.microsoft.com/office/powerpoint/2010/main" xmlns:p15="http://schemas.microsoft.com/office/powerpoint/2012/main" xmlns:ahyp="http://schemas.microsoft.com/office/drawing/2018/hyperlinkcolor">
+<p:sld xmlns:a="http://schemas.openxmlformats.org/drawingml/2006/main" xmlns:r="http://schemas.openxmlformats.org/officeDocument/2006/relationships" xmlns:p="http://schemas.openxmlformats.org/presentationml/2006/main">
   <p:cSld>
     <p:bg>
       <p:bgPr>
@@ -10318,11 +10225,12 @@
             <a:fillRect/>
           </a:stretch>
         </a:blipFill>
+        <a:effectLst/>
       </p:bgPr>
     </p:bg>
     <p:spTree>
       <p:nvGrpSpPr>
-        <p:cNvPr id="92" name="Shape 92"/>
+        <p:cNvPr id="1" name="Shape 92"/>
         <p:cNvGrpSpPr/>
         <p:nvPr/>
       </p:nvGrpSpPr>
@@ -10343,7 +10251,288 @@
 </file>
 
 <file path=ppt/theme/theme1.xml><?xml version="1.0" encoding="utf-8"?>
-<a:theme xmlns:a="http://schemas.openxmlformats.org/drawingml/2006/main" xmlns:r="http://schemas.openxmlformats.org/officeDocument/2006/relationships">
+<a:theme xmlns:a="http://schemas.openxmlformats.org/drawingml/2006/main" name="Simple Light">
+  <a:themeElements>
+    <a:clrScheme name="Simple Light">
+      <a:dk1>
+        <a:srgbClr val="000000"/>
+      </a:dk1>
+      <a:lt1>
+        <a:srgbClr val="FFFFFF"/>
+      </a:lt1>
+      <a:dk2>
+        <a:srgbClr val="595959"/>
+      </a:dk2>
+      <a:lt2>
+        <a:srgbClr val="EEEEEE"/>
+      </a:lt2>
+      <a:accent1>
+        <a:srgbClr val="4285F4"/>
+      </a:accent1>
+      <a:accent2>
+        <a:srgbClr val="212121"/>
+      </a:accent2>
+      <a:accent3>
+        <a:srgbClr val="78909C"/>
+      </a:accent3>
+      <a:accent4>
+        <a:srgbClr val="FFAB40"/>
+      </a:accent4>
+      <a:accent5>
+        <a:srgbClr val="0097A7"/>
+      </a:accent5>
+      <a:accent6>
+        <a:srgbClr val="EEFF41"/>
+      </a:accent6>
+      <a:hlink>
+        <a:srgbClr val="0097A7"/>
+      </a:hlink>
+      <a:folHlink>
+        <a:srgbClr val="0097A7"/>
+      </a:folHlink>
+    </a:clrScheme>
+    <a:fontScheme name="Office">
+      <a:majorFont>
+        <a:latin typeface="Arial"/>
+        <a:ea typeface=""/>
+        <a:cs typeface=""/>
+        <a:font script="Jpan" typeface="ＭＳ Ｐゴシック"/>
+        <a:font script="Hang" typeface="맑은 고딕"/>
+        <a:font script="Hans" typeface="宋体"/>
+        <a:font script="Hant" typeface="新細明體"/>
+        <a:font script="Arab" typeface="Times New Roman"/>
+        <a:font script="Hebr" typeface="Times New Roman"/>
+        <a:font script="Thai" typeface="Angsana New"/>
+        <a:font script="Ethi" typeface="Nyala"/>
+        <a:font script="Beng" typeface="Vrinda"/>
+        <a:font script="Gujr" typeface="Shruti"/>
+        <a:font script="Khmr" typeface="MoolBoran"/>
+        <a:font script="Knda" typeface="Tunga"/>
+        <a:font script="Guru" typeface="Raavi"/>
+        <a:font script="Cans" typeface="Euphemia"/>
+        <a:font script="Cher" typeface="Plantagenet Cherokee"/>
+        <a:font script="Yiii" typeface="Microsoft Yi Baiti"/>
+        <a:font script="Tibt" typeface="Microsoft Himalaya"/>
+        <a:font script="Thaa" typeface="MV Boli"/>
+        <a:font script="Deva" typeface="Mangal"/>
+        <a:font script="Telu" typeface="Gautami"/>
+        <a:font script="Taml" typeface="Latha"/>
+        <a:font script="Syrc" typeface="Estrangelo Edessa"/>
+        <a:font script="Orya" typeface="Kalinga"/>
+        <a:font script="Mlym" typeface="Kartika"/>
+        <a:font script="Laoo" typeface="DokChampa"/>
+        <a:font script="Sinh" typeface="Iskoola Pota"/>
+        <a:font script="Mong" typeface="Mongolian Baiti"/>
+        <a:font script="Viet" typeface="Times New Roman"/>
+        <a:font script="Uigh" typeface="Microsoft Uighur"/>
+        <a:font script="Geor" typeface="Sylfaen"/>
+      </a:majorFont>
+      <a:minorFont>
+        <a:latin typeface="Arial"/>
+        <a:ea typeface=""/>
+        <a:cs typeface=""/>
+        <a:font script="Jpan" typeface="ＭＳ Ｐゴシック"/>
+        <a:font script="Hang" typeface="맑은 고딕"/>
+        <a:font script="Hans" typeface="宋体"/>
+        <a:font script="Hant" typeface="新細明體"/>
+        <a:font script="Arab" typeface="Arial"/>
+        <a:font script="Hebr" typeface="Arial"/>
+        <a:font script="Thai" typeface="Cordia New"/>
+        <a:font script="Ethi" typeface="Nyala"/>
+        <a:font script="Beng" typeface="Vrinda"/>
+        <a:font script="Gujr" typeface="Shruti"/>
+        <a:font script="Khmr" typeface="DaunPenh"/>
+        <a:font script="Knda" typeface="Tunga"/>
+        <a:font script="Guru" typeface="Raavi"/>
+        <a:font script="Cans" typeface="Euphemia"/>
+        <a:font script="Cher" typeface="Plantagenet Cherokee"/>
+        <a:font script="Yiii" typeface="Microsoft Yi Baiti"/>
+        <a:font script="Tibt" typeface="Microsoft Himalaya"/>
+        <a:font script="Thaa" typeface="MV Boli"/>
+        <a:font script="Deva" typeface="Mangal"/>
+        <a:font script="Telu" typeface="Gautami"/>
+        <a:font script="Taml" typeface="Latha"/>
+        <a:font script="Syrc" typeface="Estrangelo Edessa"/>
+        <a:font script="Orya" typeface="Kalinga"/>
+        <a:font script="Mlym" typeface="Kartika"/>
+        <a:font script="Laoo" typeface="DokChampa"/>
+        <a:font script="Sinh" typeface="Iskoola Pota"/>
+        <a:font script="Mong" typeface="Mongolian Baiti"/>
+        <a:font script="Viet" typeface="Arial"/>
+        <a:font script="Uigh" typeface="Microsoft Uighur"/>
+        <a:font script="Geor" typeface="Sylfaen"/>
+      </a:minorFont>
+    </a:fontScheme>
+    <a:fmtScheme name="Office">
+      <a:fillStyleLst>
+        <a:solidFill>
+          <a:schemeClr val="phClr"/>
+        </a:solidFill>
+        <a:gradFill rotWithShape="1">
+          <a:gsLst>
+            <a:gs pos="0">
+              <a:schemeClr val="phClr">
+                <a:tint val="50000"/>
+                <a:satMod val="300000"/>
+              </a:schemeClr>
+            </a:gs>
+            <a:gs pos="35000">
+              <a:schemeClr val="phClr">
+                <a:tint val="37000"/>
+                <a:satMod val="300000"/>
+              </a:schemeClr>
+            </a:gs>
+            <a:gs pos="100000">
+              <a:schemeClr val="phClr">
+                <a:tint val="15000"/>
+                <a:satMod val="350000"/>
+              </a:schemeClr>
+            </a:gs>
+          </a:gsLst>
+          <a:lin ang="16200000" scaled="1"/>
+        </a:gradFill>
+        <a:gradFill rotWithShape="1">
+          <a:gsLst>
+            <a:gs pos="0">
+              <a:schemeClr val="phClr">
+                <a:tint val="100000"/>
+                <a:shade val="100000"/>
+                <a:satMod val="130000"/>
+              </a:schemeClr>
+            </a:gs>
+            <a:gs pos="100000">
+              <a:schemeClr val="phClr">
+                <a:tint val="50000"/>
+                <a:shade val="100000"/>
+                <a:satMod val="350000"/>
+              </a:schemeClr>
+            </a:gs>
+          </a:gsLst>
+          <a:lin ang="16200000" scaled="0"/>
+        </a:gradFill>
+      </a:fillStyleLst>
+      <a:lnStyleLst>
+        <a:ln w="9525" cap="flat" cmpd="sng" algn="ctr">
+          <a:solidFill>
+            <a:schemeClr val="phClr">
+              <a:shade val="95000"/>
+              <a:satMod val="105000"/>
+            </a:schemeClr>
+          </a:solidFill>
+          <a:prstDash val="solid"/>
+        </a:ln>
+        <a:ln w="25400" cap="flat" cmpd="sng" algn="ctr">
+          <a:solidFill>
+            <a:schemeClr val="phClr"/>
+          </a:solidFill>
+          <a:prstDash val="solid"/>
+        </a:ln>
+        <a:ln w="38100" cap="flat" cmpd="sng" algn="ctr">
+          <a:solidFill>
+            <a:schemeClr val="phClr"/>
+          </a:solidFill>
+          <a:prstDash val="solid"/>
+        </a:ln>
+      </a:lnStyleLst>
+      <a:effectStyleLst>
+        <a:effectStyle>
+          <a:effectLst>
+            <a:outerShdw blurRad="40000" dist="20000" dir="5400000" rotWithShape="0">
+              <a:srgbClr val="000000">
+                <a:alpha val="38000"/>
+              </a:srgbClr>
+            </a:outerShdw>
+          </a:effectLst>
+        </a:effectStyle>
+        <a:effectStyle>
+          <a:effectLst>
+            <a:outerShdw blurRad="40000" dist="23000" dir="5400000" rotWithShape="0">
+              <a:srgbClr val="000000">
+                <a:alpha val="35000"/>
+              </a:srgbClr>
+            </a:outerShdw>
+          </a:effectLst>
+        </a:effectStyle>
+        <a:effectStyle>
+          <a:effectLst>
+            <a:outerShdw blurRad="40000" dist="23000" dir="5400000" rotWithShape="0">
+              <a:srgbClr val="000000">
+                <a:alpha val="35000"/>
+              </a:srgbClr>
+            </a:outerShdw>
+          </a:effectLst>
+          <a:scene3d>
+            <a:camera prst="orthographicFront">
+              <a:rot lat="0" lon="0" rev="0"/>
+            </a:camera>
+            <a:lightRig rig="threePt" dir="t">
+              <a:rot lat="0" lon="0" rev="1200000"/>
+            </a:lightRig>
+          </a:scene3d>
+          <a:sp3d>
+            <a:bevelT w="63500" h="25400"/>
+          </a:sp3d>
+        </a:effectStyle>
+      </a:effectStyleLst>
+      <a:bgFillStyleLst>
+        <a:solidFill>
+          <a:schemeClr val="phClr"/>
+        </a:solidFill>
+        <a:gradFill rotWithShape="1">
+          <a:gsLst>
+            <a:gs pos="0">
+              <a:schemeClr val="phClr">
+                <a:tint val="40000"/>
+                <a:satMod val="350000"/>
+              </a:schemeClr>
+            </a:gs>
+            <a:gs pos="40000">
+              <a:schemeClr val="phClr">
+                <a:tint val="45000"/>
+                <a:shade val="99000"/>
+                <a:satMod val="350000"/>
+              </a:schemeClr>
+            </a:gs>
+            <a:gs pos="100000">
+              <a:schemeClr val="phClr">
+                <a:shade val="20000"/>
+                <a:satMod val="255000"/>
+              </a:schemeClr>
+            </a:gs>
+          </a:gsLst>
+          <a:path path="circle">
+            <a:fillToRect l="50000" t="-80000" r="50000" b="180000"/>
+          </a:path>
+        </a:gradFill>
+        <a:gradFill rotWithShape="1">
+          <a:gsLst>
+            <a:gs pos="0">
+              <a:schemeClr val="phClr">
+                <a:tint val="80000"/>
+                <a:satMod val="300000"/>
+              </a:schemeClr>
+            </a:gs>
+            <a:gs pos="100000">
+              <a:schemeClr val="phClr">
+                <a:shade val="30000"/>
+                <a:satMod val="200000"/>
+              </a:schemeClr>
+            </a:gs>
+          </a:gsLst>
+          <a:path path="circle">
+            <a:fillToRect l="50000" t="50000" r="50000" b="50000"/>
+          </a:path>
+        </a:gradFill>
+      </a:bgFillStyleLst>
+    </a:fmtScheme>
+  </a:themeElements>
+  <a:objectDefaults/>
+  <a:extraClrSchemeLst/>
+</a:theme>
+</file>
+
+<file path=ppt/theme/theme2.xml><?xml version="1.0" encoding="utf-8"?>
+<a:theme xmlns:a="http://schemas.openxmlformats.org/drawingml/2006/main">
   <a:themeElements>
     <a:clrScheme name="Default">
       <a:dk1>
@@ -10618,284 +10807,7 @@
       </a:bgFillStyleLst>
     </a:fmtScheme>
   </a:themeElements>
-</a:theme>
-</file>
-
-<file path=ppt/theme/theme2.xml><?xml version="1.0" encoding="utf-8"?>
-<a:theme xmlns:a="http://schemas.openxmlformats.org/drawingml/2006/main" xmlns:r="http://schemas.openxmlformats.org/officeDocument/2006/relationships" name="Simple Light">
-  <a:themeElements>
-    <a:clrScheme name="Simple Light">
-      <a:dk1>
-        <a:srgbClr val="000000"/>
-      </a:dk1>
-      <a:lt1>
-        <a:srgbClr val="FFFFFF"/>
-      </a:lt1>
-      <a:dk2>
-        <a:srgbClr val="595959"/>
-      </a:dk2>
-      <a:lt2>
-        <a:srgbClr val="EEEEEE"/>
-      </a:lt2>
-      <a:accent1>
-        <a:srgbClr val="4285F4"/>
-      </a:accent1>
-      <a:accent2>
-        <a:srgbClr val="212121"/>
-      </a:accent2>
-      <a:accent3>
-        <a:srgbClr val="78909C"/>
-      </a:accent3>
-      <a:accent4>
-        <a:srgbClr val="FFAB40"/>
-      </a:accent4>
-      <a:accent5>
-        <a:srgbClr val="0097A7"/>
-      </a:accent5>
-      <a:accent6>
-        <a:srgbClr val="EEFF41"/>
-      </a:accent6>
-      <a:hlink>
-        <a:srgbClr val="0097A7"/>
-      </a:hlink>
-      <a:folHlink>
-        <a:srgbClr val="0097A7"/>
-      </a:folHlink>
-    </a:clrScheme>
-    <a:fontScheme name="Office">
-      <a:majorFont>
-        <a:latin typeface="Arial"/>
-        <a:ea typeface=""/>
-        <a:cs typeface=""/>
-        <a:font script="Jpan" typeface="ＭＳ Ｐゴシック"/>
-        <a:font script="Hang" typeface="맑은 고딕"/>
-        <a:font script="Hans" typeface="宋体"/>
-        <a:font script="Hant" typeface="新細明體"/>
-        <a:font script="Arab" typeface="Times New Roman"/>
-        <a:font script="Hebr" typeface="Times New Roman"/>
-        <a:font script="Thai" typeface="Angsana New"/>
-        <a:font script="Ethi" typeface="Nyala"/>
-        <a:font script="Beng" typeface="Vrinda"/>
-        <a:font script="Gujr" typeface="Shruti"/>
-        <a:font script="Khmr" typeface="MoolBoran"/>
-        <a:font script="Knda" typeface="Tunga"/>
-        <a:font script="Guru" typeface="Raavi"/>
-        <a:font script="Cans" typeface="Euphemia"/>
-        <a:font script="Cher" typeface="Plantagenet Cherokee"/>
-        <a:font script="Yiii" typeface="Microsoft Yi Baiti"/>
-        <a:font script="Tibt" typeface="Microsoft Himalaya"/>
-        <a:font script="Thaa" typeface="MV Boli"/>
-        <a:font script="Deva" typeface="Mangal"/>
-        <a:font script="Telu" typeface="Gautami"/>
-        <a:font script="Taml" typeface="Latha"/>
-        <a:font script="Syrc" typeface="Estrangelo Edessa"/>
-        <a:font script="Orya" typeface="Kalinga"/>
-        <a:font script="Mlym" typeface="Kartika"/>
-        <a:font script="Laoo" typeface="DokChampa"/>
-        <a:font script="Sinh" typeface="Iskoola Pota"/>
-        <a:font script="Mong" typeface="Mongolian Baiti"/>
-        <a:font script="Viet" typeface="Times New Roman"/>
-        <a:font script="Uigh" typeface="Microsoft Uighur"/>
-        <a:font script="Geor" typeface="Sylfaen"/>
-      </a:majorFont>
-      <a:minorFont>
-        <a:latin typeface="Arial"/>
-        <a:ea typeface=""/>
-        <a:cs typeface=""/>
-        <a:font script="Jpan" typeface="ＭＳ Ｐゴシック"/>
-        <a:font script="Hang" typeface="맑은 고딕"/>
-        <a:font script="Hans" typeface="宋体"/>
-        <a:font script="Hant" typeface="新細明體"/>
-        <a:font script="Arab" typeface="Arial"/>
-        <a:font script="Hebr" typeface="Arial"/>
-        <a:font script="Thai" typeface="Cordia New"/>
-        <a:font script="Ethi" typeface="Nyala"/>
-        <a:font script="Beng" typeface="Vrinda"/>
-        <a:font script="Gujr" typeface="Shruti"/>
-        <a:font script="Khmr" typeface="DaunPenh"/>
-        <a:font script="Knda" typeface="Tunga"/>
-        <a:font script="Guru" typeface="Raavi"/>
-        <a:font script="Cans" typeface="Euphemia"/>
-        <a:font script="Cher" typeface="Plantagenet Cherokee"/>
-        <a:font script="Yiii" typeface="Microsoft Yi Baiti"/>
-        <a:font script="Tibt" typeface="Microsoft Himalaya"/>
-        <a:font script="Thaa" typeface="MV Boli"/>
-        <a:font script="Deva" typeface="Mangal"/>
-        <a:font script="Telu" typeface="Gautami"/>
-        <a:font script="Taml" typeface="Latha"/>
-        <a:font script="Syrc" typeface="Estrangelo Edessa"/>
-        <a:font script="Orya" typeface="Kalinga"/>
-        <a:font script="Mlym" typeface="Kartika"/>
-        <a:font script="Laoo" typeface="DokChampa"/>
-        <a:font script="Sinh" typeface="Iskoola Pota"/>
-        <a:font script="Mong" typeface="Mongolian Baiti"/>
-        <a:font script="Viet" typeface="Arial"/>
-        <a:font script="Uigh" typeface="Microsoft Uighur"/>
-        <a:font script="Geor" typeface="Sylfaen"/>
-      </a:minorFont>
-    </a:fontScheme>
-    <a:fmtScheme name="Office">
-      <a:fillStyleLst>
-        <a:solidFill>
-          <a:schemeClr val="phClr"/>
-        </a:solidFill>
-        <a:gradFill rotWithShape="1">
-          <a:gsLst>
-            <a:gs pos="0">
-              <a:schemeClr val="phClr">
-                <a:tint val="50000"/>
-                <a:satMod val="300000"/>
-              </a:schemeClr>
-            </a:gs>
-            <a:gs pos="35000">
-              <a:schemeClr val="phClr">
-                <a:tint val="37000"/>
-                <a:satMod val="300000"/>
-              </a:schemeClr>
-            </a:gs>
-            <a:gs pos="100000">
-              <a:schemeClr val="phClr">
-                <a:tint val="15000"/>
-                <a:satMod val="350000"/>
-              </a:schemeClr>
-            </a:gs>
-          </a:gsLst>
-          <a:lin ang="16200000" scaled="1"/>
-        </a:gradFill>
-        <a:gradFill rotWithShape="1">
-          <a:gsLst>
-            <a:gs pos="0">
-              <a:schemeClr val="phClr">
-                <a:tint val="100000"/>
-                <a:shade val="100000"/>
-                <a:satMod val="130000"/>
-              </a:schemeClr>
-            </a:gs>
-            <a:gs pos="100000">
-              <a:schemeClr val="phClr">
-                <a:tint val="50000"/>
-                <a:shade val="100000"/>
-                <a:satMod val="350000"/>
-              </a:schemeClr>
-            </a:gs>
-          </a:gsLst>
-          <a:lin ang="16200000" scaled="0"/>
-        </a:gradFill>
-      </a:fillStyleLst>
-      <a:lnStyleLst>
-        <a:ln w="9525" cap="flat" cmpd="sng" algn="ctr">
-          <a:solidFill>
-            <a:schemeClr val="phClr">
-              <a:shade val="95000"/>
-              <a:satMod val="105000"/>
-            </a:schemeClr>
-          </a:solidFill>
-          <a:prstDash val="solid"/>
-        </a:ln>
-        <a:ln w="25400" cap="flat" cmpd="sng" algn="ctr">
-          <a:solidFill>
-            <a:schemeClr val="phClr"/>
-          </a:solidFill>
-          <a:prstDash val="solid"/>
-        </a:ln>
-        <a:ln w="38100" cap="flat" cmpd="sng" algn="ctr">
-          <a:solidFill>
-            <a:schemeClr val="phClr"/>
-          </a:solidFill>
-          <a:prstDash val="solid"/>
-        </a:ln>
-      </a:lnStyleLst>
-      <a:effectStyleLst>
-        <a:effectStyle>
-          <a:effectLst>
-            <a:outerShdw blurRad="40000" dist="20000" dir="5400000" rotWithShape="0">
-              <a:srgbClr val="000000">
-                <a:alpha val="38000"/>
-              </a:srgbClr>
-            </a:outerShdw>
-          </a:effectLst>
-        </a:effectStyle>
-        <a:effectStyle>
-          <a:effectLst>
-            <a:outerShdw blurRad="40000" dist="23000" dir="5400000" rotWithShape="0">
-              <a:srgbClr val="000000">
-                <a:alpha val="35000"/>
-              </a:srgbClr>
-            </a:outerShdw>
-          </a:effectLst>
-        </a:effectStyle>
-        <a:effectStyle>
-          <a:effectLst>
-            <a:outerShdw blurRad="40000" dist="23000" dir="5400000" rotWithShape="0">
-              <a:srgbClr val="000000">
-                <a:alpha val="35000"/>
-              </a:srgbClr>
-            </a:outerShdw>
-          </a:effectLst>
-          <a:scene3d>
-            <a:camera prst="orthographicFront">
-              <a:rot lat="0" lon="0" rev="0"/>
-            </a:camera>
-            <a:lightRig rig="threePt" dir="t">
-              <a:rot lat="0" lon="0" rev="1200000"/>
-            </a:lightRig>
-          </a:scene3d>
-          <a:sp3d>
-            <a:bevelT w="63500" h="25400"/>
-          </a:sp3d>
-        </a:effectStyle>
-      </a:effectStyleLst>
-      <a:bgFillStyleLst>
-        <a:solidFill>
-          <a:schemeClr val="phClr"/>
-        </a:solidFill>
-        <a:gradFill rotWithShape="1">
-          <a:gsLst>
-            <a:gs pos="0">
-              <a:schemeClr val="phClr">
-                <a:tint val="40000"/>
-                <a:satMod val="350000"/>
-              </a:schemeClr>
-            </a:gs>
-            <a:gs pos="40000">
-              <a:schemeClr val="phClr">
-                <a:tint val="45000"/>
-                <a:shade val="99000"/>
-                <a:satMod val="350000"/>
-              </a:schemeClr>
-            </a:gs>
-            <a:gs pos="100000">
-              <a:schemeClr val="phClr">
-                <a:shade val="20000"/>
-                <a:satMod val="255000"/>
-              </a:schemeClr>
-            </a:gs>
-          </a:gsLst>
-          <a:path path="circle">
-            <a:fillToRect l="50000" t="-80000" r="50000" b="180000"/>
-          </a:path>
-        </a:gradFill>
-        <a:gradFill rotWithShape="1">
-          <a:gsLst>
-            <a:gs pos="0">
-              <a:schemeClr val="phClr">
-                <a:tint val="80000"/>
-                <a:satMod val="300000"/>
-              </a:schemeClr>
-            </a:gs>
-            <a:gs pos="100000">
-              <a:schemeClr val="phClr">
-                <a:shade val="30000"/>
-                <a:satMod val="200000"/>
-              </a:schemeClr>
-            </a:gs>
-          </a:gsLst>
-          <a:path path="circle">
-            <a:fillToRect l="50000" t="50000" r="50000" b="50000"/>
-          </a:path>
-        </a:gradFill>
-      </a:bgFillStyleLst>
-    </a:fmtScheme>
-  </a:themeElements>
+  <a:objectDefaults/>
+  <a:extraClrSchemeLst/>
 </a:theme>
 </file>
--- a/assets/template_tu_contexto.pptx
+++ b/assets/template_tu_contexto.pptx
@@ -7002,7 +7002,7 @@
                 <a:cs typeface="Public Sans"/>
                 <a:sym typeface="Public Sans"/>
               </a:rPr>
-              <a:t>&lt;&lt;f10001&gt;&gt;</a:t>
+              <a:t>&lt;&lt;Nombre y Apellido&gt;&gt;</a:t>
             </a:r>
             <a:endParaRPr sz="3200" b="1" dirty="0">
               <a:solidFill>
